--- a/public/presentation.pptx
+++ b/public/presentation.pptx
@@ -1,45 +1,45 @@
 
 <file path=ppt/presentation.xml><?xml version="1.0" encoding="utf-8"?>
-<p:presentation xmlns:a="http://schemas.openxmlformats.org/drawingml/2006/main" xmlns:r="http://schemas.openxmlformats.org/officeDocument/2006/relationships" xmlns:p="http://schemas.openxmlformats.org/presentationml/2006/main" saveSubsetFonts="1" embedTrueTypeFonts="true">
+<p:presentation xmlns:a="http://schemas.openxmlformats.org/drawingml/2006/main" xmlns:r="http://schemas.openxmlformats.org/officeDocument/2006/relationships" xmlns:p="http://schemas.openxmlformats.org/presentationml/2006/main" embedTrueTypeFonts="1" saveSubsetFonts="1">
   <p:sldMasterIdLst>
     <p:sldMasterId id="2147483648" r:id="rId1"/>
   </p:sldMasterIdLst>
   <p:sldIdLst>
-    <p:sldId id="256" r:id="rId6"/>
-    <p:sldId id="257" r:id="rId7"/>
-    <p:sldId id="258" r:id="rId8"/>
-    <p:sldId id="259" r:id="rId9"/>
-    <p:sldId id="260" r:id="rId10"/>
-    <p:sldId id="261" r:id="rId11"/>
-    <p:sldId id="262" r:id="rId12"/>
-    <p:sldId id="263" r:id="rId13"/>
+    <p:sldId id="256" r:id="rId2"/>
+    <p:sldId id="257" r:id="rId3"/>
+    <p:sldId id="258" r:id="rId4"/>
+    <p:sldId id="259" r:id="rId5"/>
+    <p:sldId id="260" r:id="rId6"/>
+    <p:sldId id="261" r:id="rId7"/>
+    <p:sldId id="262" r:id="rId8"/>
+    <p:sldId id="263" r:id="rId9"/>
   </p:sldIdLst>
   <p:sldSz cx="18288000" cy="10287000"/>
   <p:notesSz cx="6858000" cy="9144000"/>
   <p:embeddedFontLst>
     <p:embeddedFont>
-      <p:font typeface="League Spartan" charset="1" panose="00000800000000000000"/>
+      <p:font typeface="HK Grotesk" panose="020B0604020202020204" charset="0"/>
+      <p:regular r:id="rId10"/>
+    </p:embeddedFont>
+    <p:embeddedFont>
+      <p:font typeface="HK Grotesk Bold" panose="020B0604020202020204" charset="0"/>
+      <p:regular r:id="rId11"/>
+    </p:embeddedFont>
+    <p:embeddedFont>
+      <p:font typeface="League Spartan" panose="020B0604020202020204" charset="0"/>
+      <p:regular r:id="rId12"/>
+    </p:embeddedFont>
+    <p:embeddedFont>
+      <p:font typeface="Montserrat" panose="020F0502020204030204" pitchFamily="2" charset="0"/>
+      <p:regular r:id="rId13"/>
+    </p:embeddedFont>
+    <p:embeddedFont>
+      <p:font typeface="Open Sans" panose="020F0502020204030204" pitchFamily="34" charset="0"/>
       <p:regular r:id="rId14"/>
     </p:embeddedFont>
     <p:embeddedFont>
-      <p:font typeface="Open Sans" charset="1" panose="00000000000000000000"/>
+      <p:font typeface="Open Sans Bold" panose="020B0604020202020204" charset="0"/>
       <p:regular r:id="rId15"/>
-    </p:embeddedFont>
-    <p:embeddedFont>
-      <p:font typeface="Open Sans Bold" charset="1" panose="00000000000000000000"/>
-      <p:regular r:id="rId16"/>
-    </p:embeddedFont>
-    <p:embeddedFont>
-      <p:font typeface="HK Grotesk" charset="1" panose="00000500000000000000"/>
-      <p:regular r:id="rId17"/>
-    </p:embeddedFont>
-    <p:embeddedFont>
-      <p:font typeface="HK Grotesk Bold" charset="1" panose="00000800000000000000"/>
-      <p:regular r:id="rId18"/>
-    </p:embeddedFont>
-    <p:embeddedFont>
-      <p:font typeface="Montserrat" charset="1" panose="00000500000000000000"/>
-      <p:regular r:id="rId19"/>
     </p:embeddedFont>
   </p:embeddedFontLst>
   <p:defaultTextStyle>
@@ -137,6 +137,22 @@
       </a:defRPr>
     </a:lvl9pPr>
   </p:defaultTextStyle>
+  <p:extLst>
+    <p:ext uri="{EFAFB233-063F-42B5-8137-9DF3F51BA10A}">
+      <p15:sldGuideLst xmlns:p15="http://schemas.microsoft.com/office/powerpoint/2012/main">
+        <p15:guide id="1" orient="horz" pos="2160">
+          <p15:clr>
+            <a:srgbClr val="A4A3A4"/>
+          </p15:clr>
+        </p15:guide>
+        <p15:guide id="2" pos="2880">
+          <p15:clr>
+            <a:srgbClr val="A4A3A4"/>
+          </p15:clr>
+        </p15:guide>
+      </p15:sldGuideLst>
+    </p:ext>
+  </p:extLst>
 </p:presentation>
 </file>
 
@@ -178,10 +194,9 @@
           <a:lstStyle/>
           <a:p>
             <a:r>
-              <a:rPr lang="en-US" smtClean="0"/>
+              <a:rPr lang="en-US"/>
               <a:t>Click to edit Master title style</a:t>
             </a:r>
-            <a:endParaRPr lang="en-US"/>
           </a:p>
         </p:txBody>
       </p:sp>
@@ -297,10 +312,9 @@
           </a:lstStyle>
           <a:p>
             <a:r>
-              <a:rPr lang="en-US" smtClean="0"/>
+              <a:rPr lang="en-US"/>
               <a:t>Click to edit Master subtitle style</a:t>
             </a:r>
-            <a:endParaRPr lang="en-US"/>
           </a:p>
         </p:txBody>
       </p:sp>
@@ -322,7 +336,7 @@
             <a:fld id="{1D8BD707-D9CF-40AE-B4C6-C98DA3205C09}" type="datetimeFigureOut">
               <a:rPr lang="en-US" smtClean="0"/>
               <a:pPr/>
-              <a:t>8/1/2011</a:t>
+              <a:t>1/4/2026</a:t>
             </a:fld>
             <a:endParaRPr lang="en-US"/>
           </a:p>
@@ -412,10 +426,9 @@
           <a:lstStyle/>
           <a:p>
             <a:r>
-              <a:rPr lang="en-US" smtClean="0"/>
+              <a:rPr lang="en-US"/>
               <a:t>Click to edit Master title style</a:t>
             </a:r>
-            <a:endParaRPr lang="en-US"/>
           </a:p>
         </p:txBody>
       </p:sp>
@@ -436,38 +449,37 @@
           <a:p>
             <a:pPr lvl="0"/>
             <a:r>
-              <a:rPr lang="en-US" smtClean="0"/>
+              <a:rPr lang="en-US"/>
               <a:t>Click to edit Master text styles</a:t>
             </a:r>
           </a:p>
           <a:p>
             <a:pPr lvl="1"/>
             <a:r>
-              <a:rPr lang="en-US" smtClean="0"/>
+              <a:rPr lang="en-US"/>
               <a:t>Second level</a:t>
             </a:r>
           </a:p>
           <a:p>
             <a:pPr lvl="2"/>
             <a:r>
-              <a:rPr lang="en-US" smtClean="0"/>
+              <a:rPr lang="en-US"/>
               <a:t>Third level</a:t>
             </a:r>
           </a:p>
           <a:p>
             <a:pPr lvl="3"/>
             <a:r>
-              <a:rPr lang="en-US" smtClean="0"/>
+              <a:rPr lang="en-US"/>
               <a:t>Fourth level</a:t>
             </a:r>
           </a:p>
           <a:p>
             <a:pPr lvl="4"/>
             <a:r>
-              <a:rPr lang="en-US" smtClean="0"/>
+              <a:rPr lang="en-US"/>
               <a:t>Fifth level</a:t>
             </a:r>
-            <a:endParaRPr lang="en-US"/>
           </a:p>
         </p:txBody>
       </p:sp>
@@ -489,7 +501,7 @@
             <a:fld id="{1D8BD707-D9CF-40AE-B4C6-C98DA3205C09}" type="datetimeFigureOut">
               <a:rPr lang="en-US" smtClean="0"/>
               <a:pPr/>
-              <a:t>8/1/2011</a:t>
+              <a:t>1/4/2026</a:t>
             </a:fld>
             <a:endParaRPr lang="en-US"/>
           </a:p>
@@ -584,10 +596,9 @@
           <a:lstStyle/>
           <a:p>
             <a:r>
-              <a:rPr lang="en-US" smtClean="0"/>
+              <a:rPr lang="en-US"/>
               <a:t>Click to edit Master title style</a:t>
             </a:r>
-            <a:endParaRPr lang="en-US"/>
           </a:p>
         </p:txBody>
       </p:sp>
@@ -613,38 +624,37 @@
           <a:p>
             <a:pPr lvl="0"/>
             <a:r>
-              <a:rPr lang="en-US" smtClean="0"/>
+              <a:rPr lang="en-US"/>
               <a:t>Click to edit Master text styles</a:t>
             </a:r>
           </a:p>
           <a:p>
             <a:pPr lvl="1"/>
             <a:r>
-              <a:rPr lang="en-US" smtClean="0"/>
+              <a:rPr lang="en-US"/>
               <a:t>Second level</a:t>
             </a:r>
           </a:p>
           <a:p>
             <a:pPr lvl="2"/>
             <a:r>
-              <a:rPr lang="en-US" smtClean="0"/>
+              <a:rPr lang="en-US"/>
               <a:t>Third level</a:t>
             </a:r>
           </a:p>
           <a:p>
             <a:pPr lvl="3"/>
             <a:r>
-              <a:rPr lang="en-US" smtClean="0"/>
+              <a:rPr lang="en-US"/>
               <a:t>Fourth level</a:t>
             </a:r>
           </a:p>
           <a:p>
             <a:pPr lvl="4"/>
             <a:r>
-              <a:rPr lang="en-US" smtClean="0"/>
+              <a:rPr lang="en-US"/>
               <a:t>Fifth level</a:t>
             </a:r>
-            <a:endParaRPr lang="en-US"/>
           </a:p>
         </p:txBody>
       </p:sp>
@@ -666,7 +676,7 @@
             <a:fld id="{1D8BD707-D9CF-40AE-B4C6-C98DA3205C09}" type="datetimeFigureOut">
               <a:rPr lang="en-US" smtClean="0"/>
               <a:pPr/>
-              <a:t>8/1/2011</a:t>
+              <a:t>1/4/2026</a:t>
             </a:fld>
             <a:endParaRPr lang="en-US"/>
           </a:p>
@@ -756,10 +766,9 @@
           <a:lstStyle/>
           <a:p>
             <a:r>
-              <a:rPr lang="en-US" smtClean="0"/>
+              <a:rPr lang="en-US"/>
               <a:t>Click to edit Master title style</a:t>
             </a:r>
-            <a:endParaRPr lang="en-US"/>
           </a:p>
         </p:txBody>
       </p:sp>
@@ -780,38 +789,37 @@
           <a:p>
             <a:pPr lvl="0"/>
             <a:r>
-              <a:rPr lang="en-US" smtClean="0"/>
+              <a:rPr lang="en-US"/>
               <a:t>Click to edit Master text styles</a:t>
             </a:r>
           </a:p>
           <a:p>
             <a:pPr lvl="1"/>
             <a:r>
-              <a:rPr lang="en-US" smtClean="0"/>
+              <a:rPr lang="en-US"/>
               <a:t>Second level</a:t>
             </a:r>
           </a:p>
           <a:p>
             <a:pPr lvl="2"/>
             <a:r>
-              <a:rPr lang="en-US" smtClean="0"/>
+              <a:rPr lang="en-US"/>
               <a:t>Third level</a:t>
             </a:r>
           </a:p>
           <a:p>
             <a:pPr lvl="3"/>
             <a:r>
-              <a:rPr lang="en-US" smtClean="0"/>
+              <a:rPr lang="en-US"/>
               <a:t>Fourth level</a:t>
             </a:r>
           </a:p>
           <a:p>
             <a:pPr lvl="4"/>
             <a:r>
-              <a:rPr lang="en-US" smtClean="0"/>
+              <a:rPr lang="en-US"/>
               <a:t>Fifth level</a:t>
             </a:r>
-            <a:endParaRPr lang="en-US"/>
           </a:p>
         </p:txBody>
       </p:sp>
@@ -833,7 +841,7 @@
             <a:fld id="{1D8BD707-D9CF-40AE-B4C6-C98DA3205C09}" type="datetimeFigureOut">
               <a:rPr lang="en-US" smtClean="0"/>
               <a:pPr/>
-              <a:t>8/1/2011</a:t>
+              <a:t>1/4/2026</a:t>
             </a:fld>
             <a:endParaRPr lang="en-US"/>
           </a:p>
@@ -932,10 +940,9 @@
           </a:lstStyle>
           <a:p>
             <a:r>
-              <a:rPr lang="en-US" smtClean="0"/>
+              <a:rPr lang="en-US"/>
               <a:t>Click to edit Master title style</a:t>
             </a:r>
-            <a:endParaRPr lang="en-US"/>
           </a:p>
         </p:txBody>
       </p:sp>
@@ -1052,7 +1059,7 @@
           <a:p>
             <a:pPr lvl="0"/>
             <a:r>
-              <a:rPr lang="en-US" smtClean="0"/>
+              <a:rPr lang="en-US"/>
               <a:t>Click to edit Master text styles</a:t>
             </a:r>
           </a:p>
@@ -1076,7 +1083,7 @@
             <a:fld id="{1D8BD707-D9CF-40AE-B4C6-C98DA3205C09}" type="datetimeFigureOut">
               <a:rPr lang="en-US" smtClean="0"/>
               <a:pPr/>
-              <a:t>8/1/2011</a:t>
+              <a:t>1/4/2026</a:t>
             </a:fld>
             <a:endParaRPr lang="en-US"/>
           </a:p>
@@ -1166,10 +1173,9 @@
           <a:lstStyle/>
           <a:p>
             <a:r>
-              <a:rPr lang="en-US" smtClean="0"/>
+              <a:rPr lang="en-US"/>
               <a:t>Click to edit Master title style</a:t>
             </a:r>
-            <a:endParaRPr lang="en-US"/>
           </a:p>
         </p:txBody>
       </p:sp>
@@ -1223,38 +1229,37 @@
           <a:p>
             <a:pPr lvl="0"/>
             <a:r>
-              <a:rPr lang="en-US" smtClean="0"/>
+              <a:rPr lang="en-US"/>
               <a:t>Click to edit Master text styles</a:t>
             </a:r>
           </a:p>
           <a:p>
             <a:pPr lvl="1"/>
             <a:r>
-              <a:rPr lang="en-US" smtClean="0"/>
+              <a:rPr lang="en-US"/>
               <a:t>Second level</a:t>
             </a:r>
           </a:p>
           <a:p>
             <a:pPr lvl="2"/>
             <a:r>
-              <a:rPr lang="en-US" smtClean="0"/>
+              <a:rPr lang="en-US"/>
               <a:t>Third level</a:t>
             </a:r>
           </a:p>
           <a:p>
             <a:pPr lvl="3"/>
             <a:r>
-              <a:rPr lang="en-US" smtClean="0"/>
+              <a:rPr lang="en-US"/>
               <a:t>Fourth level</a:t>
             </a:r>
           </a:p>
           <a:p>
             <a:pPr lvl="4"/>
             <a:r>
-              <a:rPr lang="en-US" smtClean="0"/>
+              <a:rPr lang="en-US"/>
               <a:t>Fifth level</a:t>
             </a:r>
-            <a:endParaRPr lang="en-US"/>
           </a:p>
         </p:txBody>
       </p:sp>
@@ -1308,38 +1313,37 @@
           <a:p>
             <a:pPr lvl="0"/>
             <a:r>
-              <a:rPr lang="en-US" smtClean="0"/>
+              <a:rPr lang="en-US"/>
               <a:t>Click to edit Master text styles</a:t>
             </a:r>
           </a:p>
           <a:p>
             <a:pPr lvl="1"/>
             <a:r>
-              <a:rPr lang="en-US" smtClean="0"/>
+              <a:rPr lang="en-US"/>
               <a:t>Second level</a:t>
             </a:r>
           </a:p>
           <a:p>
             <a:pPr lvl="2"/>
             <a:r>
-              <a:rPr lang="en-US" smtClean="0"/>
+              <a:rPr lang="en-US"/>
               <a:t>Third level</a:t>
             </a:r>
           </a:p>
           <a:p>
             <a:pPr lvl="3"/>
             <a:r>
-              <a:rPr lang="en-US" smtClean="0"/>
+              <a:rPr lang="en-US"/>
               <a:t>Fourth level</a:t>
             </a:r>
           </a:p>
           <a:p>
             <a:pPr lvl="4"/>
             <a:r>
-              <a:rPr lang="en-US" smtClean="0"/>
+              <a:rPr lang="en-US"/>
               <a:t>Fifth level</a:t>
             </a:r>
-            <a:endParaRPr lang="en-US"/>
           </a:p>
         </p:txBody>
       </p:sp>
@@ -1361,7 +1365,7 @@
             <a:fld id="{1D8BD707-D9CF-40AE-B4C6-C98DA3205C09}" type="datetimeFigureOut">
               <a:rPr lang="en-US" smtClean="0"/>
               <a:pPr/>
-              <a:t>8/1/2011</a:t>
+              <a:t>1/4/2026</a:t>
             </a:fld>
             <a:endParaRPr lang="en-US"/>
           </a:p>
@@ -1455,10 +1459,9 @@
           </a:lstStyle>
           <a:p>
             <a:r>
-              <a:rPr lang="en-US" smtClean="0"/>
+              <a:rPr lang="en-US"/>
               <a:t>Click to edit Master title style</a:t>
             </a:r>
-            <a:endParaRPr lang="en-US"/>
           </a:p>
         </p:txBody>
       </p:sp>
@@ -1521,7 +1524,7 @@
           <a:p>
             <a:pPr lvl="0"/>
             <a:r>
-              <a:rPr lang="en-US" smtClean="0"/>
+              <a:rPr lang="en-US"/>
               <a:t>Click to edit Master text styles</a:t>
             </a:r>
           </a:p>
@@ -1577,38 +1580,37 @@
           <a:p>
             <a:pPr lvl="0"/>
             <a:r>
-              <a:rPr lang="en-US" smtClean="0"/>
+              <a:rPr lang="en-US"/>
               <a:t>Click to edit Master text styles</a:t>
             </a:r>
           </a:p>
           <a:p>
             <a:pPr lvl="1"/>
             <a:r>
-              <a:rPr lang="en-US" smtClean="0"/>
+              <a:rPr lang="en-US"/>
               <a:t>Second level</a:t>
             </a:r>
           </a:p>
           <a:p>
             <a:pPr lvl="2"/>
             <a:r>
-              <a:rPr lang="en-US" smtClean="0"/>
+              <a:rPr lang="en-US"/>
               <a:t>Third level</a:t>
             </a:r>
           </a:p>
           <a:p>
             <a:pPr lvl="3"/>
             <a:r>
-              <a:rPr lang="en-US" smtClean="0"/>
+              <a:rPr lang="en-US"/>
               <a:t>Fourth level</a:t>
             </a:r>
           </a:p>
           <a:p>
             <a:pPr lvl="4"/>
             <a:r>
-              <a:rPr lang="en-US" smtClean="0"/>
+              <a:rPr lang="en-US"/>
               <a:t>Fifth level</a:t>
             </a:r>
-            <a:endParaRPr lang="en-US"/>
           </a:p>
         </p:txBody>
       </p:sp>
@@ -1671,7 +1673,7 @@
           <a:p>
             <a:pPr lvl="0"/>
             <a:r>
-              <a:rPr lang="en-US" smtClean="0"/>
+              <a:rPr lang="en-US"/>
               <a:t>Click to edit Master text styles</a:t>
             </a:r>
           </a:p>
@@ -1727,38 +1729,37 @@
           <a:p>
             <a:pPr lvl="0"/>
             <a:r>
-              <a:rPr lang="en-US" smtClean="0"/>
+              <a:rPr lang="en-US"/>
               <a:t>Click to edit Master text styles</a:t>
             </a:r>
           </a:p>
           <a:p>
             <a:pPr lvl="1"/>
             <a:r>
-              <a:rPr lang="en-US" smtClean="0"/>
+              <a:rPr lang="en-US"/>
               <a:t>Second level</a:t>
             </a:r>
           </a:p>
           <a:p>
             <a:pPr lvl="2"/>
             <a:r>
-              <a:rPr lang="en-US" smtClean="0"/>
+              <a:rPr lang="en-US"/>
               <a:t>Third level</a:t>
             </a:r>
           </a:p>
           <a:p>
             <a:pPr lvl="3"/>
             <a:r>
-              <a:rPr lang="en-US" smtClean="0"/>
+              <a:rPr lang="en-US"/>
               <a:t>Fourth level</a:t>
             </a:r>
           </a:p>
           <a:p>
             <a:pPr lvl="4"/>
             <a:r>
-              <a:rPr lang="en-US" smtClean="0"/>
+              <a:rPr lang="en-US"/>
               <a:t>Fifth level</a:t>
             </a:r>
-            <a:endParaRPr lang="en-US"/>
           </a:p>
         </p:txBody>
       </p:sp>
@@ -1780,7 +1781,7 @@
             <a:fld id="{1D8BD707-D9CF-40AE-B4C6-C98DA3205C09}" type="datetimeFigureOut">
               <a:rPr lang="en-US" smtClean="0"/>
               <a:pPr/>
-              <a:t>8/1/2011</a:t>
+              <a:t>1/4/2026</a:t>
             </a:fld>
             <a:endParaRPr lang="en-US"/>
           </a:p>
@@ -1870,10 +1871,9 @@
           <a:lstStyle/>
           <a:p>
             <a:r>
-              <a:rPr lang="en-US" smtClean="0"/>
+              <a:rPr lang="en-US"/>
               <a:t>Click to edit Master title style</a:t>
             </a:r>
-            <a:endParaRPr lang="en-US"/>
           </a:p>
         </p:txBody>
       </p:sp>
@@ -1895,7 +1895,7 @@
             <a:fld id="{1D8BD707-D9CF-40AE-B4C6-C98DA3205C09}" type="datetimeFigureOut">
               <a:rPr lang="en-US" smtClean="0"/>
               <a:pPr/>
-              <a:t>8/1/2011</a:t>
+              <a:t>1/4/2026</a:t>
             </a:fld>
             <a:endParaRPr lang="en-US"/>
           </a:p>
@@ -1987,7 +1987,7 @@
             <a:fld id="{1D8BD707-D9CF-40AE-B4C6-C98DA3205C09}" type="datetimeFigureOut">
               <a:rPr lang="en-US" smtClean="0"/>
               <a:pPr/>
-              <a:t>8/1/2011</a:t>
+              <a:t>1/4/2026</a:t>
             </a:fld>
             <a:endParaRPr lang="en-US"/>
           </a:p>
@@ -2086,10 +2086,9 @@
           </a:lstStyle>
           <a:p>
             <a:r>
-              <a:rPr lang="en-US" smtClean="0"/>
+              <a:rPr lang="en-US"/>
               <a:t>Click to edit Master title style</a:t>
             </a:r>
-            <a:endParaRPr lang="en-US"/>
           </a:p>
         </p:txBody>
       </p:sp>
@@ -2143,38 +2142,37 @@
           <a:p>
             <a:pPr lvl="0"/>
             <a:r>
-              <a:rPr lang="en-US" smtClean="0"/>
+              <a:rPr lang="en-US"/>
               <a:t>Click to edit Master text styles</a:t>
             </a:r>
           </a:p>
           <a:p>
             <a:pPr lvl="1"/>
             <a:r>
-              <a:rPr lang="en-US" smtClean="0"/>
+              <a:rPr lang="en-US"/>
               <a:t>Second level</a:t>
             </a:r>
           </a:p>
           <a:p>
             <a:pPr lvl="2"/>
             <a:r>
-              <a:rPr lang="en-US" smtClean="0"/>
+              <a:rPr lang="en-US"/>
               <a:t>Third level</a:t>
             </a:r>
           </a:p>
           <a:p>
             <a:pPr lvl="3"/>
             <a:r>
-              <a:rPr lang="en-US" smtClean="0"/>
+              <a:rPr lang="en-US"/>
               <a:t>Fourth level</a:t>
             </a:r>
           </a:p>
           <a:p>
             <a:pPr lvl="4"/>
             <a:r>
-              <a:rPr lang="en-US" smtClean="0"/>
+              <a:rPr lang="en-US"/>
               <a:t>Fifth level</a:t>
             </a:r>
-            <a:endParaRPr lang="en-US"/>
           </a:p>
         </p:txBody>
       </p:sp>
@@ -2237,7 +2235,7 @@
           <a:p>
             <a:pPr lvl="0"/>
             <a:r>
-              <a:rPr lang="en-US" smtClean="0"/>
+              <a:rPr lang="en-US"/>
               <a:t>Click to edit Master text styles</a:t>
             </a:r>
           </a:p>
@@ -2261,7 +2259,7 @@
             <a:fld id="{1D8BD707-D9CF-40AE-B4C6-C98DA3205C09}" type="datetimeFigureOut">
               <a:rPr lang="en-US" smtClean="0"/>
               <a:pPr/>
-              <a:t>8/1/2011</a:t>
+              <a:t>1/4/2026</a:t>
             </a:fld>
             <a:endParaRPr lang="en-US"/>
           </a:p>
@@ -2360,10 +2358,9 @@
           </a:lstStyle>
           <a:p>
             <a:r>
-              <a:rPr lang="en-US" smtClean="0"/>
+              <a:rPr lang="en-US"/>
               <a:t>Click to edit Master title style</a:t>
             </a:r>
-            <a:endParaRPr lang="en-US"/>
           </a:p>
         </p:txBody>
       </p:sp>
@@ -2487,7 +2484,7 @@
           <a:p>
             <a:pPr lvl="0"/>
             <a:r>
-              <a:rPr lang="en-US" smtClean="0"/>
+              <a:rPr lang="en-US"/>
               <a:t>Click to edit Master text styles</a:t>
             </a:r>
           </a:p>
@@ -2511,7 +2508,7 @@
             <a:fld id="{1D8BD707-D9CF-40AE-B4C6-C98DA3205C09}" type="datetimeFigureOut">
               <a:rPr lang="en-US" smtClean="0"/>
               <a:pPr/>
-              <a:t>8/1/2011</a:t>
+              <a:t>1/4/2026</a:t>
             </a:fld>
             <a:endParaRPr lang="en-US"/>
           </a:p>
@@ -2616,10 +2613,9 @@
           <a:lstStyle/>
           <a:p>
             <a:r>
-              <a:rPr lang="en-US" smtClean="0"/>
+              <a:rPr lang="en-US"/>
               <a:t>Click to edit Master title style</a:t>
             </a:r>
-            <a:endParaRPr lang="en-US"/>
           </a:p>
         </p:txBody>
       </p:sp>
@@ -2650,38 +2646,37 @@
           <a:p>
             <a:pPr lvl="0"/>
             <a:r>
-              <a:rPr lang="en-US" smtClean="0"/>
+              <a:rPr lang="en-US"/>
               <a:t>Click to edit Master text styles</a:t>
             </a:r>
           </a:p>
           <a:p>
             <a:pPr lvl="1"/>
             <a:r>
-              <a:rPr lang="en-US" smtClean="0"/>
+              <a:rPr lang="en-US"/>
               <a:t>Second level</a:t>
             </a:r>
           </a:p>
           <a:p>
             <a:pPr lvl="2"/>
             <a:r>
-              <a:rPr lang="en-US" smtClean="0"/>
+              <a:rPr lang="en-US"/>
               <a:t>Third level</a:t>
             </a:r>
           </a:p>
           <a:p>
             <a:pPr lvl="3"/>
             <a:r>
-              <a:rPr lang="en-US" smtClean="0"/>
+              <a:rPr lang="en-US"/>
               <a:t>Fourth level</a:t>
             </a:r>
           </a:p>
           <a:p>
             <a:pPr lvl="4"/>
             <a:r>
-              <a:rPr lang="en-US" smtClean="0"/>
+              <a:rPr lang="en-US"/>
               <a:t>Fifth level</a:t>
             </a:r>
-            <a:endParaRPr lang="en-US"/>
           </a:p>
         </p:txBody>
       </p:sp>
@@ -2721,7 +2716,7 @@
             <a:fld id="{1D8BD707-D9CF-40AE-B4C6-C98DA3205C09}" type="datetimeFigureOut">
               <a:rPr lang="en-US" smtClean="0"/>
               <a:pPr/>
-              <a:t>8/1/2011</a:t>
+              <a:t>1/4/2026</a:t>
             </a:fld>
             <a:endParaRPr lang="en-US"/>
           </a:p>
@@ -3076,13 +3071,14 @@
 </file>
 
 <file path=ppt/slides/slide1.xml><?xml version="1.0" encoding="utf-8"?>
-<p:sld xmlns:p="http://schemas.openxmlformats.org/presentationml/2006/main" xmlns:a="http://schemas.openxmlformats.org/drawingml/2006/main" xmlns:r="http://schemas.openxmlformats.org/officeDocument/2006/relationships">
+<p:sld xmlns:a="http://schemas.openxmlformats.org/drawingml/2006/main" xmlns:r="http://schemas.openxmlformats.org/officeDocument/2006/relationships" xmlns:p="http://schemas.openxmlformats.org/presentationml/2006/main">
   <p:cSld>
     <p:bg>
       <p:bgPr>
         <a:solidFill>
           <a:srgbClr val="023047"/>
         </a:solidFill>
+        <a:effectLst/>
       </p:bgPr>
     </p:bg>
     <p:spTree>
@@ -3101,60 +3097,74 @@
       </p:grpSpPr>
       <p:sp>
         <p:nvSpPr>
-          <p:cNvPr name="AutoShape 2" id="2"/>
+          <p:cNvPr id="2" name="AutoShape 2"/>
           <p:cNvSpPr/>
           <p:nvPr/>
         </p:nvSpPr>
         <p:spPr>
-          <a:xfrm flipV="true">
+          <a:xfrm flipV="1">
             <a:off x="1028700" y="1273490"/>
             <a:ext cx="16230600" cy="0"/>
           </a:xfrm>
           <a:prstGeom prst="line">
             <a:avLst/>
           </a:prstGeom>
-          <a:ln cap="flat" w="38100">
+          <a:ln w="38100" cap="flat">
             <a:solidFill>
               <a:srgbClr val="FFFFFF"/>
             </a:solidFill>
             <a:prstDash val="solid"/>
-            <a:headEnd type="none" len="sm" w="sm"/>
-            <a:tailEnd type="none" len="sm" w="sm"/>
+            <a:headEnd type="none" w="sm" len="sm"/>
+            <a:tailEnd type="none" w="sm" len="sm"/>
           </a:ln>
         </p:spPr>
-      </p:sp>
-      <p:sp>
-        <p:nvSpPr>
-          <p:cNvPr name="AutoShape 3" id="3"/>
+        <p:txBody>
+          <a:bodyPr/>
+          <a:lstStyle/>
+          <a:p>
+            <a:endParaRPr lang="fr-FR"/>
+          </a:p>
+        </p:txBody>
+      </p:sp>
+      <p:sp>
+        <p:nvSpPr>
+          <p:cNvPr id="3" name="AutoShape 3"/>
           <p:cNvSpPr/>
           <p:nvPr/>
         </p:nvSpPr>
         <p:spPr>
-          <a:xfrm flipV="true">
+          <a:xfrm flipV="1">
             <a:off x="1028700" y="9239250"/>
             <a:ext cx="16230600" cy="0"/>
           </a:xfrm>
           <a:prstGeom prst="line">
             <a:avLst/>
           </a:prstGeom>
-          <a:ln cap="flat" w="38100">
+          <a:ln w="38100" cap="flat">
             <a:solidFill>
               <a:srgbClr val="FFFFFF"/>
             </a:solidFill>
             <a:prstDash val="solid"/>
-            <a:headEnd type="none" len="sm" w="sm"/>
-            <a:tailEnd type="none" len="sm" w="sm"/>
+            <a:headEnd type="none" w="sm" len="sm"/>
+            <a:tailEnd type="none" w="sm" len="sm"/>
           </a:ln>
         </p:spPr>
-      </p:sp>
-      <p:sp>
-        <p:nvSpPr>
-          <p:cNvPr name="Freeform 4" id="4"/>
+        <p:txBody>
+          <a:bodyPr/>
+          <a:lstStyle/>
+          <a:p>
+            <a:endParaRPr lang="fr-FR"/>
+          </a:p>
+        </p:txBody>
+      </p:sp>
+      <p:sp>
+        <p:nvSpPr>
+          <p:cNvPr id="4" name="Freeform 4"/>
           <p:cNvSpPr/>
           <p:nvPr/>
         </p:nvSpPr>
         <p:spPr>
-          <a:xfrm flipH="false" flipV="false" rot="0">
+          <a:xfrm>
             <a:off x="14337215" y="1654490"/>
             <a:ext cx="4729929" cy="3843707"/>
           </a:xfrm>
@@ -3163,9 +3173,9 @@
             <a:gdLst/>
             <a:ahLst/>
             <a:cxnLst/>
-            <a:rect r="r" b="b" t="t" l="l"/>
+            <a:rect l="l" t="t" r="r" b="b"/>
             <a:pathLst>
-              <a:path h="3843707" w="4729929">
+              <a:path w="4729929" h="3843707">
                 <a:moveTo>
                   <a:pt x="0" y="0"/>
                 </a:moveTo>
@@ -3194,19 +3204,26 @@
               </a:extLst>
             </a:blip>
             <a:stretch>
-              <a:fillRect l="0" t="0" r="0" b="0"/>
+              <a:fillRect/>
             </a:stretch>
           </a:blipFill>
         </p:spPr>
-      </p:sp>
-      <p:sp>
-        <p:nvSpPr>
-          <p:cNvPr name="Freeform 5" id="5"/>
+        <p:txBody>
+          <a:bodyPr/>
+          <a:lstStyle/>
+          <a:p>
+            <a:endParaRPr lang="fr-FR"/>
+          </a:p>
+        </p:txBody>
+      </p:sp>
+      <p:sp>
+        <p:nvSpPr>
+          <p:cNvPr id="5" name="Freeform 5"/>
           <p:cNvSpPr/>
           <p:nvPr/>
         </p:nvSpPr>
         <p:spPr>
-          <a:xfrm flipH="false" flipV="false" rot="0">
+          <a:xfrm>
             <a:off x="-533878" y="7501170"/>
             <a:ext cx="5107990" cy="873002"/>
           </a:xfrm>
@@ -3215,9 +3232,9 @@
             <a:gdLst/>
             <a:ahLst/>
             <a:cxnLst/>
-            <a:rect r="r" b="b" t="t" l="l"/>
+            <a:rect l="l" t="t" r="r" b="b"/>
             <a:pathLst>
-              <a:path h="873002" w="5107990">
+              <a:path w="5107990" h="873002">
                 <a:moveTo>
                   <a:pt x="0" y="0"/>
                 </a:moveTo>
@@ -3246,19 +3263,26 @@
               </a:extLst>
             </a:blip>
             <a:stretch>
-              <a:fillRect l="0" t="0" r="0" b="0"/>
+              <a:fillRect/>
             </a:stretch>
           </a:blipFill>
         </p:spPr>
-      </p:sp>
-      <p:sp>
-        <p:nvSpPr>
-          <p:cNvPr name="TextBox 6" id="6"/>
-          <p:cNvSpPr txBox="true"/>
-          <p:nvPr/>
-        </p:nvSpPr>
-        <p:spPr>
-          <a:xfrm rot="0">
+        <p:txBody>
+          <a:bodyPr/>
+          <a:lstStyle/>
+          <a:p>
+            <a:endParaRPr lang="fr-FR"/>
+          </a:p>
+        </p:txBody>
+      </p:sp>
+      <p:sp>
+        <p:nvSpPr>
+          <p:cNvPr id="6" name="TextBox 6"/>
+          <p:cNvSpPr txBox="1"/>
+          <p:nvPr/>
+        </p:nvSpPr>
+        <p:spPr>
+          <a:xfrm>
             <a:off x="1294071" y="4175398"/>
             <a:ext cx="13466790" cy="3388965"/>
           </a:xfrm>
@@ -3267,7 +3291,7 @@
           </a:prstGeom>
         </p:spPr>
         <p:txBody>
-          <a:bodyPr anchor="t" rtlCol="false" tIns="0" lIns="0" bIns="0" rIns="0">
+          <a:bodyPr lIns="0" tIns="0" rIns="0" bIns="0" rtlCol="0" anchor="t">
             <a:spAutoFit/>
           </a:bodyPr>
           <a:lstStyle/>
@@ -3294,12 +3318,12 @@
       </p:sp>
       <p:sp>
         <p:nvSpPr>
-          <p:cNvPr name="TextBox 7" id="7"/>
-          <p:cNvSpPr txBox="true"/>
-          <p:nvPr/>
-        </p:nvSpPr>
-        <p:spPr>
-          <a:xfrm rot="0">
+          <p:cNvPr id="7" name="TextBox 7"/>
+          <p:cNvSpPr txBox="1"/>
+          <p:nvPr/>
+        </p:nvSpPr>
+        <p:spPr>
+          <a:xfrm>
             <a:off x="4862118" y="7331954"/>
             <a:ext cx="9475097" cy="388620"/>
           </a:xfrm>
@@ -3308,12 +3332,12 @@
           </a:prstGeom>
         </p:spPr>
         <p:txBody>
-          <a:bodyPr anchor="t" rtlCol="false" tIns="0" lIns="0" bIns="0" rIns="0">
+          <a:bodyPr lIns="0" tIns="0" rIns="0" bIns="0" rtlCol="0" anchor="t">
             <a:spAutoFit/>
           </a:bodyPr>
           <a:lstStyle/>
           <a:p>
-            <a:pPr algn="l" marL="0" indent="0" lvl="0">
+            <a:pPr marL="0" lvl="0" indent="0" algn="l">
               <a:lnSpc>
                 <a:spcPts val="3360"/>
               </a:lnSpc>
@@ -3335,12 +3359,12 @@
       </p:sp>
       <p:sp>
         <p:nvSpPr>
-          <p:cNvPr name="TextBox 8" id="8"/>
-          <p:cNvSpPr txBox="true"/>
-          <p:nvPr/>
-        </p:nvSpPr>
-        <p:spPr>
-          <a:xfrm rot="0">
+          <p:cNvPr id="8" name="TextBox 8"/>
+          <p:cNvSpPr txBox="1"/>
+          <p:nvPr/>
+        </p:nvSpPr>
+        <p:spPr>
+          <a:xfrm>
             <a:off x="1028700" y="711200"/>
             <a:ext cx="2558277" cy="299720"/>
           </a:xfrm>
@@ -3349,12 +3373,12 @@
           </a:prstGeom>
         </p:spPr>
         <p:txBody>
-          <a:bodyPr anchor="t" rtlCol="false" tIns="0" lIns="0" bIns="0" rIns="0">
+          <a:bodyPr lIns="0" tIns="0" rIns="0" bIns="0" rtlCol="0" anchor="t">
             <a:spAutoFit/>
           </a:bodyPr>
           <a:lstStyle/>
           <a:p>
-            <a:pPr algn="just" marL="0" indent="0" lvl="0">
+            <a:pPr marL="0" lvl="0" indent="0" algn="just">
               <a:lnSpc>
                 <a:spcPts val="2470"/>
               </a:lnSpc>
@@ -3379,12 +3403,12 @@
       </p:sp>
       <p:sp>
         <p:nvSpPr>
-          <p:cNvPr name="TextBox 9" id="9"/>
-          <p:cNvSpPr txBox="true"/>
-          <p:nvPr/>
-        </p:nvSpPr>
-        <p:spPr>
-          <a:xfrm rot="0">
+          <p:cNvPr id="9" name="TextBox 9"/>
+          <p:cNvSpPr txBox="1"/>
+          <p:nvPr/>
+        </p:nvSpPr>
+        <p:spPr>
+          <a:xfrm>
             <a:off x="13358767" y="719455"/>
             <a:ext cx="3900533" cy="299720"/>
           </a:xfrm>
@@ -3393,12 +3417,12 @@
           </a:prstGeom>
         </p:spPr>
         <p:txBody>
-          <a:bodyPr anchor="t" rtlCol="false" tIns="0" lIns="0" bIns="0" rIns="0">
+          <a:bodyPr lIns="0" tIns="0" rIns="0" bIns="0" rtlCol="0" anchor="t">
             <a:spAutoFit/>
           </a:bodyPr>
           <a:lstStyle/>
           <a:p>
-            <a:pPr algn="r" marL="0" indent="0" lvl="0">
+            <a:pPr marL="0" lvl="0" indent="0" algn="r">
               <a:lnSpc>
                 <a:spcPts val="2470"/>
               </a:lnSpc>
@@ -3423,12 +3447,12 @@
       </p:sp>
       <p:sp>
         <p:nvSpPr>
-          <p:cNvPr name="TextBox 10" id="10"/>
-          <p:cNvSpPr txBox="true"/>
-          <p:nvPr/>
-        </p:nvSpPr>
-        <p:spPr>
-          <a:xfrm rot="0">
+          <p:cNvPr id="10" name="TextBox 10"/>
+          <p:cNvSpPr txBox="1"/>
+          <p:nvPr/>
+        </p:nvSpPr>
+        <p:spPr>
+          <a:xfrm>
             <a:off x="15276002" y="9241634"/>
             <a:ext cx="4042796" cy="388620"/>
           </a:xfrm>
@@ -3437,12 +3461,12 @@
           </a:prstGeom>
         </p:spPr>
         <p:txBody>
-          <a:bodyPr anchor="t" rtlCol="false" tIns="0" lIns="0" bIns="0" rIns="0">
+          <a:bodyPr lIns="0" tIns="0" rIns="0" bIns="0" rtlCol="0" anchor="t">
             <a:spAutoFit/>
           </a:bodyPr>
           <a:lstStyle/>
           <a:p>
-            <a:pPr algn="l" marL="0" indent="0" lvl="0">
+            <a:pPr marL="0" lvl="0" indent="0" algn="l">
               <a:lnSpc>
                 <a:spcPts val="3360"/>
               </a:lnSpc>
@@ -3471,13 +3495,14 @@
 </file>
 
 <file path=ppt/slides/slide2.xml><?xml version="1.0" encoding="utf-8"?>
-<p:sld xmlns:p="http://schemas.openxmlformats.org/presentationml/2006/main" xmlns:a="http://schemas.openxmlformats.org/drawingml/2006/main" xmlns:r="http://schemas.openxmlformats.org/officeDocument/2006/relationships">
+<p:sld xmlns:a="http://schemas.openxmlformats.org/drawingml/2006/main" xmlns:r="http://schemas.openxmlformats.org/officeDocument/2006/relationships" xmlns:p="http://schemas.openxmlformats.org/presentationml/2006/main">
   <p:cSld>
     <p:bg>
       <p:bgPr>
         <a:solidFill>
           <a:srgbClr val="023047"/>
         </a:solidFill>
+        <a:effectLst/>
       </p:bgPr>
     </p:bg>
     <p:spTree>
@@ -3496,8 +3521,8 @@
       </p:grpSpPr>
       <p:sp>
         <p:nvSpPr>
-          <p:cNvPr name="TextBox 2" id="2"/>
-          <p:cNvSpPr txBox="true"/>
+          <p:cNvPr id="2" name="TextBox 2"/>
+          <p:cNvSpPr txBox="1"/>
           <p:nvPr/>
         </p:nvSpPr>
         <p:spPr>
@@ -3510,7 +3535,7 @@
           </a:prstGeom>
         </p:spPr>
         <p:txBody>
-          <a:bodyPr anchor="t" rtlCol="false" tIns="0" lIns="0" bIns="0" rIns="0">
+          <a:bodyPr lIns="0" tIns="0" rIns="0" bIns="0" rtlCol="0" anchor="t">
             <a:spAutoFit/>
           </a:bodyPr>
           <a:lstStyle/>
@@ -3537,12 +3562,12 @@
       </p:sp>
       <p:sp>
         <p:nvSpPr>
-          <p:cNvPr name="Freeform 3" id="3"/>
+          <p:cNvPr id="3" name="Freeform 3"/>
           <p:cNvSpPr/>
           <p:nvPr/>
         </p:nvSpPr>
         <p:spPr>
-          <a:xfrm flipH="false" flipV="false" rot="-5400000">
+          <a:xfrm rot="-5400000">
             <a:off x="-1305374" y="237368"/>
             <a:ext cx="5107990" cy="873002"/>
           </a:xfrm>
@@ -3551,9 +3576,9 @@
             <a:gdLst/>
             <a:ahLst/>
             <a:cxnLst/>
-            <a:rect r="r" b="b" t="t" l="l"/>
+            <a:rect l="l" t="t" r="r" b="b"/>
             <a:pathLst>
-              <a:path h="873002" w="5107990">
+              <a:path w="5107990" h="873002">
                 <a:moveTo>
                   <a:pt x="0" y="0"/>
                 </a:moveTo>
@@ -3582,19 +3607,26 @@
               </a:extLst>
             </a:blip>
             <a:stretch>
-              <a:fillRect l="0" t="0" r="0" b="0"/>
+              <a:fillRect/>
             </a:stretch>
           </a:blipFill>
         </p:spPr>
+        <p:txBody>
+          <a:bodyPr/>
+          <a:lstStyle/>
+          <a:p>
+            <a:endParaRPr lang="fr-FR"/>
+          </a:p>
+        </p:txBody>
       </p:sp>
       <p:grpSp>
         <p:nvGrpSpPr>
-          <p:cNvPr name="Group 4" id="4"/>
+          <p:cNvPr id="4" name="Group 4"/>
           <p:cNvGrpSpPr/>
           <p:nvPr/>
         </p:nvGrpSpPr>
         <p:grpSpPr>
-          <a:xfrm rot="0">
+          <a:xfrm>
             <a:off x="4223566" y="273154"/>
             <a:ext cx="9587201" cy="9740693"/>
             <a:chOff x="0" y="0"/>
@@ -3603,12 +3635,12 @@
         </p:grpSpPr>
         <p:sp>
           <p:nvSpPr>
-            <p:cNvPr name="Freeform 5" id="5"/>
+            <p:cNvPr id="5" name="Freeform 5"/>
             <p:cNvSpPr/>
             <p:nvPr/>
           </p:nvSpPr>
           <p:spPr>
-            <a:xfrm flipH="false" flipV="false" rot="0">
+            <a:xfrm>
               <a:off x="0" y="77681"/>
               <a:ext cx="4099181" cy="12909909"/>
             </a:xfrm>
@@ -3617,9 +3649,9 @@
               <a:gdLst/>
               <a:ahLst/>
               <a:cxnLst/>
-              <a:rect r="r" b="b" t="t" l="l"/>
+              <a:rect l="l" t="t" r="r" b="b"/>
               <a:pathLst>
-                <a:path h="12909909" w="4099181">
+                <a:path w="4099181" h="12909909">
                   <a:moveTo>
                     <a:pt x="0" y="0"/>
                   </a:moveTo>
@@ -3648,19 +3680,26 @@
                 </a:extLst>
               </a:blip>
               <a:stretch>
-                <a:fillRect l="0" t="-744" r="-217282" b="0"/>
+                <a:fillRect t="-744" r="-217282"/>
               </a:stretch>
             </a:blipFill>
           </p:spPr>
+          <p:txBody>
+            <a:bodyPr/>
+            <a:lstStyle/>
+            <a:p>
+              <a:endParaRPr lang="fr-FR"/>
+            </a:p>
+          </p:txBody>
         </p:sp>
         <p:sp>
           <p:nvSpPr>
-            <p:cNvPr name="Freeform 6" id="6"/>
+            <p:cNvPr id="6" name="Freeform 6"/>
             <p:cNvSpPr/>
             <p:nvPr/>
           </p:nvSpPr>
           <p:spPr>
-            <a:xfrm flipH="false" flipV="false" rot="0">
+            <a:xfrm>
               <a:off x="2889673" y="0"/>
               <a:ext cx="6737128" cy="12987590"/>
             </a:xfrm>
@@ -3669,9 +3708,9 @@
               <a:gdLst/>
               <a:ahLst/>
               <a:cxnLst/>
-              <a:rect r="r" b="b" t="t" l="l"/>
+              <a:rect l="l" t="t" r="r" b="b"/>
               <a:pathLst>
-                <a:path h="12987590" w="6737128">
+                <a:path w="6737128" h="12987590">
                   <a:moveTo>
                     <a:pt x="0" y="0"/>
                   </a:moveTo>
@@ -3700,19 +3739,26 @@
                 </a:extLst>
               </a:blip>
               <a:stretch>
-                <a:fillRect l="-17503" t="-141" r="-75545" b="0"/>
+                <a:fillRect l="-17503" t="-141" r="-75545"/>
               </a:stretch>
             </a:blipFill>
           </p:spPr>
+          <p:txBody>
+            <a:bodyPr/>
+            <a:lstStyle/>
+            <a:p>
+              <a:endParaRPr lang="fr-FR"/>
+            </a:p>
+          </p:txBody>
         </p:sp>
         <p:sp>
           <p:nvSpPr>
-            <p:cNvPr name="Freeform 7" id="7"/>
+            <p:cNvPr id="7" name="Freeform 7"/>
             <p:cNvSpPr/>
             <p:nvPr/>
           </p:nvSpPr>
           <p:spPr>
-            <a:xfrm flipH="false" flipV="false" rot="0">
+            <a:xfrm>
               <a:off x="4603024" y="12374732"/>
               <a:ext cx="237891" cy="63443"/>
             </a:xfrm>
@@ -3721,9 +3767,9 @@
               <a:gdLst/>
               <a:ahLst/>
               <a:cxnLst/>
-              <a:rect r="r" b="b" t="t" l="l"/>
+              <a:rect l="l" t="t" r="r" b="b"/>
               <a:pathLst>
-                <a:path h="63443" w="237891">
+                <a:path w="237891" h="63443">
                   <a:moveTo>
                     <a:pt x="0" y="0"/>
                   </a:moveTo>
@@ -3752,19 +3798,26 @@
                 </a:extLst>
               </a:blip>
               <a:stretch>
-                <a:fillRect l="-1423121" t="-20381848" r="-3939144" b="0"/>
+                <a:fillRect l="-1423121" t="-20381848" r="-3939144"/>
               </a:stretch>
             </a:blipFill>
           </p:spPr>
+          <p:txBody>
+            <a:bodyPr/>
+            <a:lstStyle/>
+            <a:p>
+              <a:endParaRPr lang="fr-FR"/>
+            </a:p>
+          </p:txBody>
         </p:sp>
         <p:sp>
           <p:nvSpPr>
-            <p:cNvPr name="Freeform 8" id="8"/>
+            <p:cNvPr id="8" name="Freeform 8"/>
             <p:cNvSpPr/>
             <p:nvPr/>
           </p:nvSpPr>
           <p:spPr>
-            <a:xfrm flipH="false" flipV="false" rot="0">
+            <a:xfrm>
               <a:off x="8956520" y="307928"/>
               <a:ext cx="3826415" cy="12667019"/>
             </a:xfrm>
@@ -3773,9 +3826,9 @@
               <a:gdLst/>
               <a:ahLst/>
               <a:cxnLst/>
-              <a:rect r="r" b="b" t="t" l="l"/>
+              <a:rect l="l" t="t" r="r" b="b"/>
               <a:pathLst>
-                <a:path h="12667019" w="3826415">
+                <a:path w="3826415" h="12667019">
                   <a:moveTo>
                     <a:pt x="0" y="0"/>
                   </a:moveTo>
@@ -3804,15 +3857,22 @@
                 </a:extLst>
               </a:blip>
               <a:stretch>
-                <a:fillRect l="-30790" t="-2583" r="-208802" b="0"/>
+                <a:fillRect l="-30790" t="-2583" r="-208802"/>
               </a:stretch>
             </a:blipFill>
           </p:spPr>
+          <p:txBody>
+            <a:bodyPr/>
+            <a:lstStyle/>
+            <a:p>
+              <a:endParaRPr lang="fr-FR"/>
+            </a:p>
+          </p:txBody>
         </p:sp>
       </p:grpSp>
       <p:sp>
         <p:nvSpPr>
-          <p:cNvPr name="AutoShape 9" id="9"/>
+          <p:cNvPr id="9" name="AutoShape 9"/>
           <p:cNvSpPr/>
           <p:nvPr/>
         </p:nvSpPr>
@@ -3824,24 +3884,31 @@
           <a:prstGeom prst="line">
             <a:avLst/>
           </a:prstGeom>
-          <a:ln cap="flat" w="38100">
+          <a:ln w="38100" cap="flat">
             <a:solidFill>
               <a:srgbClr val="023047"/>
             </a:solidFill>
             <a:prstDash val="solid"/>
-            <a:headEnd type="none" len="sm" w="sm"/>
-            <a:tailEnd type="none" len="sm" w="sm"/>
+            <a:headEnd type="none" w="sm" len="sm"/>
+            <a:tailEnd type="none" w="sm" len="sm"/>
           </a:ln>
         </p:spPr>
-      </p:sp>
-      <p:sp>
-        <p:nvSpPr>
-          <p:cNvPr name="Freeform 10" id="10"/>
+        <p:txBody>
+          <a:bodyPr/>
+          <a:lstStyle/>
+          <a:p>
+            <a:endParaRPr lang="fr-FR"/>
+          </a:p>
+        </p:txBody>
+      </p:sp>
+      <p:sp>
+        <p:nvSpPr>
+          <p:cNvPr id="10" name="Freeform 10"/>
           <p:cNvSpPr/>
           <p:nvPr/>
         </p:nvSpPr>
         <p:spPr>
-          <a:xfrm flipH="false" flipV="false" rot="0">
+          <a:xfrm>
             <a:off x="14003846" y="937180"/>
             <a:ext cx="4729929" cy="3843707"/>
           </a:xfrm>
@@ -3850,9 +3917,9 @@
             <a:gdLst/>
             <a:ahLst/>
             <a:cxnLst/>
-            <a:rect r="r" b="b" t="t" l="l"/>
+            <a:rect l="l" t="t" r="r" b="b"/>
             <a:pathLst>
-              <a:path h="3843707" w="4729929">
+              <a:path w="4729929" h="3843707">
                 <a:moveTo>
                   <a:pt x="0" y="0"/>
                 </a:moveTo>
@@ -3881,43 +3948,57 @@
               </a:extLst>
             </a:blip>
             <a:stretch>
-              <a:fillRect l="0" t="0" r="0" b="0"/>
+              <a:fillRect/>
             </a:stretch>
           </a:blipFill>
         </p:spPr>
-      </p:sp>
-      <p:sp>
-        <p:nvSpPr>
-          <p:cNvPr name="AutoShape 11" id="11"/>
+        <p:txBody>
+          <a:bodyPr/>
+          <a:lstStyle/>
+          <a:p>
+            <a:endParaRPr lang="fr-FR"/>
+          </a:p>
+        </p:txBody>
+      </p:sp>
+      <p:sp>
+        <p:nvSpPr>
+          <p:cNvPr id="11" name="AutoShape 11"/>
           <p:cNvSpPr/>
           <p:nvPr/>
         </p:nvSpPr>
         <p:spPr>
-          <a:xfrm flipV="true">
+          <a:xfrm flipV="1">
             <a:off x="1028700" y="9239250"/>
             <a:ext cx="16230600" cy="0"/>
           </a:xfrm>
           <a:prstGeom prst="line">
             <a:avLst/>
           </a:prstGeom>
-          <a:ln cap="flat" w="38100">
+          <a:ln w="38100" cap="flat">
             <a:solidFill>
               <a:srgbClr val="FFFFFF"/>
             </a:solidFill>
             <a:prstDash val="solid"/>
-            <a:headEnd type="none" len="sm" w="sm"/>
-            <a:tailEnd type="none" len="sm" w="sm"/>
+            <a:headEnd type="none" w="sm" len="sm"/>
+            <a:tailEnd type="none" w="sm" len="sm"/>
           </a:ln>
         </p:spPr>
-      </p:sp>
-      <p:sp>
-        <p:nvSpPr>
-          <p:cNvPr name="TextBox 12" id="12"/>
-          <p:cNvSpPr txBox="true"/>
-          <p:nvPr/>
-        </p:nvSpPr>
-        <p:spPr>
-          <a:xfrm rot="0">
+        <p:txBody>
+          <a:bodyPr/>
+          <a:lstStyle/>
+          <a:p>
+            <a:endParaRPr lang="fr-FR"/>
+          </a:p>
+        </p:txBody>
+      </p:sp>
+      <p:sp>
+        <p:nvSpPr>
+          <p:cNvPr id="12" name="TextBox 12"/>
+          <p:cNvSpPr txBox="1"/>
+          <p:nvPr/>
+        </p:nvSpPr>
+        <p:spPr>
+          <a:xfrm>
             <a:off x="13358767" y="9394534"/>
             <a:ext cx="3900533" cy="246380"/>
           </a:xfrm>
@@ -3926,7 +4007,7 @@
           </a:prstGeom>
         </p:spPr>
         <p:txBody>
-          <a:bodyPr anchor="t" rtlCol="false" tIns="0" lIns="0" bIns="0" rIns="0">
+          <a:bodyPr lIns="0" tIns="0" rIns="0" bIns="0" rtlCol="0" anchor="t">
             <a:spAutoFit/>
           </a:bodyPr>
           <a:lstStyle/>
@@ -3953,12 +4034,12 @@
       </p:sp>
       <p:sp>
         <p:nvSpPr>
-          <p:cNvPr name="TextBox 13" id="13"/>
-          <p:cNvSpPr txBox="true"/>
-          <p:nvPr/>
-        </p:nvSpPr>
-        <p:spPr>
-          <a:xfrm rot="0">
+          <p:cNvPr id="13" name="TextBox 13"/>
+          <p:cNvSpPr txBox="1"/>
+          <p:nvPr/>
+        </p:nvSpPr>
+        <p:spPr>
+          <a:xfrm>
             <a:off x="13358767" y="9394534"/>
             <a:ext cx="3900533" cy="246380"/>
           </a:xfrm>
@@ -3967,7 +4048,7 @@
           </a:prstGeom>
         </p:spPr>
         <p:txBody>
-          <a:bodyPr anchor="t" rtlCol="false" tIns="0" lIns="0" bIns="0" rIns="0">
+          <a:bodyPr lIns="0" tIns="0" rIns="0" bIns="0" rtlCol="0" anchor="t">
             <a:spAutoFit/>
           </a:bodyPr>
           <a:lstStyle/>
@@ -3994,21 +4075,21 @@
       </p:sp>
       <p:sp>
         <p:nvSpPr>
-          <p:cNvPr name="TextBox 14" id="14"/>
-          <p:cNvSpPr txBox="true"/>
-          <p:nvPr/>
-        </p:nvSpPr>
-        <p:spPr>
-          <a:xfrm rot="0">
-            <a:off x="3918937" y="5571124"/>
-            <a:ext cx="1271489" cy="634075"/>
+          <p:cNvPr id="14" name="TextBox 14"/>
+          <p:cNvSpPr txBox="1"/>
+          <p:nvPr/>
+        </p:nvSpPr>
+        <p:spPr>
+          <a:xfrm>
+            <a:off x="3826867" y="5571124"/>
+            <a:ext cx="1507133" cy="634075"/>
           </a:xfrm>
           <a:prstGeom prst="rect">
             <a:avLst/>
           </a:prstGeom>
         </p:spPr>
         <p:txBody>
-          <a:bodyPr anchor="t" rtlCol="false" tIns="0" lIns="0" bIns="0" rIns="0">
+          <a:bodyPr wrap="square" lIns="0" tIns="0" rIns="0" bIns="0" rtlCol="0" anchor="t">
             <a:spAutoFit/>
           </a:bodyPr>
           <a:lstStyle/>
@@ -4022,7 +4103,7 @@
               </a:spcBef>
             </a:pPr>
             <a:r>
-              <a:rPr lang="en-US" b="true" sz="4025" spc="201">
+              <a:rPr lang="en-US" sz="4025" b="1" spc="201" dirty="0">
                 <a:solidFill>
                   <a:srgbClr val="FFFFFF"/>
                 </a:solidFill>
@@ -4038,12 +4119,12 @@
       </p:sp>
       <p:sp>
         <p:nvSpPr>
-          <p:cNvPr name="TextBox 15" id="15"/>
-          <p:cNvSpPr txBox="true"/>
-          <p:nvPr/>
-        </p:nvSpPr>
-        <p:spPr>
-          <a:xfrm rot="0">
+          <p:cNvPr id="15" name="TextBox 15"/>
+          <p:cNvSpPr txBox="1"/>
+          <p:nvPr/>
+        </p:nvSpPr>
+        <p:spPr>
+          <a:xfrm>
             <a:off x="7650809" y="5571124"/>
             <a:ext cx="2732715" cy="634075"/>
           </a:xfrm>
@@ -4052,7 +4133,7 @@
           </a:prstGeom>
         </p:spPr>
         <p:txBody>
-          <a:bodyPr anchor="t" rtlCol="false" tIns="0" lIns="0" bIns="0" rIns="0">
+          <a:bodyPr lIns="0" tIns="0" rIns="0" bIns="0" rtlCol="0" anchor="t">
             <a:spAutoFit/>
           </a:bodyPr>
           <a:lstStyle/>
@@ -4066,7 +4147,7 @@
               </a:spcBef>
             </a:pPr>
             <a:r>
-              <a:rPr lang="en-US" b="true" sz="4025" spc="201">
+              <a:rPr lang="en-US" sz="4025" b="1" spc="201">
                 <a:solidFill>
                   <a:srgbClr val="FFFFFF"/>
                 </a:solidFill>
@@ -4082,13 +4163,13 @@
       </p:sp>
       <p:sp>
         <p:nvSpPr>
-          <p:cNvPr name="TextBox 16" id="16"/>
-          <p:cNvSpPr txBox="true"/>
-          <p:nvPr/>
-        </p:nvSpPr>
-        <p:spPr>
-          <a:xfrm rot="0">
-            <a:off x="3052778" y="6176624"/>
+          <p:cNvPr id="16" name="TextBox 16"/>
+          <p:cNvSpPr txBox="1"/>
+          <p:nvPr/>
+        </p:nvSpPr>
+        <p:spPr>
+          <a:xfrm>
+            <a:off x="3103651" y="6144620"/>
             <a:ext cx="3003806" cy="1142035"/>
           </a:xfrm>
           <a:prstGeom prst="rect">
@@ -4096,7 +4177,7 @@
           </a:prstGeom>
         </p:spPr>
         <p:txBody>
-          <a:bodyPr anchor="t" rtlCol="false" tIns="0" lIns="0" bIns="0" rIns="0">
+          <a:bodyPr lIns="0" tIns="0" rIns="0" bIns="0" rtlCol="0" anchor="t">
             <a:spAutoFit/>
           </a:bodyPr>
           <a:lstStyle/>
@@ -4110,7 +4191,7 @@
               </a:spcBef>
             </a:pPr>
             <a:r>
-              <a:rPr lang="en-US" sz="2325" spc="116">
+              <a:rPr lang="en-US" sz="2325" spc="116" dirty="0" err="1">
                 <a:solidFill>
                   <a:srgbClr val="FFFFFF"/>
                 </a:solidFill>
@@ -4119,19 +4200,79 @@
                 <a:cs typeface="Open Sans"/>
                 <a:sym typeface="Open Sans"/>
               </a:rPr>
-              <a:t>Baccalauréat Sciences Maths A (équivalent Bac S)</a:t>
-            </a:r>
-          </a:p>
-        </p:txBody>
-      </p:sp>
-      <p:sp>
-        <p:nvSpPr>
-          <p:cNvPr name="TextBox 17" id="17"/>
-          <p:cNvSpPr txBox="true"/>
-          <p:nvPr/>
-        </p:nvSpPr>
-        <p:spPr>
-          <a:xfrm rot="0">
+              <a:t>Baccalauréat</a:t>
+            </a:r>
+            <a:r>
+              <a:rPr lang="en-US" sz="2325" spc="116" dirty="0">
+                <a:solidFill>
+                  <a:srgbClr val="FFFFFF"/>
+                </a:solidFill>
+                <a:latin typeface="Open Sans"/>
+                <a:ea typeface="Open Sans"/>
+                <a:cs typeface="Open Sans"/>
+                <a:sym typeface="Open Sans"/>
+              </a:rPr>
+              <a:t> Sciences </a:t>
+            </a:r>
+            <a:r>
+              <a:rPr lang="en-US" sz="2325" spc="116" dirty="0" err="1">
+                <a:solidFill>
+                  <a:srgbClr val="FFFFFF"/>
+                </a:solidFill>
+                <a:latin typeface="Open Sans"/>
+                <a:ea typeface="Open Sans"/>
+                <a:cs typeface="Open Sans"/>
+                <a:sym typeface="Open Sans"/>
+              </a:rPr>
+              <a:t>Maths</a:t>
+            </a:r>
+            <a:r>
+              <a:rPr lang="en-US" sz="2325" spc="116" dirty="0">
+                <a:solidFill>
+                  <a:srgbClr val="FFFFFF"/>
+                </a:solidFill>
+                <a:latin typeface="Open Sans"/>
+                <a:ea typeface="Open Sans"/>
+                <a:cs typeface="Open Sans"/>
+                <a:sym typeface="Open Sans"/>
+              </a:rPr>
+              <a:t> A (</a:t>
+            </a:r>
+            <a:r>
+              <a:rPr lang="en-US" sz="2325" spc="116" dirty="0" err="1">
+                <a:solidFill>
+                  <a:srgbClr val="FFFFFF"/>
+                </a:solidFill>
+                <a:latin typeface="Open Sans"/>
+                <a:ea typeface="Open Sans"/>
+                <a:cs typeface="Open Sans"/>
+                <a:sym typeface="Open Sans"/>
+              </a:rPr>
+              <a:t>équivalent</a:t>
+            </a:r>
+            <a:r>
+              <a:rPr lang="en-US" sz="2325" spc="116" dirty="0">
+                <a:solidFill>
+                  <a:srgbClr val="FFFFFF"/>
+                </a:solidFill>
+                <a:latin typeface="Open Sans"/>
+                <a:ea typeface="Open Sans"/>
+                <a:cs typeface="Open Sans"/>
+                <a:sym typeface="Open Sans"/>
+              </a:rPr>
+              <a:t> Bac S)</a:t>
+            </a:r>
+          </a:p>
+        </p:txBody>
+      </p:sp>
+      <p:sp>
+        <p:nvSpPr>
+          <p:cNvPr id="17" name="TextBox 17"/>
+          <p:cNvSpPr txBox="1"/>
+          <p:nvPr/>
+        </p:nvSpPr>
+        <p:spPr>
+          <a:xfrm>
             <a:off x="7310889" y="6176624"/>
             <a:ext cx="3412556" cy="1142035"/>
           </a:xfrm>
@@ -4140,7 +4281,7 @@
           </a:prstGeom>
         </p:spPr>
         <p:txBody>
-          <a:bodyPr anchor="t" rtlCol="false" tIns="0" lIns="0" bIns="0" rIns="0">
+          <a:bodyPr lIns="0" tIns="0" rIns="0" bIns="0" rtlCol="0" anchor="t">
             <a:spAutoFit/>
           </a:bodyPr>
           <a:lstStyle/>
@@ -4151,7 +4292,7 @@
               </a:lnSpc>
             </a:pPr>
             <a:r>
-              <a:rPr lang="en-US" sz="2325" spc="116">
+              <a:rPr lang="en-US" sz="2325" spc="116" dirty="0">
                 <a:solidFill>
                   <a:srgbClr val="FFFFFF"/>
                 </a:solidFill>
@@ -4160,7 +4301,31 @@
                 <a:cs typeface="Open Sans"/>
                 <a:sym typeface="Open Sans"/>
               </a:rPr>
-              <a:t>Classes Préparatoires MPSI</a:t>
+              <a:t>Classes </a:t>
+            </a:r>
+            <a:r>
+              <a:rPr lang="en-US" sz="2325" spc="116" dirty="0" err="1">
+                <a:solidFill>
+                  <a:srgbClr val="FFFFFF"/>
+                </a:solidFill>
+                <a:latin typeface="Open Sans"/>
+                <a:ea typeface="Open Sans"/>
+                <a:cs typeface="Open Sans"/>
+                <a:sym typeface="Open Sans"/>
+              </a:rPr>
+              <a:t>Préparatoires</a:t>
+            </a:r>
+            <a:r>
+              <a:rPr lang="en-US" sz="2325" spc="116" dirty="0">
+                <a:solidFill>
+                  <a:srgbClr val="FFFFFF"/>
+                </a:solidFill>
+                <a:latin typeface="Open Sans"/>
+                <a:ea typeface="Open Sans"/>
+                <a:cs typeface="Open Sans"/>
+                <a:sym typeface="Open Sans"/>
+              </a:rPr>
+              <a:t> MPSI-MP</a:t>
             </a:r>
           </a:p>
           <a:p>
@@ -4173,7 +4338,7 @@
               </a:spcBef>
             </a:pPr>
             <a:r>
-              <a:rPr lang="en-US" sz="2325" spc="116">
+              <a:rPr lang="en-US" sz="2325" spc="116" dirty="0">
                 <a:solidFill>
                   <a:srgbClr val="FFFFFF"/>
                 </a:solidFill>
@@ -4189,12 +4354,12 @@
       </p:sp>
       <p:sp>
         <p:nvSpPr>
-          <p:cNvPr name="TextBox 18" id="18"/>
-          <p:cNvSpPr txBox="true"/>
-          <p:nvPr/>
-        </p:nvSpPr>
-        <p:spPr>
-          <a:xfrm rot="0">
+          <p:cNvPr id="18" name="TextBox 18"/>
+          <p:cNvSpPr txBox="1"/>
+          <p:nvPr/>
+        </p:nvSpPr>
+        <p:spPr>
+          <a:xfrm>
             <a:off x="11625970" y="5571124"/>
             <a:ext cx="3609251" cy="634075"/>
           </a:xfrm>
@@ -4203,7 +4368,7 @@
           </a:prstGeom>
         </p:spPr>
         <p:txBody>
-          <a:bodyPr anchor="t" rtlCol="false" tIns="0" lIns="0" bIns="0" rIns="0">
+          <a:bodyPr lIns="0" tIns="0" rIns="0" bIns="0" rtlCol="0" anchor="t">
             <a:spAutoFit/>
           </a:bodyPr>
           <a:lstStyle/>
@@ -4217,7 +4382,7 @@
               </a:spcBef>
             </a:pPr>
             <a:r>
-              <a:rPr lang="en-US" b="true" sz="4025" spc="201">
+              <a:rPr lang="en-US" sz="4025" b="1" spc="201">
                 <a:solidFill>
                   <a:srgbClr val="FFFFFF"/>
                 </a:solidFill>
@@ -4233,12 +4398,12 @@
       </p:sp>
       <p:sp>
         <p:nvSpPr>
-          <p:cNvPr name="TextBox 19" id="19"/>
-          <p:cNvSpPr txBox="true"/>
-          <p:nvPr/>
-        </p:nvSpPr>
-        <p:spPr>
-          <a:xfrm rot="0">
+          <p:cNvPr id="19" name="TextBox 19"/>
+          <p:cNvSpPr txBox="1"/>
+          <p:nvPr/>
+        </p:nvSpPr>
+        <p:spPr>
+          <a:xfrm>
             <a:off x="11742620" y="6176624"/>
             <a:ext cx="3502658" cy="1142035"/>
           </a:xfrm>
@@ -4247,7 +4412,7 @@
           </a:prstGeom>
         </p:spPr>
         <p:txBody>
-          <a:bodyPr anchor="t" rtlCol="false" tIns="0" lIns="0" bIns="0" rIns="0">
+          <a:bodyPr lIns="0" tIns="0" rIns="0" bIns="0" rtlCol="0" anchor="t">
             <a:spAutoFit/>
           </a:bodyPr>
           <a:lstStyle/>
@@ -4284,7 +4449,7 @@
 </file>
 
 <file path=ppt/slides/slide3.xml><?xml version="1.0" encoding="utf-8"?>
-<p:sld xmlns:p="http://schemas.openxmlformats.org/presentationml/2006/main" xmlns:a="http://schemas.openxmlformats.org/drawingml/2006/main" xmlns:r="http://schemas.openxmlformats.org/officeDocument/2006/relationships">
+<p:sld xmlns:a="http://schemas.openxmlformats.org/drawingml/2006/main" xmlns:r="http://schemas.openxmlformats.org/officeDocument/2006/relationships" xmlns:p="http://schemas.openxmlformats.org/presentationml/2006/main">
   <p:cSld>
     <p:spTree>
       <p:nvGrpSpPr>
@@ -4302,12 +4467,12 @@
       </p:grpSpPr>
       <p:sp>
         <p:nvSpPr>
-          <p:cNvPr name="Freeform 2" id="2"/>
+          <p:cNvPr id="2" name="Freeform 2"/>
           <p:cNvSpPr/>
           <p:nvPr/>
         </p:nvSpPr>
         <p:spPr>
-          <a:xfrm flipH="true" flipV="false" rot="0">
+          <a:xfrm flipH="1">
             <a:off x="-904080" y="-270389"/>
             <a:ext cx="4729929" cy="3843707"/>
           </a:xfrm>
@@ -4316,9 +4481,9 @@
             <a:gdLst/>
             <a:ahLst/>
             <a:cxnLst/>
-            <a:rect r="r" b="b" t="t" l="l"/>
+            <a:rect l="l" t="t" r="r" b="b"/>
             <a:pathLst>
-              <a:path h="3843707" w="4729929">
+              <a:path w="4729929" h="3843707">
                 <a:moveTo>
                   <a:pt x="4729929" y="0"/>
                 </a:moveTo>
@@ -4347,14 +4512,21 @@
               </a:extLst>
             </a:blip>
             <a:stretch>
-              <a:fillRect l="0" t="0" r="0" b="0"/>
+              <a:fillRect/>
             </a:stretch>
           </a:blipFill>
         </p:spPr>
-      </p:sp>
-      <p:sp>
-        <p:nvSpPr>
-          <p:cNvPr name="AutoShape 3" id="3"/>
+        <p:txBody>
+          <a:bodyPr/>
+          <a:lstStyle/>
+          <a:p>
+            <a:endParaRPr lang="fr-FR"/>
+          </a:p>
+        </p:txBody>
+      </p:sp>
+      <p:sp>
+        <p:nvSpPr>
+          <p:cNvPr id="3" name="AutoShape 3"/>
           <p:cNvSpPr/>
           <p:nvPr/>
         </p:nvSpPr>
@@ -4366,24 +4538,31 @@
           <a:prstGeom prst="line">
             <a:avLst/>
           </a:prstGeom>
-          <a:ln cap="flat" w="38100">
+          <a:ln w="38100" cap="flat">
             <a:solidFill>
               <a:srgbClr val="023047"/>
             </a:solidFill>
             <a:prstDash val="solid"/>
-            <a:headEnd type="none" len="sm" w="sm"/>
-            <a:tailEnd type="none" len="sm" w="sm"/>
+            <a:headEnd type="none" w="sm" len="sm"/>
+            <a:tailEnd type="none" w="sm" len="sm"/>
           </a:ln>
         </p:spPr>
-      </p:sp>
-      <p:sp>
-        <p:nvSpPr>
-          <p:cNvPr name="Freeform 4" id="4"/>
+        <p:txBody>
+          <a:bodyPr/>
+          <a:lstStyle/>
+          <a:p>
+            <a:endParaRPr lang="fr-FR"/>
+          </a:p>
+        </p:txBody>
+      </p:sp>
+      <p:sp>
+        <p:nvSpPr>
+          <p:cNvPr id="4" name="Freeform 4"/>
           <p:cNvSpPr/>
           <p:nvPr/>
         </p:nvSpPr>
         <p:spPr>
-          <a:xfrm flipH="false" flipV="false" rot="0">
+          <a:xfrm>
             <a:off x="3734339" y="2611711"/>
             <a:ext cx="5745399" cy="3018946"/>
           </a:xfrm>
@@ -4392,9 +4571,9 @@
             <a:gdLst/>
             <a:ahLst/>
             <a:cxnLst/>
-            <a:rect r="r" b="b" t="t" l="l"/>
+            <a:rect l="l" t="t" r="r" b="b"/>
             <a:pathLst>
-              <a:path h="3018946" w="5745399">
+              <a:path w="5745399" h="3018946">
                 <a:moveTo>
                   <a:pt x="0" y="0"/>
                 </a:moveTo>
@@ -4417,19 +4596,26 @@
           <a:blipFill>
             <a:blip r:embed="rId4"/>
             <a:stretch>
-              <a:fillRect l="0" t="0" r="0" b="0"/>
+              <a:fillRect/>
             </a:stretch>
           </a:blipFill>
         </p:spPr>
-      </p:sp>
-      <p:sp>
-        <p:nvSpPr>
-          <p:cNvPr name="Freeform 5" id="5"/>
+        <p:txBody>
+          <a:bodyPr/>
+          <a:lstStyle/>
+          <a:p>
+            <a:endParaRPr lang="fr-FR"/>
+          </a:p>
+        </p:txBody>
+      </p:sp>
+      <p:sp>
+        <p:nvSpPr>
+          <p:cNvPr id="5" name="Freeform 5"/>
           <p:cNvSpPr/>
           <p:nvPr/>
         </p:nvSpPr>
         <p:spPr>
-          <a:xfrm flipH="false" flipV="false" rot="0">
+          <a:xfrm>
             <a:off x="10843209" y="2639158"/>
             <a:ext cx="5745399" cy="3018946"/>
           </a:xfrm>
@@ -4438,9 +4624,9 @@
             <a:gdLst/>
             <a:ahLst/>
             <a:cxnLst/>
-            <a:rect r="r" b="b" t="t" l="l"/>
+            <a:rect l="l" t="t" r="r" b="b"/>
             <a:pathLst>
-              <a:path h="3018946" w="5745399">
+              <a:path w="5745399" h="3018946">
                 <a:moveTo>
                   <a:pt x="0" y="0"/>
                 </a:moveTo>
@@ -4469,19 +4655,26 @@
               </a:extLst>
             </a:blip>
             <a:stretch>
-              <a:fillRect l="0" t="0" r="0" b="0"/>
+              <a:fillRect/>
             </a:stretch>
           </a:blipFill>
         </p:spPr>
-      </p:sp>
-      <p:sp>
-        <p:nvSpPr>
-          <p:cNvPr name="TextBox 6" id="6"/>
-          <p:cNvSpPr txBox="true"/>
-          <p:nvPr/>
-        </p:nvSpPr>
-        <p:spPr>
-          <a:xfrm rot="0">
+        <p:txBody>
+          <a:bodyPr/>
+          <a:lstStyle/>
+          <a:p>
+            <a:endParaRPr lang="fr-FR"/>
+          </a:p>
+        </p:txBody>
+      </p:sp>
+      <p:sp>
+        <p:nvSpPr>
+          <p:cNvPr id="6" name="TextBox 6"/>
+          <p:cNvSpPr txBox="1"/>
+          <p:nvPr/>
+        </p:nvSpPr>
+        <p:spPr>
+          <a:xfrm>
             <a:off x="3398601" y="592900"/>
             <a:ext cx="14614608" cy="862076"/>
           </a:xfrm>
@@ -4490,7 +4683,7 @@
           </a:prstGeom>
         </p:spPr>
         <p:txBody>
-          <a:bodyPr anchor="t" rtlCol="false" tIns="0" lIns="0" bIns="0" rIns="0">
+          <a:bodyPr lIns="0" tIns="0" rIns="0" bIns="0" rtlCol="0" anchor="t">
             <a:spAutoFit/>
           </a:bodyPr>
           <a:lstStyle/>
@@ -4517,12 +4710,12 @@
       </p:sp>
       <p:sp>
         <p:nvSpPr>
-          <p:cNvPr name="TextBox 7" id="7"/>
-          <p:cNvSpPr txBox="true"/>
-          <p:nvPr/>
-        </p:nvSpPr>
-        <p:spPr>
-          <a:xfrm rot="0">
+          <p:cNvPr id="7" name="TextBox 7"/>
+          <p:cNvSpPr txBox="1"/>
+          <p:nvPr/>
+        </p:nvSpPr>
+        <p:spPr>
+          <a:xfrm>
             <a:off x="13358767" y="9394534"/>
             <a:ext cx="3900533" cy="246380"/>
           </a:xfrm>
@@ -4531,7 +4724,7 @@
           </a:prstGeom>
         </p:spPr>
         <p:txBody>
-          <a:bodyPr anchor="t" rtlCol="false" tIns="0" lIns="0" bIns="0" rIns="0">
+          <a:bodyPr lIns="0" tIns="0" rIns="0" bIns="0" rtlCol="0" anchor="t">
             <a:spAutoFit/>
           </a:bodyPr>
           <a:lstStyle/>
@@ -4558,12 +4751,12 @@
       </p:sp>
       <p:sp>
         <p:nvSpPr>
-          <p:cNvPr name="TextBox 8" id="8"/>
-          <p:cNvSpPr txBox="true"/>
-          <p:nvPr/>
-        </p:nvSpPr>
-        <p:spPr>
-          <a:xfrm rot="0">
+          <p:cNvPr id="8" name="TextBox 8"/>
+          <p:cNvSpPr txBox="1"/>
+          <p:nvPr/>
+        </p:nvSpPr>
+        <p:spPr>
+          <a:xfrm>
             <a:off x="4687143" y="1285255"/>
             <a:ext cx="11051489" cy="541919"/>
           </a:xfrm>
@@ -4572,7 +4765,7 @@
           </a:prstGeom>
         </p:spPr>
         <p:txBody>
-          <a:bodyPr anchor="t" rtlCol="false" tIns="0" lIns="0" bIns="0" rIns="0">
+          <a:bodyPr lIns="0" tIns="0" rIns="0" bIns="0" rtlCol="0" anchor="t">
             <a:spAutoFit/>
           </a:bodyPr>
           <a:lstStyle/>
@@ -4599,12 +4792,12 @@
       </p:sp>
       <p:sp>
         <p:nvSpPr>
-          <p:cNvPr name="Freeform 9" id="9"/>
+          <p:cNvPr id="9" name="Freeform 9"/>
           <p:cNvSpPr/>
           <p:nvPr/>
         </p:nvSpPr>
         <p:spPr>
-          <a:xfrm flipH="false" flipV="false" rot="0">
+          <a:xfrm>
             <a:off x="3734339" y="5915955"/>
             <a:ext cx="5745399" cy="3018946"/>
           </a:xfrm>
@@ -4613,9 +4806,9 @@
             <a:gdLst/>
             <a:ahLst/>
             <a:cxnLst/>
-            <a:rect r="r" b="b" t="t" l="l"/>
+            <a:rect l="l" t="t" r="r" b="b"/>
             <a:pathLst>
-              <a:path h="3018946" w="5745399">
+              <a:path w="5745399" h="3018946">
                 <a:moveTo>
                   <a:pt x="0" y="0"/>
                 </a:moveTo>
@@ -4644,19 +4837,26 @@
               </a:extLst>
             </a:blip>
             <a:stretch>
-              <a:fillRect l="0" t="0" r="0" b="0"/>
+              <a:fillRect/>
             </a:stretch>
           </a:blipFill>
         </p:spPr>
-      </p:sp>
-      <p:sp>
-        <p:nvSpPr>
-          <p:cNvPr name="Freeform 10" id="10"/>
+        <p:txBody>
+          <a:bodyPr/>
+          <a:lstStyle/>
+          <a:p>
+            <a:endParaRPr lang="fr-FR"/>
+          </a:p>
+        </p:txBody>
+      </p:sp>
+      <p:sp>
+        <p:nvSpPr>
+          <p:cNvPr id="10" name="Freeform 10"/>
           <p:cNvSpPr/>
           <p:nvPr/>
         </p:nvSpPr>
         <p:spPr>
-          <a:xfrm flipH="false" flipV="false" rot="0">
+          <a:xfrm>
             <a:off x="10843209" y="5929679"/>
             <a:ext cx="5745399" cy="3018946"/>
           </a:xfrm>
@@ -4665,9 +4865,9 @@
             <a:gdLst/>
             <a:ahLst/>
             <a:cxnLst/>
-            <a:rect r="r" b="b" t="t" l="l"/>
+            <a:rect l="l" t="t" r="r" b="b"/>
             <a:pathLst>
-              <a:path h="3018946" w="5745399">
+              <a:path w="5745399" h="3018946">
                 <a:moveTo>
                   <a:pt x="0" y="0"/>
                 </a:moveTo>
@@ -4690,19 +4890,26 @@
           <a:blipFill>
             <a:blip r:embed="rId4"/>
             <a:stretch>
-              <a:fillRect l="0" t="0" r="0" b="0"/>
+              <a:fillRect/>
             </a:stretch>
           </a:blipFill>
         </p:spPr>
-      </p:sp>
-      <p:sp>
-        <p:nvSpPr>
-          <p:cNvPr name="TextBox 11" id="11"/>
-          <p:cNvSpPr txBox="true"/>
-          <p:nvPr/>
-        </p:nvSpPr>
-        <p:spPr>
-          <a:xfrm rot="0">
+        <p:txBody>
+          <a:bodyPr/>
+          <a:lstStyle/>
+          <a:p>
+            <a:endParaRPr lang="fr-FR"/>
+          </a:p>
+        </p:txBody>
+      </p:sp>
+      <p:sp>
+        <p:nvSpPr>
+          <p:cNvPr id="11" name="TextBox 11"/>
+          <p:cNvSpPr txBox="1"/>
+          <p:nvPr/>
+        </p:nvSpPr>
+        <p:spPr>
+          <a:xfrm>
             <a:off x="5879933" y="2834813"/>
             <a:ext cx="1454211" cy="437374"/>
           </a:xfrm>
@@ -4711,7 +4918,7 @@
           </a:prstGeom>
         </p:spPr>
         <p:txBody>
-          <a:bodyPr anchor="t" rtlCol="false" tIns="0" lIns="0" bIns="0" rIns="0">
+          <a:bodyPr lIns="0" tIns="0" rIns="0" bIns="0" rtlCol="0" anchor="t">
             <a:spAutoFit/>
           </a:bodyPr>
           <a:lstStyle/>
@@ -4738,12 +4945,12 @@
       </p:sp>
       <p:sp>
         <p:nvSpPr>
-          <p:cNvPr name="TextBox 12" id="12"/>
-          <p:cNvSpPr txBox="true"/>
-          <p:nvPr/>
-        </p:nvSpPr>
-        <p:spPr>
-          <a:xfrm rot="0">
+          <p:cNvPr id="12" name="TextBox 12"/>
+          <p:cNvSpPr txBox="1"/>
+          <p:nvPr/>
+        </p:nvSpPr>
+        <p:spPr>
+          <a:xfrm>
             <a:off x="4099263" y="3190047"/>
             <a:ext cx="4780053" cy="1953453"/>
           </a:xfrm>
@@ -4752,12 +4959,12 @@
           </a:prstGeom>
         </p:spPr>
         <p:txBody>
-          <a:bodyPr anchor="t" rtlCol="false" tIns="0" lIns="0" bIns="0" rIns="0">
+          <a:bodyPr lIns="0" tIns="0" rIns="0" bIns="0" rtlCol="0" anchor="t">
             <a:spAutoFit/>
           </a:bodyPr>
           <a:lstStyle/>
           <a:p>
-            <a:pPr algn="l" marL="347679" indent="-173839" lvl="1">
+            <a:pPr marL="347679" lvl="1" indent="-173839" algn="l">
               <a:lnSpc>
                 <a:spcPts val="4025"/>
               </a:lnSpc>
@@ -4778,7 +4985,7 @@
             </a:r>
           </a:p>
           <a:p>
-            <a:pPr algn="l" marL="347679" indent="-173839" lvl="1">
+            <a:pPr marL="347679" lvl="1" indent="-173839" algn="l">
               <a:lnSpc>
                 <a:spcPts val="4025"/>
               </a:lnSpc>
@@ -4799,7 +5006,7 @@
             </a:r>
           </a:p>
           <a:p>
-            <a:pPr algn="l" marL="347679" indent="-173839" lvl="1">
+            <a:pPr marL="347679" lvl="1" indent="-173839" algn="l">
               <a:lnSpc>
                 <a:spcPts val="4025"/>
               </a:lnSpc>
@@ -4820,7 +5027,7 @@
             </a:r>
           </a:p>
           <a:p>
-            <a:pPr algn="l" marL="347679" indent="-173839" lvl="1">
+            <a:pPr marL="347679" lvl="1" indent="-173839" algn="l">
               <a:lnSpc>
                 <a:spcPts val="4025"/>
               </a:lnSpc>
@@ -4844,12 +5051,12 @@
       </p:sp>
       <p:sp>
         <p:nvSpPr>
-          <p:cNvPr name="TextBox 13" id="13"/>
-          <p:cNvSpPr txBox="true"/>
-          <p:nvPr/>
-        </p:nvSpPr>
-        <p:spPr>
-          <a:xfrm rot="0">
+          <p:cNvPr id="13" name="TextBox 13"/>
+          <p:cNvSpPr txBox="1"/>
+          <p:nvPr/>
+        </p:nvSpPr>
+        <p:spPr>
+          <a:xfrm>
             <a:off x="12614668" y="2841175"/>
             <a:ext cx="2202481" cy="431012"/>
           </a:xfrm>
@@ -4858,7 +5065,7 @@
           </a:prstGeom>
         </p:spPr>
         <p:txBody>
-          <a:bodyPr anchor="t" rtlCol="false" tIns="0" lIns="0" bIns="0" rIns="0">
+          <a:bodyPr lIns="0" tIns="0" rIns="0" bIns="0" rtlCol="0" anchor="t">
             <a:spAutoFit/>
           </a:bodyPr>
           <a:lstStyle/>
@@ -4885,12 +5092,12 @@
       </p:sp>
       <p:sp>
         <p:nvSpPr>
-          <p:cNvPr name="TextBox 14" id="14"/>
-          <p:cNvSpPr txBox="true"/>
-          <p:nvPr/>
-        </p:nvSpPr>
-        <p:spPr>
-          <a:xfrm rot="0">
+          <p:cNvPr id="14" name="TextBox 14"/>
+          <p:cNvSpPr txBox="1"/>
+          <p:nvPr/>
+        </p:nvSpPr>
+        <p:spPr>
+          <a:xfrm>
             <a:off x="11325882" y="3256722"/>
             <a:ext cx="4780053" cy="2048875"/>
           </a:xfrm>
@@ -4899,12 +5106,12 @@
           </a:prstGeom>
         </p:spPr>
         <p:txBody>
-          <a:bodyPr anchor="t" rtlCol="false" tIns="0" lIns="0" bIns="0" rIns="0">
+          <a:bodyPr lIns="0" tIns="0" rIns="0" bIns="0" rtlCol="0" anchor="t">
             <a:spAutoFit/>
           </a:bodyPr>
           <a:lstStyle/>
           <a:p>
-            <a:pPr algn="l" marL="347679" indent="-173839" lvl="1">
+            <a:pPr marL="347679" lvl="1" indent="-173839" algn="l">
               <a:lnSpc>
                 <a:spcPts val="3349"/>
               </a:lnSpc>
@@ -4925,7 +5132,7 @@
             </a:r>
           </a:p>
           <a:p>
-            <a:pPr algn="l" marL="347679" indent="-173839" lvl="1">
+            <a:pPr marL="347679" lvl="1" indent="-173839" algn="l">
               <a:lnSpc>
                 <a:spcPts val="3349"/>
               </a:lnSpc>
@@ -4946,7 +5153,7 @@
             </a:r>
           </a:p>
           <a:p>
-            <a:pPr algn="l" marL="347679" indent="-173839" lvl="1">
+            <a:pPr marL="347679" lvl="1" indent="-173839" algn="l">
               <a:lnSpc>
                 <a:spcPts val="3349"/>
               </a:lnSpc>
@@ -4967,7 +5174,7 @@
             </a:r>
           </a:p>
           <a:p>
-            <a:pPr algn="l" marL="347679" indent="-173839" lvl="1">
+            <a:pPr marL="347679" lvl="1" indent="-173839" algn="l">
               <a:lnSpc>
                 <a:spcPts val="3349"/>
               </a:lnSpc>
@@ -4991,12 +5198,12 @@
       </p:sp>
       <p:sp>
         <p:nvSpPr>
-          <p:cNvPr name="TextBox 15" id="15"/>
-          <p:cNvSpPr txBox="true"/>
-          <p:nvPr/>
-        </p:nvSpPr>
-        <p:spPr>
-          <a:xfrm rot="0">
+          <p:cNvPr id="15" name="TextBox 15"/>
+          <p:cNvSpPr txBox="1"/>
+          <p:nvPr/>
+        </p:nvSpPr>
+        <p:spPr>
+          <a:xfrm>
             <a:off x="5102135" y="6115737"/>
             <a:ext cx="2774309" cy="431012"/>
           </a:xfrm>
@@ -5005,7 +5212,7 @@
           </a:prstGeom>
         </p:spPr>
         <p:txBody>
-          <a:bodyPr anchor="t" rtlCol="false" tIns="0" lIns="0" bIns="0" rIns="0">
+          <a:bodyPr lIns="0" tIns="0" rIns="0" bIns="0" rtlCol="0" anchor="t">
             <a:spAutoFit/>
           </a:bodyPr>
           <a:lstStyle/>
@@ -5032,26 +5239,26 @@
       </p:sp>
       <p:sp>
         <p:nvSpPr>
-          <p:cNvPr name="TextBox 16" id="16"/>
-          <p:cNvSpPr txBox="true"/>
-          <p:nvPr/>
-        </p:nvSpPr>
-        <p:spPr>
-          <a:xfrm rot="0">
+          <p:cNvPr id="16" name="TextBox 16"/>
+          <p:cNvSpPr txBox="1"/>
+          <p:nvPr/>
+        </p:nvSpPr>
+        <p:spPr>
+          <a:xfrm>
             <a:off x="4217013" y="6449807"/>
-            <a:ext cx="4780053" cy="1953453"/>
+            <a:ext cx="4780053" cy="1976888"/>
           </a:xfrm>
           <a:prstGeom prst="rect">
             <a:avLst/>
           </a:prstGeom>
         </p:spPr>
         <p:txBody>
-          <a:bodyPr anchor="t" rtlCol="false" tIns="0" lIns="0" bIns="0" rIns="0">
+          <a:bodyPr lIns="0" tIns="0" rIns="0" bIns="0" rtlCol="0" anchor="t">
             <a:spAutoFit/>
           </a:bodyPr>
           <a:lstStyle/>
           <a:p>
-            <a:pPr algn="l" marL="347679" indent="-173839" lvl="1">
+            <a:pPr marL="347679" lvl="1" indent="-173839" algn="l">
               <a:lnSpc>
                 <a:spcPts val="4025"/>
               </a:lnSpc>
@@ -5059,7 +5266,7 @@
               <a:buChar char="•"/>
             </a:pPr>
             <a:r>
-              <a:rPr lang="en-US" sz="1610" spc="-80">
+              <a:rPr lang="en-US" sz="1610" spc="-80" dirty="0">
                 <a:solidFill>
                   <a:srgbClr val="FFFFFF"/>
                 </a:solidFill>
@@ -5068,11 +5275,35 @@
                 <a:cs typeface="Open Sans"/>
                 <a:sym typeface="Open Sans"/>
               </a:rPr>
-              <a:t>France 2030 : stratégie IA/data</a:t>
-            </a:r>
-          </a:p>
-          <a:p>
-            <a:pPr algn="l" marL="347679" indent="-173839" lvl="1">
+              <a:t>France 2030 : </a:t>
+            </a:r>
+            <a:r>
+              <a:rPr lang="en-US" sz="1610" spc="-80" dirty="0" err="1">
+                <a:solidFill>
+                  <a:srgbClr val="FFFFFF"/>
+                </a:solidFill>
+                <a:latin typeface="Open Sans"/>
+                <a:ea typeface="Open Sans"/>
+                <a:cs typeface="Open Sans"/>
+                <a:sym typeface="Open Sans"/>
+              </a:rPr>
+              <a:t>stratégie</a:t>
+            </a:r>
+            <a:r>
+              <a:rPr lang="en-US" sz="1610" spc="-80" dirty="0">
+                <a:solidFill>
+                  <a:srgbClr val="FFFFFF"/>
+                </a:solidFill>
+                <a:latin typeface="Open Sans"/>
+                <a:ea typeface="Open Sans"/>
+                <a:cs typeface="Open Sans"/>
+                <a:sym typeface="Open Sans"/>
+              </a:rPr>
+              <a:t> IA/data</a:t>
+            </a:r>
+          </a:p>
+          <a:p>
+            <a:pPr marL="347679" lvl="1" indent="-173839" algn="l">
               <a:lnSpc>
                 <a:spcPts val="4025"/>
               </a:lnSpc>
@@ -5080,7 +5311,7 @@
               <a:buChar char="•"/>
             </a:pPr>
             <a:r>
-              <a:rPr lang="en-US" sz="1610" spc="-80">
+              <a:rPr lang="en-US" sz="1610" spc="-80" dirty="0">
                 <a:solidFill>
                   <a:srgbClr val="FFFFFF"/>
                 </a:solidFill>
@@ -5089,11 +5320,59 @@
                 <a:cs typeface="Open Sans"/>
                 <a:sym typeface="Open Sans"/>
               </a:rPr>
-              <a:t>93% entreprises utiliseront les analytics</a:t>
-            </a:r>
-          </a:p>
-          <a:p>
-            <a:pPr algn="l" marL="347679" indent="-173839" lvl="1">
+              <a:t>93% </a:t>
+            </a:r>
+            <a:r>
+              <a:rPr lang="en-US" sz="1610" spc="-80" dirty="0" err="1">
+                <a:solidFill>
+                  <a:srgbClr val="FFFFFF"/>
+                </a:solidFill>
+                <a:latin typeface="Open Sans"/>
+                <a:ea typeface="Open Sans"/>
+                <a:cs typeface="Open Sans"/>
+                <a:sym typeface="Open Sans"/>
+              </a:rPr>
+              <a:t>entreprises</a:t>
+            </a:r>
+            <a:r>
+              <a:rPr lang="en-US" sz="1610" spc="-80" dirty="0">
+                <a:solidFill>
+                  <a:srgbClr val="FFFFFF"/>
+                </a:solidFill>
+                <a:latin typeface="Open Sans"/>
+                <a:ea typeface="Open Sans"/>
+                <a:cs typeface="Open Sans"/>
+                <a:sym typeface="Open Sans"/>
+              </a:rPr>
+              <a:t> </a:t>
+            </a:r>
+            <a:r>
+              <a:rPr lang="en-US" sz="1610" spc="-80" dirty="0" err="1">
+                <a:solidFill>
+                  <a:srgbClr val="FFFFFF"/>
+                </a:solidFill>
+                <a:latin typeface="Open Sans"/>
+                <a:ea typeface="Open Sans"/>
+                <a:cs typeface="Open Sans"/>
+                <a:sym typeface="Open Sans"/>
+              </a:rPr>
+              <a:t>utiliseront</a:t>
+            </a:r>
+            <a:r>
+              <a:rPr lang="en-US" sz="1610" spc="-80" dirty="0">
+                <a:solidFill>
+                  <a:srgbClr val="FFFFFF"/>
+                </a:solidFill>
+                <a:latin typeface="Open Sans"/>
+                <a:ea typeface="Open Sans"/>
+                <a:cs typeface="Open Sans"/>
+                <a:sym typeface="Open Sans"/>
+              </a:rPr>
+              <a:t> les analytics</a:t>
+            </a:r>
+          </a:p>
+          <a:p>
+            <a:pPr marL="347679" lvl="1" indent="-173839" algn="l">
               <a:lnSpc>
                 <a:spcPts val="4025"/>
               </a:lnSpc>
@@ -5101,7 +5380,7 @@
               <a:buChar char="•"/>
             </a:pPr>
             <a:r>
-              <a:rPr lang="en-US" sz="1610" spc="-80">
+              <a:rPr lang="en-US" sz="1610" spc="-80" dirty="0">
                 <a:solidFill>
                   <a:srgbClr val="FFFFFF"/>
                 </a:solidFill>
@@ -5110,11 +5389,59 @@
                 <a:cs typeface="Open Sans"/>
                 <a:sym typeface="Open Sans"/>
               </a:rPr>
-              <a:t>70k€ salaire moyen Data Scientist en Europe</a:t>
-            </a:r>
-          </a:p>
-          <a:p>
-            <a:pPr algn="l" marL="347679" indent="-173839" lvl="1">
+              <a:t>70k€ </a:t>
+            </a:r>
+            <a:r>
+              <a:rPr lang="en-US" sz="1610" spc="-80" dirty="0" err="1">
+                <a:solidFill>
+                  <a:srgbClr val="FFFFFF"/>
+                </a:solidFill>
+                <a:latin typeface="Open Sans"/>
+                <a:ea typeface="Open Sans"/>
+                <a:cs typeface="Open Sans"/>
+                <a:sym typeface="Open Sans"/>
+              </a:rPr>
+              <a:t>salaire</a:t>
+            </a:r>
+            <a:r>
+              <a:rPr lang="en-US" sz="1610" spc="-80" dirty="0">
+                <a:solidFill>
+                  <a:srgbClr val="FFFFFF"/>
+                </a:solidFill>
+                <a:latin typeface="Open Sans"/>
+                <a:ea typeface="Open Sans"/>
+                <a:cs typeface="Open Sans"/>
+                <a:sym typeface="Open Sans"/>
+              </a:rPr>
+              <a:t> moyen Data Engineer </a:t>
+            </a:r>
+            <a:r>
+              <a:rPr lang="en-US" sz="1610" spc="-80" dirty="0" err="1">
+                <a:solidFill>
+                  <a:srgbClr val="FFFFFF"/>
+                </a:solidFill>
+                <a:latin typeface="Open Sans"/>
+                <a:ea typeface="Open Sans"/>
+                <a:cs typeface="Open Sans"/>
+                <a:sym typeface="Open Sans"/>
+              </a:rPr>
+              <a:t>en</a:t>
+            </a:r>
+            <a:r>
+              <a:rPr lang="en-US" sz="1610" spc="-80" dirty="0">
+                <a:solidFill>
+                  <a:srgbClr val="FFFFFF"/>
+                </a:solidFill>
+                <a:latin typeface="Open Sans"/>
+                <a:ea typeface="Open Sans"/>
+                <a:cs typeface="Open Sans"/>
+                <a:sym typeface="Open Sans"/>
+              </a:rPr>
+              <a:t> Europe</a:t>
+            </a:r>
+          </a:p>
+          <a:p>
+            <a:pPr marL="347679" lvl="1" indent="-173839" algn="l">
               <a:lnSpc>
                 <a:spcPts val="4025"/>
               </a:lnSpc>
@@ -5122,7 +5449,7 @@
               <a:buChar char="•"/>
             </a:pPr>
             <a:r>
-              <a:rPr lang="en-US" sz="1610" spc="-80">
+              <a:rPr lang="en-US" sz="1610" spc="-80" dirty="0">
                 <a:solidFill>
                   <a:srgbClr val="FFFFFF"/>
                 </a:solidFill>
@@ -5131,19 +5458,91 @@
                 <a:cs typeface="Open Sans"/>
                 <a:sym typeface="Open Sans"/>
               </a:rPr>
-              <a:t>53.8 Mds$ marché de la data en Europe (2030)</a:t>
-            </a:r>
-          </a:p>
-        </p:txBody>
-      </p:sp>
-      <p:sp>
-        <p:nvSpPr>
-          <p:cNvPr name="TextBox 17" id="17"/>
-          <p:cNvSpPr txBox="true"/>
-          <p:nvPr/>
-        </p:nvSpPr>
-        <p:spPr>
-          <a:xfrm rot="0">
+              <a:t>53.8 </a:t>
+            </a:r>
+            <a:r>
+              <a:rPr lang="en-US" sz="1610" spc="-80" dirty="0" err="1">
+                <a:solidFill>
+                  <a:srgbClr val="FFFFFF"/>
+                </a:solidFill>
+                <a:latin typeface="Open Sans"/>
+                <a:ea typeface="Open Sans"/>
+                <a:cs typeface="Open Sans"/>
+                <a:sym typeface="Open Sans"/>
+              </a:rPr>
+              <a:t>Mds</a:t>
+            </a:r>
+            <a:r>
+              <a:rPr lang="en-US" sz="1610" spc="-80" dirty="0">
+                <a:solidFill>
+                  <a:srgbClr val="FFFFFF"/>
+                </a:solidFill>
+                <a:latin typeface="Open Sans"/>
+                <a:ea typeface="Open Sans"/>
+                <a:cs typeface="Open Sans"/>
+                <a:sym typeface="Open Sans"/>
+              </a:rPr>
+              <a:t>$ </a:t>
+            </a:r>
+            <a:r>
+              <a:rPr lang="en-US" sz="1610" spc="-80" dirty="0" err="1">
+                <a:solidFill>
+                  <a:srgbClr val="FFFFFF"/>
+                </a:solidFill>
+                <a:latin typeface="Open Sans"/>
+                <a:ea typeface="Open Sans"/>
+                <a:cs typeface="Open Sans"/>
+                <a:sym typeface="Open Sans"/>
+              </a:rPr>
+              <a:t>marché</a:t>
+            </a:r>
+            <a:r>
+              <a:rPr lang="en-US" sz="1610" spc="-80" dirty="0">
+                <a:solidFill>
+                  <a:srgbClr val="FFFFFF"/>
+                </a:solidFill>
+                <a:latin typeface="Open Sans"/>
+                <a:ea typeface="Open Sans"/>
+                <a:cs typeface="Open Sans"/>
+                <a:sym typeface="Open Sans"/>
+              </a:rPr>
+              <a:t> de la data </a:t>
+            </a:r>
+            <a:r>
+              <a:rPr lang="en-US" sz="1610" spc="-80" dirty="0" err="1">
+                <a:solidFill>
+                  <a:srgbClr val="FFFFFF"/>
+                </a:solidFill>
+                <a:latin typeface="Open Sans"/>
+                <a:ea typeface="Open Sans"/>
+                <a:cs typeface="Open Sans"/>
+                <a:sym typeface="Open Sans"/>
+              </a:rPr>
+              <a:t>en</a:t>
+            </a:r>
+            <a:r>
+              <a:rPr lang="en-US" sz="1610" spc="-80" dirty="0">
+                <a:solidFill>
+                  <a:srgbClr val="FFFFFF"/>
+                </a:solidFill>
+                <a:latin typeface="Open Sans"/>
+                <a:ea typeface="Open Sans"/>
+                <a:cs typeface="Open Sans"/>
+                <a:sym typeface="Open Sans"/>
+              </a:rPr>
+              <a:t> Europe (2030)</a:t>
+            </a:r>
+          </a:p>
+        </p:txBody>
+      </p:sp>
+      <p:sp>
+        <p:nvSpPr>
+          <p:cNvPr id="17" name="TextBox 17"/>
+          <p:cNvSpPr txBox="1"/>
+          <p:nvPr/>
+        </p:nvSpPr>
+        <p:spPr>
+          <a:xfrm>
             <a:off x="12328754" y="6115737"/>
             <a:ext cx="2774309" cy="431012"/>
           </a:xfrm>
@@ -5152,7 +5551,7 @@
           </a:prstGeom>
         </p:spPr>
         <p:txBody>
-          <a:bodyPr anchor="t" rtlCol="false" tIns="0" lIns="0" bIns="0" rIns="0">
+          <a:bodyPr lIns="0" tIns="0" rIns="0" bIns="0" rtlCol="0" anchor="t">
             <a:spAutoFit/>
           </a:bodyPr>
           <a:lstStyle/>
@@ -5179,12 +5578,12 @@
       </p:sp>
       <p:sp>
         <p:nvSpPr>
-          <p:cNvPr name="TextBox 18" id="18"/>
-          <p:cNvSpPr txBox="true"/>
-          <p:nvPr/>
-        </p:nvSpPr>
-        <p:spPr>
-          <a:xfrm rot="0">
+          <p:cNvPr id="18" name="TextBox 18"/>
+          <p:cNvSpPr txBox="1"/>
+          <p:nvPr/>
+        </p:nvSpPr>
+        <p:spPr>
+          <a:xfrm>
             <a:off x="11325882" y="6489599"/>
             <a:ext cx="4780053" cy="1953453"/>
           </a:xfrm>
@@ -5193,12 +5592,12 @@
           </a:prstGeom>
         </p:spPr>
         <p:txBody>
-          <a:bodyPr anchor="t" rtlCol="false" tIns="0" lIns="0" bIns="0" rIns="0">
+          <a:bodyPr lIns="0" tIns="0" rIns="0" bIns="0" rtlCol="0" anchor="t">
             <a:spAutoFit/>
           </a:bodyPr>
           <a:lstStyle/>
           <a:p>
-            <a:pPr algn="l" marL="347679" indent="-173839" lvl="1">
+            <a:pPr marL="347679" lvl="1" indent="-173839" algn="l">
               <a:lnSpc>
                 <a:spcPts val="4025"/>
               </a:lnSpc>
@@ -5219,7 +5618,7 @@
             </a:r>
           </a:p>
           <a:p>
-            <a:pPr algn="l" marL="347679" indent="-173839" lvl="1">
+            <a:pPr marL="347679" lvl="1" indent="-173839" algn="l">
               <a:lnSpc>
                 <a:spcPts val="4025"/>
               </a:lnSpc>
@@ -5240,7 +5639,7 @@
             </a:r>
           </a:p>
           <a:p>
-            <a:pPr algn="l" marL="347679" indent="-173839" lvl="1">
+            <a:pPr marL="347679" lvl="1" indent="-173839" algn="l">
               <a:lnSpc>
                 <a:spcPts val="4025"/>
               </a:lnSpc>
@@ -5261,7 +5660,7 @@
             </a:r>
           </a:p>
           <a:p>
-            <a:pPr algn="l" marL="347679" indent="-173839" lvl="1">
+            <a:pPr marL="347679" lvl="1" indent="-173839" algn="l">
               <a:lnSpc>
                 <a:spcPts val="4025"/>
               </a:lnSpc>
@@ -5292,7 +5691,7 @@
 </file>
 
 <file path=ppt/slides/slide4.xml><?xml version="1.0" encoding="utf-8"?>
-<p:sld xmlns:p="http://schemas.openxmlformats.org/presentationml/2006/main" xmlns:a="http://schemas.openxmlformats.org/drawingml/2006/main" xmlns:r="http://schemas.openxmlformats.org/officeDocument/2006/relationships">
+<p:sld xmlns:a="http://schemas.openxmlformats.org/drawingml/2006/main" xmlns:r="http://schemas.openxmlformats.org/officeDocument/2006/relationships" xmlns:p="http://schemas.openxmlformats.org/presentationml/2006/main">
   <p:cSld>
     <p:spTree>
       <p:nvGrpSpPr>
@@ -5310,12 +5709,12 @@
       </p:grpSpPr>
       <p:grpSp>
         <p:nvGrpSpPr>
-          <p:cNvPr name="Group 2" id="2"/>
+          <p:cNvPr id="2" name="Group 2"/>
           <p:cNvGrpSpPr/>
           <p:nvPr/>
         </p:nvGrpSpPr>
         <p:grpSpPr>
-          <a:xfrm rot="0">
+          <a:xfrm>
             <a:off x="6811053" y="900557"/>
             <a:ext cx="8355393" cy="8489163"/>
             <a:chOff x="0" y="0"/>
@@ -5324,12 +5723,12 @@
         </p:grpSpPr>
         <p:sp>
           <p:nvSpPr>
-            <p:cNvPr name="Freeform 3" id="3"/>
+            <p:cNvPr id="3" name="Freeform 3"/>
             <p:cNvSpPr/>
             <p:nvPr/>
           </p:nvSpPr>
           <p:spPr>
-            <a:xfrm flipH="false" flipV="false" rot="0">
+            <a:xfrm>
               <a:off x="0" y="67700"/>
               <a:ext cx="3572499" cy="11251184"/>
             </a:xfrm>
@@ -5338,9 +5737,9 @@
               <a:gdLst/>
               <a:ahLst/>
               <a:cxnLst/>
-              <a:rect r="r" b="b" t="t" l="l"/>
+              <a:rect l="l" t="t" r="r" b="b"/>
               <a:pathLst>
-                <a:path h="11251184" w="3572499">
+                <a:path w="3572499" h="11251184">
                   <a:moveTo>
                     <a:pt x="0" y="0"/>
                   </a:moveTo>
@@ -5369,19 +5768,26 @@
                 </a:extLst>
               </a:blip>
               <a:stretch>
-                <a:fillRect l="0" t="-744" r="-217282" b="0"/>
+                <a:fillRect t="-744" r="-217282"/>
               </a:stretch>
             </a:blipFill>
           </p:spPr>
+          <p:txBody>
+            <a:bodyPr/>
+            <a:lstStyle/>
+            <a:p>
+              <a:endParaRPr lang="fr-FR"/>
+            </a:p>
+          </p:txBody>
         </p:sp>
         <p:sp>
           <p:nvSpPr>
-            <p:cNvPr name="Freeform 4" id="4"/>
+            <p:cNvPr id="4" name="Freeform 4"/>
             <p:cNvSpPr/>
             <p:nvPr/>
           </p:nvSpPr>
           <p:spPr>
-            <a:xfrm flipH="false" flipV="false" rot="0">
+            <a:xfrm>
               <a:off x="2518394" y="0"/>
               <a:ext cx="5871510" cy="11318884"/>
             </a:xfrm>
@@ -5390,9 +5796,9 @@
               <a:gdLst/>
               <a:ahLst/>
               <a:cxnLst/>
-              <a:rect r="r" b="b" t="t" l="l"/>
+              <a:rect l="l" t="t" r="r" b="b"/>
               <a:pathLst>
-                <a:path h="11318884" w="5871510">
+                <a:path w="5871510" h="11318884">
                   <a:moveTo>
                     <a:pt x="0" y="0"/>
                   </a:moveTo>
@@ -5421,19 +5827,26 @@
                 </a:extLst>
               </a:blip>
               <a:stretch>
-                <a:fillRect l="-17503" t="-141" r="-75545" b="0"/>
+                <a:fillRect l="-17503" t="-141" r="-75545"/>
               </a:stretch>
             </a:blipFill>
           </p:spPr>
+          <p:txBody>
+            <a:bodyPr/>
+            <a:lstStyle/>
+            <a:p>
+              <a:endParaRPr lang="fr-FR"/>
+            </a:p>
+          </p:txBody>
         </p:sp>
         <p:sp>
           <p:nvSpPr>
-            <p:cNvPr name="Freeform 5" id="5"/>
+            <p:cNvPr id="5" name="Freeform 5"/>
             <p:cNvSpPr/>
             <p:nvPr/>
           </p:nvSpPr>
           <p:spPr>
-            <a:xfrm flipH="false" flipV="false" rot="0">
+            <a:xfrm>
               <a:off x="4011606" y="10784769"/>
               <a:ext cx="207326" cy="55291"/>
             </a:xfrm>
@@ -5442,9 +5855,9 @@
               <a:gdLst/>
               <a:ahLst/>
               <a:cxnLst/>
-              <a:rect r="r" b="b" t="t" l="l"/>
+              <a:rect l="l" t="t" r="r" b="b"/>
               <a:pathLst>
-                <a:path h="55291" w="207326">
+                <a:path w="207326" h="55291">
                   <a:moveTo>
                     <a:pt x="0" y="0"/>
                   </a:moveTo>
@@ -5473,19 +5886,26 @@
                 </a:extLst>
               </a:blip>
               <a:stretch>
-                <a:fillRect l="-1423121" t="-20381848" r="-3939144" b="0"/>
+                <a:fillRect l="-1423121" t="-20381848" r="-3939144"/>
               </a:stretch>
             </a:blipFill>
           </p:spPr>
+          <p:txBody>
+            <a:bodyPr/>
+            <a:lstStyle/>
+            <a:p>
+              <a:endParaRPr lang="fr-FR"/>
+            </a:p>
+          </p:txBody>
         </p:sp>
         <p:sp>
           <p:nvSpPr>
-            <p:cNvPr name="Freeform 6" id="6"/>
+            <p:cNvPr id="6" name="Freeform 6"/>
             <p:cNvSpPr/>
             <p:nvPr/>
           </p:nvSpPr>
           <p:spPr>
-            <a:xfrm flipH="false" flipV="false" rot="0">
+            <a:xfrm>
               <a:off x="7805745" y="268364"/>
               <a:ext cx="3334779" cy="11039501"/>
             </a:xfrm>
@@ -5494,9 +5914,9 @@
               <a:gdLst/>
               <a:ahLst/>
               <a:cxnLst/>
-              <a:rect r="r" b="b" t="t" l="l"/>
+              <a:rect l="l" t="t" r="r" b="b"/>
               <a:pathLst>
-                <a:path h="11039501" w="3334779">
+                <a:path w="3334779" h="11039501">
                   <a:moveTo>
                     <a:pt x="0" y="0"/>
                   </a:moveTo>
@@ -5525,20 +5945,27 @@
                 </a:extLst>
               </a:blip>
               <a:stretch>
-                <a:fillRect l="-30790" t="-2583" r="-208802" b="0"/>
+                <a:fillRect l="-30790" t="-2583" r="-208802"/>
               </a:stretch>
             </a:blipFill>
           </p:spPr>
+          <p:txBody>
+            <a:bodyPr/>
+            <a:lstStyle/>
+            <a:p>
+              <a:endParaRPr lang="fr-FR"/>
+            </a:p>
+          </p:txBody>
         </p:sp>
       </p:grpSp>
       <p:sp>
         <p:nvSpPr>
-          <p:cNvPr name="TextBox 7" id="7"/>
-          <p:cNvSpPr txBox="true"/>
-          <p:nvPr/>
-        </p:nvSpPr>
-        <p:spPr>
-          <a:xfrm rot="0">
+          <p:cNvPr id="7" name="TextBox 7"/>
+          <p:cNvSpPr txBox="1"/>
+          <p:nvPr/>
+        </p:nvSpPr>
+        <p:spPr>
+          <a:xfrm>
             <a:off x="6841381" y="756334"/>
             <a:ext cx="7380186" cy="862076"/>
           </a:xfrm>
@@ -5547,7 +5974,7 @@
           </a:prstGeom>
         </p:spPr>
         <p:txBody>
-          <a:bodyPr anchor="t" rtlCol="false" tIns="0" lIns="0" bIns="0" rIns="0">
+          <a:bodyPr lIns="0" tIns="0" rIns="0" bIns="0" rtlCol="0" anchor="t">
             <a:spAutoFit/>
           </a:bodyPr>
           <a:lstStyle/>
@@ -5574,12 +6001,12 @@
       </p:sp>
       <p:sp>
         <p:nvSpPr>
-          <p:cNvPr name="Freeform 8" id="8"/>
+          <p:cNvPr id="8" name="Freeform 8"/>
           <p:cNvSpPr/>
           <p:nvPr/>
         </p:nvSpPr>
         <p:spPr>
-          <a:xfrm flipH="false" flipV="false" rot="0">
+          <a:xfrm>
             <a:off x="2985488" y="1028700"/>
             <a:ext cx="5107990" cy="873002"/>
           </a:xfrm>
@@ -5588,9 +6015,9 @@
             <a:gdLst/>
             <a:ahLst/>
             <a:cxnLst/>
-            <a:rect r="r" b="b" t="t" l="l"/>
+            <a:rect l="l" t="t" r="r" b="b"/>
             <a:pathLst>
-              <a:path h="873002" w="5107990">
+              <a:path w="5107990" h="873002">
                 <a:moveTo>
                   <a:pt x="0" y="0"/>
                 </a:moveTo>
@@ -5619,19 +6046,26 @@
               </a:extLst>
             </a:blip>
             <a:stretch>
-              <a:fillRect l="0" t="0" r="0" b="0"/>
+              <a:fillRect/>
             </a:stretch>
           </a:blipFill>
         </p:spPr>
-      </p:sp>
-      <p:sp>
-        <p:nvSpPr>
-          <p:cNvPr name="Freeform 9" id="9"/>
+        <p:txBody>
+          <a:bodyPr/>
+          <a:lstStyle/>
+          <a:p>
+            <a:endParaRPr lang="fr-FR"/>
+          </a:p>
+        </p:txBody>
+      </p:sp>
+      <p:sp>
+        <p:nvSpPr>
+          <p:cNvPr id="9" name="Freeform 9"/>
           <p:cNvSpPr/>
           <p:nvPr/>
         </p:nvSpPr>
         <p:spPr>
-          <a:xfrm flipH="false" flipV="false" rot="0">
+          <a:xfrm>
             <a:off x="12944040" y="592199"/>
             <a:ext cx="5107990" cy="873002"/>
           </a:xfrm>
@@ -5640,9 +6074,9 @@
             <a:gdLst/>
             <a:ahLst/>
             <a:cxnLst/>
-            <a:rect r="r" b="b" t="t" l="l"/>
+            <a:rect l="l" t="t" r="r" b="b"/>
             <a:pathLst>
-              <a:path h="873002" w="5107990">
+              <a:path w="5107990" h="873002">
                 <a:moveTo>
                   <a:pt x="0" y="0"/>
                 </a:moveTo>
@@ -5671,14 +6105,21 @@
               </a:extLst>
             </a:blip>
             <a:stretch>
-              <a:fillRect l="0" t="0" r="0" b="0"/>
+              <a:fillRect/>
             </a:stretch>
           </a:blipFill>
         </p:spPr>
-      </p:sp>
-      <p:sp>
-        <p:nvSpPr>
-          <p:cNvPr name="AutoShape 10" id="10"/>
+        <p:txBody>
+          <a:bodyPr/>
+          <a:lstStyle/>
+          <a:p>
+            <a:endParaRPr lang="fr-FR"/>
+          </a:p>
+        </p:txBody>
+      </p:sp>
+      <p:sp>
+        <p:nvSpPr>
+          <p:cNvPr id="10" name="AutoShape 10"/>
           <p:cNvSpPr/>
           <p:nvPr/>
         </p:nvSpPr>
@@ -5690,48 +6131,62 @@
           <a:prstGeom prst="line">
             <a:avLst/>
           </a:prstGeom>
-          <a:ln cap="flat" w="38100">
+          <a:ln w="38100" cap="flat">
             <a:solidFill>
               <a:srgbClr val="023047"/>
             </a:solidFill>
             <a:prstDash val="solid"/>
-            <a:headEnd type="none" len="sm" w="sm"/>
-            <a:tailEnd type="none" len="sm" w="sm"/>
+            <a:headEnd type="none" w="sm" len="sm"/>
+            <a:tailEnd type="none" w="sm" len="sm"/>
           </a:ln>
         </p:spPr>
-      </p:sp>
-      <p:sp>
-        <p:nvSpPr>
-          <p:cNvPr name="AutoShape 11" id="11"/>
+        <p:txBody>
+          <a:bodyPr/>
+          <a:lstStyle/>
+          <a:p>
+            <a:endParaRPr lang="fr-FR"/>
+          </a:p>
+        </p:txBody>
+      </p:sp>
+      <p:sp>
+        <p:nvSpPr>
+          <p:cNvPr id="11" name="AutoShape 11"/>
           <p:cNvSpPr/>
           <p:nvPr/>
         </p:nvSpPr>
         <p:spPr>
-          <a:xfrm flipV="true">
+          <a:xfrm flipV="1">
             <a:off x="1028700" y="9239250"/>
             <a:ext cx="16230600" cy="0"/>
           </a:xfrm>
           <a:prstGeom prst="line">
             <a:avLst/>
           </a:prstGeom>
-          <a:ln cap="flat" w="38100">
+          <a:ln w="38100" cap="flat">
             <a:solidFill>
               <a:srgbClr val="023047"/>
             </a:solidFill>
             <a:prstDash val="solid"/>
-            <a:headEnd type="none" len="sm" w="sm"/>
-            <a:tailEnd type="none" len="sm" w="sm"/>
+            <a:headEnd type="none" w="sm" len="sm"/>
+            <a:tailEnd type="none" w="sm" len="sm"/>
           </a:ln>
         </p:spPr>
-      </p:sp>
-      <p:sp>
-        <p:nvSpPr>
-          <p:cNvPr name="TextBox 12" id="12"/>
-          <p:cNvSpPr txBox="true"/>
-          <p:nvPr/>
-        </p:nvSpPr>
-        <p:spPr>
-          <a:xfrm rot="0">
+        <p:txBody>
+          <a:bodyPr/>
+          <a:lstStyle/>
+          <a:p>
+            <a:endParaRPr lang="fr-FR"/>
+          </a:p>
+        </p:txBody>
+      </p:sp>
+      <p:sp>
+        <p:nvSpPr>
+          <p:cNvPr id="12" name="TextBox 12"/>
+          <p:cNvSpPr txBox="1"/>
+          <p:nvPr/>
+        </p:nvSpPr>
+        <p:spPr>
+          <a:xfrm>
             <a:off x="13358767" y="9394534"/>
             <a:ext cx="3900533" cy="246380"/>
           </a:xfrm>
@@ -5740,7 +6195,7 @@
           </a:prstGeom>
         </p:spPr>
         <p:txBody>
-          <a:bodyPr anchor="t" rtlCol="false" tIns="0" lIns="0" bIns="0" rIns="0">
+          <a:bodyPr lIns="0" tIns="0" rIns="0" bIns="0" rtlCol="0" anchor="t">
             <a:spAutoFit/>
           </a:bodyPr>
           <a:lstStyle/>
@@ -5767,12 +6222,12 @@
       </p:sp>
       <p:sp>
         <p:nvSpPr>
-          <p:cNvPr name="Freeform 13" id="13"/>
+          <p:cNvPr id="13" name="Freeform 13"/>
           <p:cNvSpPr/>
           <p:nvPr/>
         </p:nvSpPr>
         <p:spPr>
-          <a:xfrm flipH="true" flipV="false" rot="0">
+          <a:xfrm flipH="1">
             <a:off x="-739347" y="-1155995"/>
             <a:ext cx="4729929" cy="3843707"/>
           </a:xfrm>
@@ -5781,9 +6236,9 @@
             <a:gdLst/>
             <a:ahLst/>
             <a:cxnLst/>
-            <a:rect r="r" b="b" t="t" l="l"/>
+            <a:rect l="l" t="t" r="r" b="b"/>
             <a:pathLst>
-              <a:path h="3843707" w="4729929">
+              <a:path w="4729929" h="3843707">
                 <a:moveTo>
                   <a:pt x="4729929" y="0"/>
                 </a:moveTo>
@@ -5812,19 +6267,26 @@
               </a:extLst>
             </a:blip>
             <a:stretch>
-              <a:fillRect l="0" t="0" r="0" b="0"/>
+              <a:fillRect/>
             </a:stretch>
           </a:blipFill>
         </p:spPr>
+        <p:txBody>
+          <a:bodyPr/>
+          <a:lstStyle/>
+          <a:p>
+            <a:endParaRPr lang="fr-FR"/>
+          </a:p>
+        </p:txBody>
       </p:sp>
       <p:grpSp>
         <p:nvGrpSpPr>
-          <p:cNvPr name="Group 14" id="14"/>
+          <p:cNvPr id="14" name="Group 14"/>
           <p:cNvGrpSpPr/>
           <p:nvPr/>
         </p:nvGrpSpPr>
         <p:grpSpPr>
-          <a:xfrm rot="0">
+          <a:xfrm>
             <a:off x="2019151" y="1089332"/>
             <a:ext cx="5346688" cy="8300388"/>
             <a:chOff x="0" y="0"/>
@@ -5833,12 +6295,12 @@
         </p:grpSpPr>
         <p:sp>
           <p:nvSpPr>
-            <p:cNvPr name="Freeform 15" id="15"/>
+            <p:cNvPr id="15" name="Freeform 15"/>
             <p:cNvSpPr/>
             <p:nvPr/>
           </p:nvSpPr>
           <p:spPr>
-            <a:xfrm flipH="false" flipV="false" rot="0">
+            <a:xfrm>
               <a:off x="1024834" y="0"/>
               <a:ext cx="3353465" cy="11067185"/>
             </a:xfrm>
@@ -5847,9 +6309,9 @@
               <a:gdLst/>
               <a:ahLst/>
               <a:cxnLst/>
-              <a:rect r="r" b="b" t="t" l="l"/>
+              <a:rect l="l" t="t" r="r" b="b"/>
               <a:pathLst>
-                <a:path h="11067185" w="3353465">
+                <a:path w="3353465" h="11067185">
                   <a:moveTo>
                     <a:pt x="0" y="0"/>
                   </a:moveTo>
@@ -5878,19 +6340,26 @@
                 </a:extLst>
               </a:blip>
               <a:stretch>
-                <a:fillRect l="-105734" t="-2419" r="-132271" b="0"/>
+                <a:fillRect l="-105734" t="-2419" r="-132271"/>
               </a:stretch>
             </a:blipFill>
           </p:spPr>
+          <p:txBody>
+            <a:bodyPr/>
+            <a:lstStyle/>
+            <a:p>
+              <a:endParaRPr lang="fr-FR"/>
+            </a:p>
+          </p:txBody>
         </p:sp>
         <p:sp>
           <p:nvSpPr>
-            <p:cNvPr name="Freeform 16" id="16"/>
+            <p:cNvPr id="16" name="Freeform 16"/>
             <p:cNvSpPr/>
             <p:nvPr/>
           </p:nvSpPr>
           <p:spPr>
-            <a:xfrm flipH="false" flipV="false" rot="0">
+            <a:xfrm>
               <a:off x="0" y="10533069"/>
               <a:ext cx="207326" cy="55291"/>
             </a:xfrm>
@@ -5899,9 +6368,9 @@
               <a:gdLst/>
               <a:ahLst/>
               <a:cxnLst/>
-              <a:rect r="r" b="b" t="t" l="l"/>
+              <a:rect l="l" t="t" r="r" b="b"/>
               <a:pathLst>
-                <a:path h="55291" w="207326">
+                <a:path w="207326" h="55291">
                   <a:moveTo>
                     <a:pt x="0" y="0"/>
                   </a:moveTo>
@@ -5930,19 +6399,26 @@
                 </a:extLst>
               </a:blip>
               <a:stretch>
-                <a:fillRect l="-1423121" t="-20381848" r="-3939144" b="0"/>
+                <a:fillRect l="-1423121" t="-20381848" r="-3939144"/>
               </a:stretch>
             </a:blipFill>
           </p:spPr>
+          <p:txBody>
+            <a:bodyPr/>
+            <a:lstStyle/>
+            <a:p>
+              <a:endParaRPr lang="fr-FR"/>
+            </a:p>
+          </p:txBody>
         </p:sp>
         <p:sp>
           <p:nvSpPr>
-            <p:cNvPr name="Freeform 17" id="17"/>
+            <p:cNvPr id="17" name="Freeform 17"/>
             <p:cNvSpPr/>
             <p:nvPr/>
           </p:nvSpPr>
           <p:spPr>
-            <a:xfrm flipH="false" flipV="false" rot="0">
+            <a:xfrm>
               <a:off x="3794139" y="16665"/>
               <a:ext cx="3334779" cy="11039501"/>
             </a:xfrm>
@@ -5951,9 +6427,9 @@
               <a:gdLst/>
               <a:ahLst/>
               <a:cxnLst/>
-              <a:rect r="r" b="b" t="t" l="l"/>
+              <a:rect l="l" t="t" r="r" b="b"/>
               <a:pathLst>
-                <a:path h="11039501" w="3334779">
+                <a:path w="3334779" h="11039501">
                   <a:moveTo>
                     <a:pt x="0" y="0"/>
                   </a:moveTo>
@@ -5982,20 +6458,27 @@
                 </a:extLst>
               </a:blip>
               <a:stretch>
-                <a:fillRect l="-30790" t="-2583" r="-208802" b="0"/>
+                <a:fillRect l="-30790" t="-2583" r="-208802"/>
               </a:stretch>
             </a:blipFill>
           </p:spPr>
+          <p:txBody>
+            <a:bodyPr/>
+            <a:lstStyle/>
+            <a:p>
+              <a:endParaRPr lang="fr-FR"/>
+            </a:p>
+          </p:txBody>
         </p:sp>
       </p:grpSp>
       <p:sp>
         <p:nvSpPr>
-          <p:cNvPr name="TextBox 18" id="18"/>
-          <p:cNvSpPr txBox="true"/>
-          <p:nvPr/>
-        </p:nvSpPr>
-        <p:spPr>
-          <a:xfrm rot="0">
+          <p:cNvPr id="18" name="TextBox 18"/>
+          <p:cNvSpPr txBox="1"/>
+          <p:nvPr/>
+        </p:nvSpPr>
+        <p:spPr>
+          <a:xfrm>
             <a:off x="1414337" y="5544791"/>
             <a:ext cx="3405817" cy="1331020"/>
           </a:xfrm>
@@ -6004,7 +6487,7 @@
           </a:prstGeom>
         </p:spPr>
         <p:txBody>
-          <a:bodyPr anchor="t" rtlCol="false" tIns="0" lIns="0" bIns="0" rIns="0">
+          <a:bodyPr lIns="0" tIns="0" rIns="0" bIns="0" rtlCol="0" anchor="t">
             <a:spAutoFit/>
           </a:bodyPr>
           <a:lstStyle/>
@@ -6034,12 +6517,12 @@
       </p:sp>
       <p:sp>
         <p:nvSpPr>
-          <p:cNvPr name="TextBox 19" id="19"/>
-          <p:cNvSpPr txBox="true"/>
-          <p:nvPr/>
-        </p:nvSpPr>
-        <p:spPr>
-          <a:xfrm rot="0">
+          <p:cNvPr id="19" name="TextBox 19"/>
+          <p:cNvSpPr txBox="1"/>
+          <p:nvPr/>
+        </p:nvSpPr>
+        <p:spPr>
+          <a:xfrm>
             <a:off x="5588514" y="5641871"/>
             <a:ext cx="3052620" cy="998973"/>
           </a:xfrm>
@@ -6048,7 +6531,7 @@
           </a:prstGeom>
         </p:spPr>
         <p:txBody>
-          <a:bodyPr anchor="t" rtlCol="false" tIns="0" lIns="0" bIns="0" rIns="0">
+          <a:bodyPr lIns="0" tIns="0" rIns="0" bIns="0" rtlCol="0" anchor="t">
             <a:spAutoFit/>
           </a:bodyPr>
           <a:lstStyle/>
@@ -6097,7 +6580,7 @@
       </p:sp>
       <p:grpSp>
         <p:nvGrpSpPr>
-          <p:cNvPr name="Group 20" id="20"/>
+          <p:cNvPr id="20" name="Group 20"/>
           <p:cNvGrpSpPr/>
           <p:nvPr/>
         </p:nvGrpSpPr>
@@ -6111,12 +6594,12 @@
         </p:grpSpPr>
         <p:sp>
           <p:nvSpPr>
-            <p:cNvPr name="Freeform 21" id="21"/>
+            <p:cNvPr id="21" name="Freeform 21"/>
             <p:cNvSpPr/>
             <p:nvPr/>
           </p:nvSpPr>
           <p:spPr>
-            <a:xfrm flipH="false" flipV="false" rot="0">
+            <a:xfrm>
               <a:off x="1078434" y="0"/>
               <a:ext cx="3299864" cy="11109397"/>
             </a:xfrm>
@@ -6125,9 +6608,9 @@
               <a:gdLst/>
               <a:ahLst/>
               <a:cxnLst/>
-              <a:rect r="r" b="b" t="t" l="l"/>
+              <a:rect l="l" t="t" r="r" b="b"/>
               <a:pathLst>
-                <a:path h="11109397" w="3299864">
+                <a:path w="3299864" h="11109397">
                   <a:moveTo>
                     <a:pt x="0" y="0"/>
                   </a:moveTo>
@@ -6160,15 +6643,22 @@
               </a:stretch>
             </a:blipFill>
           </p:spPr>
+          <p:txBody>
+            <a:bodyPr/>
+            <a:lstStyle/>
+            <a:p>
+              <a:endParaRPr lang="fr-FR"/>
+            </a:p>
+          </p:txBody>
         </p:sp>
         <p:sp>
           <p:nvSpPr>
-            <p:cNvPr name="Freeform 22" id="22"/>
+            <p:cNvPr id="22" name="Freeform 22"/>
             <p:cNvSpPr/>
             <p:nvPr/>
           </p:nvSpPr>
           <p:spPr>
-            <a:xfrm flipH="false" flipV="false" rot="0">
+            <a:xfrm>
               <a:off x="0" y="10784769"/>
               <a:ext cx="207326" cy="55291"/>
             </a:xfrm>
@@ -6177,9 +6667,9 @@
               <a:gdLst/>
               <a:ahLst/>
               <a:cxnLst/>
-              <a:rect r="r" b="b" t="t" l="l"/>
+              <a:rect l="l" t="t" r="r" b="b"/>
               <a:pathLst>
-                <a:path h="55291" w="207326">
+                <a:path w="207326" h="55291">
                   <a:moveTo>
                     <a:pt x="0" y="0"/>
                   </a:moveTo>
@@ -6208,19 +6698,26 @@
                 </a:extLst>
               </a:blip>
               <a:stretch>
-                <a:fillRect l="-1423121" t="-20381848" r="-3939144" b="0"/>
+                <a:fillRect l="-1423121" t="-20381848" r="-3939144"/>
               </a:stretch>
             </a:blipFill>
           </p:spPr>
+          <p:txBody>
+            <a:bodyPr/>
+            <a:lstStyle/>
+            <a:p>
+              <a:endParaRPr lang="fr-FR"/>
+            </a:p>
+          </p:txBody>
         </p:sp>
         <p:sp>
           <p:nvSpPr>
-            <p:cNvPr name="Freeform 23" id="23"/>
+            <p:cNvPr id="23" name="Freeform 23"/>
             <p:cNvSpPr/>
             <p:nvPr/>
           </p:nvSpPr>
           <p:spPr>
-            <a:xfrm flipH="false" flipV="false" rot="0">
+            <a:xfrm>
               <a:off x="3794139" y="268364"/>
               <a:ext cx="3334779" cy="11039501"/>
             </a:xfrm>
@@ -6229,9 +6726,9 @@
               <a:gdLst/>
               <a:ahLst/>
               <a:cxnLst/>
-              <a:rect r="r" b="b" t="t" l="l"/>
+              <a:rect l="l" t="t" r="r" b="b"/>
               <a:pathLst>
-                <a:path h="11039501" w="3334779">
+                <a:path w="3334779" h="11039501">
                   <a:moveTo>
                     <a:pt x="0" y="0"/>
                   </a:moveTo>
@@ -6260,20 +6757,27 @@
                 </a:extLst>
               </a:blip>
               <a:stretch>
-                <a:fillRect l="-30790" t="-2583" r="-208802" b="0"/>
+                <a:fillRect l="-30790" t="-2583" r="-208802"/>
               </a:stretch>
             </a:blipFill>
           </p:spPr>
+          <p:txBody>
+            <a:bodyPr/>
+            <a:lstStyle/>
+            <a:p>
+              <a:endParaRPr lang="fr-FR"/>
+            </a:p>
+          </p:txBody>
         </p:sp>
       </p:grpSp>
       <p:sp>
         <p:nvSpPr>
-          <p:cNvPr name="TextBox 24" id="24"/>
-          <p:cNvSpPr txBox="true"/>
-          <p:nvPr/>
-        </p:nvSpPr>
-        <p:spPr>
-          <a:xfrm rot="0">
+          <p:cNvPr id="24" name="TextBox 24"/>
+          <p:cNvSpPr txBox="1"/>
+          <p:nvPr/>
+        </p:nvSpPr>
+        <p:spPr>
+          <a:xfrm>
             <a:off x="9414451" y="5641871"/>
             <a:ext cx="3052620" cy="666925"/>
           </a:xfrm>
@@ -6282,7 +6786,7 @@
           </a:prstGeom>
         </p:spPr>
         <p:txBody>
-          <a:bodyPr anchor="t" rtlCol="false" tIns="0" lIns="0" bIns="0" rIns="0">
+          <a:bodyPr lIns="0" tIns="0" rIns="0" bIns="0" rtlCol="0" anchor="t">
             <a:spAutoFit/>
           </a:bodyPr>
           <a:lstStyle/>
@@ -6331,12 +6835,12 @@
       </p:sp>
       <p:sp>
         <p:nvSpPr>
-          <p:cNvPr name="TextBox 25" id="25"/>
-          <p:cNvSpPr txBox="true"/>
-          <p:nvPr/>
-        </p:nvSpPr>
-        <p:spPr>
-          <a:xfrm rot="0">
+          <p:cNvPr id="25" name="TextBox 25"/>
+          <p:cNvSpPr txBox="1"/>
+          <p:nvPr/>
+        </p:nvSpPr>
+        <p:spPr>
+          <a:xfrm>
             <a:off x="13389947" y="5544791"/>
             <a:ext cx="3052620" cy="1331020"/>
           </a:xfrm>
@@ -6345,7 +6849,7 @@
           </a:prstGeom>
         </p:spPr>
         <p:txBody>
-          <a:bodyPr anchor="t" rtlCol="false" tIns="0" lIns="0" bIns="0" rIns="0">
+          <a:bodyPr lIns="0" tIns="0" rIns="0" bIns="0" rtlCol="0" anchor="t">
             <a:spAutoFit/>
           </a:bodyPr>
           <a:lstStyle/>
@@ -6382,13 +6886,14 @@
 </file>
 
 <file path=ppt/slides/slide5.xml><?xml version="1.0" encoding="utf-8"?>
-<p:sld xmlns:p="http://schemas.openxmlformats.org/presentationml/2006/main" xmlns:a="http://schemas.openxmlformats.org/drawingml/2006/main" xmlns:r="http://schemas.openxmlformats.org/officeDocument/2006/relationships">
+<p:sld xmlns:a="http://schemas.openxmlformats.org/drawingml/2006/main" xmlns:r="http://schemas.openxmlformats.org/officeDocument/2006/relationships" xmlns:p="http://schemas.openxmlformats.org/presentationml/2006/main">
   <p:cSld>
     <p:bg>
       <p:bgPr>
         <a:solidFill>
           <a:srgbClr val="023047"/>
         </a:solidFill>
+        <a:effectLst/>
       </p:bgPr>
     </p:bg>
     <p:spTree>
@@ -6407,7 +6912,7 @@
       </p:grpSpPr>
       <p:sp>
         <p:nvSpPr>
-          <p:cNvPr name="AutoShape 2" id="2"/>
+          <p:cNvPr id="2" name="AutoShape 2"/>
           <p:cNvSpPr/>
           <p:nvPr/>
         </p:nvSpPr>
@@ -6419,48 +6924,62 @@
           <a:prstGeom prst="line">
             <a:avLst/>
           </a:prstGeom>
-          <a:ln cap="flat" w="38100">
+          <a:ln w="38100" cap="flat">
             <a:solidFill>
               <a:srgbClr val="023047"/>
             </a:solidFill>
             <a:prstDash val="solid"/>
-            <a:headEnd type="none" len="sm" w="sm"/>
-            <a:tailEnd type="none" len="sm" w="sm"/>
+            <a:headEnd type="none" w="sm" len="sm"/>
+            <a:tailEnd type="none" w="sm" len="sm"/>
           </a:ln>
         </p:spPr>
-      </p:sp>
-      <p:sp>
-        <p:nvSpPr>
-          <p:cNvPr name="AutoShape 3" id="3"/>
+        <p:txBody>
+          <a:bodyPr/>
+          <a:lstStyle/>
+          <a:p>
+            <a:endParaRPr lang="fr-FR"/>
+          </a:p>
+        </p:txBody>
+      </p:sp>
+      <p:sp>
+        <p:nvSpPr>
+          <p:cNvPr id="3" name="AutoShape 3"/>
           <p:cNvSpPr/>
           <p:nvPr/>
         </p:nvSpPr>
         <p:spPr>
-          <a:xfrm flipV="true">
+          <a:xfrm flipV="1">
             <a:off x="1028700" y="9239250"/>
             <a:ext cx="16230600" cy="0"/>
           </a:xfrm>
           <a:prstGeom prst="line">
             <a:avLst/>
           </a:prstGeom>
-          <a:ln cap="flat" w="38100">
+          <a:ln w="38100" cap="flat">
             <a:solidFill>
               <a:srgbClr val="FFFFFF"/>
             </a:solidFill>
             <a:prstDash val="solid"/>
-            <a:headEnd type="none" len="sm" w="sm"/>
-            <a:tailEnd type="none" len="sm" w="sm"/>
+            <a:headEnd type="none" w="sm" len="sm"/>
+            <a:tailEnd type="none" w="sm" len="sm"/>
           </a:ln>
         </p:spPr>
-      </p:sp>
-      <p:sp>
-        <p:nvSpPr>
-          <p:cNvPr name="Freeform 4" id="4"/>
+        <p:txBody>
+          <a:bodyPr/>
+          <a:lstStyle/>
+          <a:p>
+            <a:endParaRPr lang="fr-FR"/>
+          </a:p>
+        </p:txBody>
+      </p:sp>
+      <p:sp>
+        <p:nvSpPr>
+          <p:cNvPr id="4" name="Freeform 4"/>
           <p:cNvSpPr/>
           <p:nvPr/>
         </p:nvSpPr>
         <p:spPr>
-          <a:xfrm flipH="false" flipV="false" rot="0">
+          <a:xfrm>
             <a:off x="14155210" y="-615843"/>
             <a:ext cx="4729929" cy="3843707"/>
           </a:xfrm>
@@ -6469,9 +6988,9 @@
             <a:gdLst/>
             <a:ahLst/>
             <a:cxnLst/>
-            <a:rect r="r" b="b" t="t" l="l"/>
+            <a:rect l="l" t="t" r="r" b="b"/>
             <a:pathLst>
-              <a:path h="3843707" w="4729929">
+              <a:path w="4729929" h="3843707">
                 <a:moveTo>
                   <a:pt x="0" y="0"/>
                 </a:moveTo>
@@ -6500,15 +7019,22 @@
               </a:extLst>
             </a:blip>
             <a:stretch>
-              <a:fillRect l="0" t="0" r="0" b="0"/>
+              <a:fillRect/>
             </a:stretch>
           </a:blipFill>
         </p:spPr>
-      </p:sp>
-      <p:sp>
-        <p:nvSpPr>
-          <p:cNvPr name="TextBox 5" id="5"/>
-          <p:cNvSpPr txBox="true"/>
+        <p:txBody>
+          <a:bodyPr/>
+          <a:lstStyle/>
+          <a:p>
+            <a:endParaRPr lang="fr-FR"/>
+          </a:p>
+        </p:txBody>
+      </p:sp>
+      <p:sp>
+        <p:nvSpPr>
+          <p:cNvPr id="5" name="TextBox 5"/>
+          <p:cNvSpPr txBox="1"/>
           <p:nvPr/>
         </p:nvSpPr>
         <p:spPr>
@@ -6521,7 +7047,7 @@
           </a:prstGeom>
         </p:spPr>
         <p:txBody>
-          <a:bodyPr anchor="t" rtlCol="false" tIns="0" lIns="0" bIns="0" rIns="0">
+          <a:bodyPr lIns="0" tIns="0" rIns="0" bIns="0" rtlCol="0" anchor="t">
             <a:spAutoFit/>
           </a:bodyPr>
           <a:lstStyle/>
@@ -6548,12 +7074,12 @@
       </p:sp>
       <p:sp>
         <p:nvSpPr>
-          <p:cNvPr name="Freeform 6" id="6"/>
+          <p:cNvPr id="6" name="Freeform 6"/>
           <p:cNvSpPr/>
           <p:nvPr/>
         </p:nvSpPr>
         <p:spPr>
-          <a:xfrm flipH="false" flipV="false" rot="-5400000">
+          <a:xfrm rot="-5400000">
             <a:off x="-1305374" y="237368"/>
             <a:ext cx="5107990" cy="873002"/>
           </a:xfrm>
@@ -6562,9 +7088,9 @@
             <a:gdLst/>
             <a:ahLst/>
             <a:cxnLst/>
-            <a:rect r="r" b="b" t="t" l="l"/>
+            <a:rect l="l" t="t" r="r" b="b"/>
             <a:pathLst>
-              <a:path h="873002" w="5107990">
+              <a:path w="5107990" h="873002">
                 <a:moveTo>
                   <a:pt x="0" y="0"/>
                 </a:moveTo>
@@ -6593,19 +7119,26 @@
               </a:extLst>
             </a:blip>
             <a:stretch>
-              <a:fillRect l="0" t="0" r="0" b="0"/>
+              <a:fillRect/>
             </a:stretch>
           </a:blipFill>
         </p:spPr>
-      </p:sp>
-      <p:sp>
-        <p:nvSpPr>
-          <p:cNvPr name="Freeform 7" id="7"/>
+        <p:txBody>
+          <a:bodyPr/>
+          <a:lstStyle/>
+          <a:p>
+            <a:endParaRPr lang="fr-FR"/>
+          </a:p>
+        </p:txBody>
+      </p:sp>
+      <p:sp>
+        <p:nvSpPr>
+          <p:cNvPr id="7" name="Freeform 7"/>
           <p:cNvSpPr/>
           <p:nvPr/>
         </p:nvSpPr>
         <p:spPr>
-          <a:xfrm flipH="false" flipV="false" rot="0">
+          <a:xfrm>
             <a:off x="6927757" y="1895335"/>
             <a:ext cx="5508651" cy="2274233"/>
           </a:xfrm>
@@ -6614,9 +7147,9 @@
             <a:gdLst/>
             <a:ahLst/>
             <a:cxnLst/>
-            <a:rect r="r" b="b" t="t" l="l"/>
+            <a:rect l="l" t="t" r="r" b="b"/>
             <a:pathLst>
-              <a:path h="2274233" w="5508651">
+              <a:path w="5508651" h="2274233">
                 <a:moveTo>
                   <a:pt x="0" y="0"/>
                 </a:moveTo>
@@ -6645,19 +7178,26 @@
               </a:extLst>
             </a:blip>
             <a:stretch>
-              <a:fillRect l="0" t="0" r="0" b="0"/>
+              <a:fillRect/>
             </a:stretch>
           </a:blipFill>
         </p:spPr>
-      </p:sp>
-      <p:sp>
-        <p:nvSpPr>
-          <p:cNvPr name="Freeform 8" id="8"/>
+        <p:txBody>
+          <a:bodyPr/>
+          <a:lstStyle/>
+          <a:p>
+            <a:endParaRPr lang="fr-FR"/>
+          </a:p>
+        </p:txBody>
+      </p:sp>
+      <p:sp>
+        <p:nvSpPr>
+          <p:cNvPr id="8" name="Freeform 8"/>
           <p:cNvSpPr/>
           <p:nvPr/>
         </p:nvSpPr>
         <p:spPr>
-          <a:xfrm flipH="false" flipV="false" rot="0">
+          <a:xfrm>
             <a:off x="6927757" y="4296364"/>
             <a:ext cx="5508651" cy="2274233"/>
           </a:xfrm>
@@ -6666,9 +7206,9 @@
             <a:gdLst/>
             <a:ahLst/>
             <a:cxnLst/>
-            <a:rect r="r" b="b" t="t" l="l"/>
+            <a:rect l="l" t="t" r="r" b="b"/>
             <a:pathLst>
-              <a:path h="2274233" w="5508651">
+              <a:path w="5508651" h="2274233">
                 <a:moveTo>
                   <a:pt x="0" y="0"/>
                 </a:moveTo>
@@ -6697,19 +7237,26 @@
               </a:extLst>
             </a:blip>
             <a:stretch>
-              <a:fillRect l="0" t="0" r="0" b="0"/>
+              <a:fillRect/>
             </a:stretch>
           </a:blipFill>
         </p:spPr>
-      </p:sp>
-      <p:sp>
-        <p:nvSpPr>
-          <p:cNvPr name="Freeform 9" id="9"/>
+        <p:txBody>
+          <a:bodyPr/>
+          <a:lstStyle/>
+          <a:p>
+            <a:endParaRPr lang="fr-FR"/>
+          </a:p>
+        </p:txBody>
+      </p:sp>
+      <p:sp>
+        <p:nvSpPr>
+          <p:cNvPr id="9" name="Freeform 9"/>
           <p:cNvSpPr/>
           <p:nvPr/>
         </p:nvSpPr>
         <p:spPr>
-          <a:xfrm flipH="false" flipV="false" rot="0">
+          <a:xfrm>
             <a:off x="6927757" y="6694422"/>
             <a:ext cx="5508651" cy="2274233"/>
           </a:xfrm>
@@ -6718,9 +7265,9 @@
             <a:gdLst/>
             <a:ahLst/>
             <a:cxnLst/>
-            <a:rect r="r" b="b" t="t" l="l"/>
+            <a:rect l="l" t="t" r="r" b="b"/>
             <a:pathLst>
-              <a:path h="2274233" w="5508651">
+              <a:path w="5508651" h="2274233">
                 <a:moveTo>
                   <a:pt x="0" y="0"/>
                 </a:moveTo>
@@ -6749,19 +7296,26 @@
               </a:extLst>
             </a:blip>
             <a:stretch>
-              <a:fillRect l="0" t="0" r="0" b="0"/>
+              <a:fillRect/>
             </a:stretch>
           </a:blipFill>
         </p:spPr>
-      </p:sp>
-      <p:sp>
-        <p:nvSpPr>
-          <p:cNvPr name="Freeform 10" id="10"/>
+        <p:txBody>
+          <a:bodyPr/>
+          <a:lstStyle/>
+          <a:p>
+            <a:endParaRPr lang="fr-FR"/>
+          </a:p>
+        </p:txBody>
+      </p:sp>
+      <p:sp>
+        <p:nvSpPr>
+          <p:cNvPr id="10" name="Freeform 10"/>
           <p:cNvSpPr/>
           <p:nvPr/>
         </p:nvSpPr>
         <p:spPr>
-          <a:xfrm flipH="false" flipV="false" rot="0">
+          <a:xfrm>
             <a:off x="5689382" y="2048332"/>
             <a:ext cx="677030" cy="6770296"/>
           </a:xfrm>
@@ -6770,9 +7324,9 @@
             <a:gdLst/>
             <a:ahLst/>
             <a:cxnLst/>
-            <a:rect r="r" b="b" t="t" l="l"/>
+            <a:rect l="l" t="t" r="r" b="b"/>
             <a:pathLst>
-              <a:path h="6770296" w="677030">
+              <a:path w="677030" h="6770296">
                 <a:moveTo>
                   <a:pt x="0" y="0"/>
                 </a:moveTo>
@@ -6801,19 +7355,26 @@
               </a:extLst>
             </a:blip>
             <a:stretch>
-              <a:fillRect l="0" t="0" r="0" b="0"/>
+              <a:fillRect/>
             </a:stretch>
           </a:blipFill>
         </p:spPr>
-      </p:sp>
-      <p:sp>
-        <p:nvSpPr>
-          <p:cNvPr name="TextBox 11" id="11"/>
-          <p:cNvSpPr txBox="true"/>
-          <p:nvPr/>
-        </p:nvSpPr>
-        <p:spPr>
-          <a:xfrm rot="0">
+        <p:txBody>
+          <a:bodyPr/>
+          <a:lstStyle/>
+          <a:p>
+            <a:endParaRPr lang="fr-FR"/>
+          </a:p>
+        </p:txBody>
+      </p:sp>
+      <p:sp>
+        <p:nvSpPr>
+          <p:cNvPr id="11" name="TextBox 11"/>
+          <p:cNvSpPr txBox="1"/>
+          <p:nvPr/>
+        </p:nvSpPr>
+        <p:spPr>
+          <a:xfrm>
             <a:off x="13358767" y="9394534"/>
             <a:ext cx="3900533" cy="246380"/>
           </a:xfrm>
@@ -6822,7 +7383,7 @@
           </a:prstGeom>
         </p:spPr>
         <p:txBody>
-          <a:bodyPr anchor="t" rtlCol="false" tIns="0" lIns="0" bIns="0" rIns="0">
+          <a:bodyPr lIns="0" tIns="0" rIns="0" bIns="0" rtlCol="0" anchor="t">
             <a:spAutoFit/>
           </a:bodyPr>
           <a:lstStyle/>
@@ -6849,12 +7410,12 @@
       </p:sp>
       <p:sp>
         <p:nvSpPr>
-          <p:cNvPr name="TextBox 12" id="12"/>
-          <p:cNvSpPr txBox="true"/>
-          <p:nvPr/>
-        </p:nvSpPr>
-        <p:spPr>
-          <a:xfrm rot="0">
+          <p:cNvPr id="12" name="TextBox 12"/>
+          <p:cNvSpPr txBox="1"/>
+          <p:nvPr/>
+        </p:nvSpPr>
+        <p:spPr>
+          <a:xfrm>
             <a:off x="13358767" y="9394534"/>
             <a:ext cx="3900533" cy="246380"/>
           </a:xfrm>
@@ -6863,7 +7424,7 @@
           </a:prstGeom>
         </p:spPr>
         <p:txBody>
-          <a:bodyPr anchor="t" rtlCol="false" tIns="0" lIns="0" bIns="0" rIns="0">
+          <a:bodyPr lIns="0" tIns="0" rIns="0" bIns="0" rtlCol="0" anchor="t">
             <a:spAutoFit/>
           </a:bodyPr>
           <a:lstStyle/>
@@ -6890,12 +7451,12 @@
       </p:sp>
       <p:sp>
         <p:nvSpPr>
-          <p:cNvPr name="TextBox 13" id="13"/>
-          <p:cNvSpPr txBox="true"/>
-          <p:nvPr/>
-        </p:nvSpPr>
-        <p:spPr>
-          <a:xfrm rot="0">
+          <p:cNvPr id="13" name="TextBox 13"/>
+          <p:cNvSpPr txBox="1"/>
+          <p:nvPr/>
+        </p:nvSpPr>
+        <p:spPr>
+          <a:xfrm>
             <a:off x="7190142" y="2819182"/>
             <a:ext cx="5136282" cy="540838"/>
           </a:xfrm>
@@ -6904,7 +7465,7 @@
           </a:prstGeom>
         </p:spPr>
         <p:txBody>
-          <a:bodyPr anchor="t" rtlCol="false" tIns="0" lIns="0" bIns="0" rIns="0">
+          <a:bodyPr lIns="0" tIns="0" rIns="0" bIns="0" rtlCol="0" anchor="t">
             <a:spAutoFit/>
           </a:bodyPr>
           <a:lstStyle/>
@@ -6931,12 +7492,12 @@
       </p:sp>
       <p:sp>
         <p:nvSpPr>
-          <p:cNvPr name="TextBox 14" id="14"/>
-          <p:cNvSpPr txBox="true"/>
-          <p:nvPr/>
-        </p:nvSpPr>
-        <p:spPr>
-          <a:xfrm rot="0">
+          <p:cNvPr id="14" name="TextBox 14"/>
+          <p:cNvSpPr txBox="1"/>
+          <p:nvPr/>
+        </p:nvSpPr>
+        <p:spPr>
+          <a:xfrm>
             <a:off x="7190142" y="5007682"/>
             <a:ext cx="4818457" cy="1095822"/>
           </a:xfrm>
@@ -6945,7 +7506,7 @@
           </a:prstGeom>
         </p:spPr>
         <p:txBody>
-          <a:bodyPr anchor="t" rtlCol="false" tIns="0" lIns="0" bIns="0" rIns="0">
+          <a:bodyPr lIns="0" tIns="0" rIns="0" bIns="0" rtlCol="0" anchor="t">
             <a:spAutoFit/>
           </a:bodyPr>
           <a:lstStyle/>
@@ -6972,12 +7533,12 @@
       </p:sp>
       <p:sp>
         <p:nvSpPr>
-          <p:cNvPr name="TextBox 15" id="15"/>
-          <p:cNvSpPr txBox="true"/>
-          <p:nvPr/>
-        </p:nvSpPr>
-        <p:spPr>
-          <a:xfrm rot="0">
+          <p:cNvPr id="15" name="TextBox 15"/>
+          <p:cNvSpPr txBox="1"/>
+          <p:nvPr/>
+        </p:nvSpPr>
+        <p:spPr>
+          <a:xfrm>
             <a:off x="7100306" y="7559852"/>
             <a:ext cx="5163554" cy="543372"/>
           </a:xfrm>
@@ -6986,7 +7547,7 @@
           </a:prstGeom>
         </p:spPr>
         <p:txBody>
-          <a:bodyPr anchor="t" rtlCol="false" tIns="0" lIns="0" bIns="0" rIns="0">
+          <a:bodyPr lIns="0" tIns="0" rIns="0" bIns="0" rtlCol="0" anchor="t">
             <a:spAutoFit/>
           </a:bodyPr>
           <a:lstStyle/>
@@ -7013,8 +7574,8 @@
       </p:sp>
       <p:sp>
         <p:nvSpPr>
-          <p:cNvPr name="TextBox 16" id="16"/>
-          <p:cNvSpPr txBox="true"/>
+          <p:cNvPr id="16" name="TextBox 16"/>
+          <p:cNvSpPr txBox="1"/>
           <p:nvPr/>
         </p:nvSpPr>
         <p:spPr>
@@ -7027,7 +7588,7 @@
           </a:prstGeom>
         </p:spPr>
         <p:txBody>
-          <a:bodyPr anchor="t" rtlCol="false" tIns="0" lIns="0" bIns="0" rIns="0">
+          <a:bodyPr lIns="0" tIns="0" rIns="0" bIns="0" rtlCol="0" anchor="t">
             <a:spAutoFit/>
           </a:bodyPr>
           <a:lstStyle/>
@@ -7061,7 +7622,7 @@
 </file>
 
 <file path=ppt/slides/slide6.xml><?xml version="1.0" encoding="utf-8"?>
-<p:sld xmlns:p="http://schemas.openxmlformats.org/presentationml/2006/main" xmlns:a="http://schemas.openxmlformats.org/drawingml/2006/main" xmlns:r="http://schemas.openxmlformats.org/officeDocument/2006/relationships">
+<p:sld xmlns:a="http://schemas.openxmlformats.org/drawingml/2006/main" xmlns:r="http://schemas.openxmlformats.org/officeDocument/2006/relationships" xmlns:p="http://schemas.openxmlformats.org/presentationml/2006/main">
   <p:cSld>
     <p:spTree>
       <p:nvGrpSpPr>
@@ -7079,7 +7640,7 @@
       </p:grpSpPr>
       <p:grpSp>
         <p:nvGrpSpPr>
-          <p:cNvPr name="Group 2" id="2"/>
+          <p:cNvPr id="2" name="Group 2"/>
           <p:cNvGrpSpPr/>
           <p:nvPr/>
         </p:nvGrpSpPr>
@@ -7093,12 +7654,12 @@
         </p:grpSpPr>
         <p:sp>
           <p:nvSpPr>
-            <p:cNvPr name="Freeform 3" id="3"/>
+            <p:cNvPr id="3" name="Freeform 3"/>
             <p:cNvSpPr/>
             <p:nvPr/>
           </p:nvSpPr>
           <p:spPr>
-            <a:xfrm flipH="false" flipV="false" rot="0">
+            <a:xfrm>
               <a:off x="17780" y="22860"/>
               <a:ext cx="1439207" cy="360680"/>
             </a:xfrm>
@@ -7107,9 +7668,9 @@
               <a:gdLst/>
               <a:ahLst/>
               <a:cxnLst/>
-              <a:rect r="r" b="b" t="t" l="l"/>
+              <a:rect l="l" t="t" r="r" b="b"/>
               <a:pathLst>
-                <a:path h="360680" w="1439207">
+                <a:path w="1439207" h="360680">
                   <a:moveTo>
                     <a:pt x="1439207" y="180340"/>
                   </a:moveTo>
@@ -7153,16 +7714,23 @@
               <a:srgbClr val="023047"/>
             </a:solidFill>
           </p:spPr>
+          <p:txBody>
+            <a:bodyPr/>
+            <a:lstStyle/>
+            <a:p>
+              <a:endParaRPr lang="fr-FR"/>
+            </a:p>
+          </p:txBody>
         </p:sp>
       </p:grpSp>
       <p:sp>
         <p:nvSpPr>
-          <p:cNvPr name="Freeform 4" id="4"/>
+          <p:cNvPr id="4" name="Freeform 4"/>
           <p:cNvSpPr/>
           <p:nvPr/>
         </p:nvSpPr>
         <p:spPr>
-          <a:xfrm flipH="true" flipV="true" rot="3621474">
+          <a:xfrm rot="3621474" flipH="1" flipV="1">
             <a:off x="-1054933" y="-430389"/>
             <a:ext cx="4534793" cy="3685133"/>
           </a:xfrm>
@@ -7171,9 +7739,9 @@
             <a:gdLst/>
             <a:ahLst/>
             <a:cxnLst/>
-            <a:rect r="r" b="b" t="t" l="l"/>
+            <a:rect l="l" t="t" r="r" b="b"/>
             <a:pathLst>
-              <a:path h="3685133" w="4534793">
+              <a:path w="4534793" h="3685133">
                 <a:moveTo>
                   <a:pt x="4534793" y="3685132"/>
                 </a:moveTo>
@@ -7202,15 +7770,22 @@
               </a:extLst>
             </a:blip>
             <a:stretch>
-              <a:fillRect l="0" t="0" r="0" b="0"/>
+              <a:fillRect/>
             </a:stretch>
           </a:blipFill>
         </p:spPr>
-      </p:sp>
-      <p:sp>
-        <p:nvSpPr>
-          <p:cNvPr name="TextBox 5" id="5"/>
-          <p:cNvSpPr txBox="true"/>
+        <p:txBody>
+          <a:bodyPr/>
+          <a:lstStyle/>
+          <a:p>
+            <a:endParaRPr lang="fr-FR"/>
+          </a:p>
+        </p:txBody>
+      </p:sp>
+      <p:sp>
+        <p:nvSpPr>
+          <p:cNvPr id="5" name="TextBox 5"/>
+          <p:cNvSpPr txBox="1"/>
           <p:nvPr/>
         </p:nvSpPr>
         <p:spPr>
@@ -7223,7 +7798,7 @@
           </a:prstGeom>
         </p:spPr>
         <p:txBody>
-          <a:bodyPr anchor="t" rtlCol="false" tIns="0" lIns="0" bIns="0" rIns="0">
+          <a:bodyPr lIns="0" tIns="0" rIns="0" bIns="0" rtlCol="0" anchor="t">
             <a:spAutoFit/>
           </a:bodyPr>
           <a:lstStyle/>
@@ -7250,12 +7825,12 @@
       </p:sp>
       <p:sp>
         <p:nvSpPr>
-          <p:cNvPr name="Freeform 6" id="6"/>
+          <p:cNvPr id="6" name="Freeform 6"/>
           <p:cNvSpPr/>
           <p:nvPr/>
         </p:nvSpPr>
         <p:spPr>
-          <a:xfrm flipH="false" flipV="false" rot="-5400000">
+          <a:xfrm rot="-5400000">
             <a:off x="14064476" y="820275"/>
             <a:ext cx="5107990" cy="873002"/>
           </a:xfrm>
@@ -7264,9 +7839,9 @@
             <a:gdLst/>
             <a:ahLst/>
             <a:cxnLst/>
-            <a:rect r="r" b="b" t="t" l="l"/>
+            <a:rect l="l" t="t" r="r" b="b"/>
             <a:pathLst>
-              <a:path h="873002" w="5107990">
+              <a:path w="5107990" h="873002">
                 <a:moveTo>
                   <a:pt x="0" y="0"/>
                 </a:moveTo>
@@ -7295,14 +7870,21 @@
               </a:extLst>
             </a:blip>
             <a:stretch>
-              <a:fillRect l="0" t="0" r="0" b="0"/>
+              <a:fillRect/>
             </a:stretch>
           </a:blipFill>
         </p:spPr>
-      </p:sp>
-      <p:sp>
-        <p:nvSpPr>
-          <p:cNvPr name="AutoShape 7" id="7"/>
+        <p:txBody>
+          <a:bodyPr/>
+          <a:lstStyle/>
+          <a:p>
+            <a:endParaRPr lang="fr-FR"/>
+          </a:p>
+        </p:txBody>
+      </p:sp>
+      <p:sp>
+        <p:nvSpPr>
+          <p:cNvPr id="7" name="AutoShape 7"/>
           <p:cNvSpPr/>
           <p:nvPr/>
         </p:nvSpPr>
@@ -7314,48 +7896,62 @@
           <a:prstGeom prst="line">
             <a:avLst/>
           </a:prstGeom>
-          <a:ln cap="flat" w="38100">
+          <a:ln w="38100" cap="flat">
             <a:solidFill>
               <a:srgbClr val="023047"/>
             </a:solidFill>
             <a:prstDash val="solid"/>
-            <a:headEnd type="none" len="sm" w="sm"/>
-            <a:tailEnd type="none" len="sm" w="sm"/>
+            <a:headEnd type="none" w="sm" len="sm"/>
+            <a:tailEnd type="none" w="sm" len="sm"/>
           </a:ln>
         </p:spPr>
-      </p:sp>
-      <p:sp>
-        <p:nvSpPr>
-          <p:cNvPr name="AutoShape 8" id="8"/>
+        <p:txBody>
+          <a:bodyPr/>
+          <a:lstStyle/>
+          <a:p>
+            <a:endParaRPr lang="fr-FR"/>
+          </a:p>
+        </p:txBody>
+      </p:sp>
+      <p:sp>
+        <p:nvSpPr>
+          <p:cNvPr id="8" name="AutoShape 8"/>
           <p:cNvSpPr/>
           <p:nvPr/>
         </p:nvSpPr>
         <p:spPr>
-          <a:xfrm flipV="true">
+          <a:xfrm flipV="1">
             <a:off x="1028700" y="9239250"/>
             <a:ext cx="16230600" cy="0"/>
           </a:xfrm>
           <a:prstGeom prst="line">
             <a:avLst/>
           </a:prstGeom>
-          <a:ln cap="flat" w="38100">
+          <a:ln w="38100" cap="flat">
             <a:solidFill>
               <a:srgbClr val="023047"/>
             </a:solidFill>
             <a:prstDash val="solid"/>
-            <a:headEnd type="none" len="sm" w="sm"/>
-            <a:tailEnd type="none" len="sm" w="sm"/>
+            <a:headEnd type="none" w="sm" len="sm"/>
+            <a:tailEnd type="none" w="sm" len="sm"/>
           </a:ln>
         </p:spPr>
-      </p:sp>
-      <p:sp>
-        <p:nvSpPr>
-          <p:cNvPr name="TextBox 9" id="9"/>
-          <p:cNvSpPr txBox="true"/>
-          <p:nvPr/>
-        </p:nvSpPr>
-        <p:spPr>
-          <a:xfrm rot="0">
+        <p:txBody>
+          <a:bodyPr/>
+          <a:lstStyle/>
+          <a:p>
+            <a:endParaRPr lang="fr-FR"/>
+          </a:p>
+        </p:txBody>
+      </p:sp>
+      <p:sp>
+        <p:nvSpPr>
+          <p:cNvPr id="9" name="TextBox 9"/>
+          <p:cNvSpPr txBox="1"/>
+          <p:nvPr/>
+        </p:nvSpPr>
+        <p:spPr>
+          <a:xfrm>
             <a:off x="13358767" y="9394534"/>
             <a:ext cx="3900533" cy="246380"/>
           </a:xfrm>
@@ -7364,7 +7960,7 @@
           </a:prstGeom>
         </p:spPr>
         <p:txBody>
-          <a:bodyPr anchor="t" rtlCol="false" tIns="0" lIns="0" bIns="0" rIns="0">
+          <a:bodyPr lIns="0" tIns="0" rIns="0" bIns="0" rtlCol="0" anchor="t">
             <a:spAutoFit/>
           </a:bodyPr>
           <a:lstStyle/>
@@ -7391,7 +7987,7 @@
       </p:sp>
       <p:grpSp>
         <p:nvGrpSpPr>
-          <p:cNvPr name="Group 10" id="10"/>
+          <p:cNvPr id="10" name="Group 10"/>
           <p:cNvGrpSpPr/>
           <p:nvPr/>
         </p:nvGrpSpPr>
@@ -7405,12 +8001,12 @@
         </p:grpSpPr>
         <p:sp>
           <p:nvSpPr>
-            <p:cNvPr name="Freeform 11" id="11"/>
+            <p:cNvPr id="11" name="Freeform 11"/>
             <p:cNvSpPr/>
             <p:nvPr/>
           </p:nvSpPr>
           <p:spPr>
-            <a:xfrm flipH="false" flipV="false" rot="0">
+            <a:xfrm>
               <a:off x="17780" y="22860"/>
               <a:ext cx="1706988" cy="360680"/>
             </a:xfrm>
@@ -7419,9 +8015,9 @@
               <a:gdLst/>
               <a:ahLst/>
               <a:cxnLst/>
-              <a:rect r="r" b="b" t="t" l="l"/>
+              <a:rect l="l" t="t" r="r" b="b"/>
               <a:pathLst>
-                <a:path h="360680" w="1706988">
+                <a:path w="1706988" h="360680">
                   <a:moveTo>
                     <a:pt x="1706988" y="180340"/>
                   </a:moveTo>
@@ -7465,11 +8061,18 @@
               <a:srgbClr val="67A4D8"/>
             </a:solidFill>
           </p:spPr>
+          <p:txBody>
+            <a:bodyPr/>
+            <a:lstStyle/>
+            <a:p>
+              <a:endParaRPr lang="fr-FR"/>
+            </a:p>
+          </p:txBody>
         </p:sp>
       </p:grpSp>
       <p:grpSp>
         <p:nvGrpSpPr>
-          <p:cNvPr name="Group 12" id="12"/>
+          <p:cNvPr id="12" name="Group 12"/>
           <p:cNvGrpSpPr/>
           <p:nvPr/>
         </p:nvGrpSpPr>
@@ -7483,12 +8086,12 @@
         </p:grpSpPr>
         <p:sp>
           <p:nvSpPr>
-            <p:cNvPr name="Freeform 13" id="13"/>
+            <p:cNvPr id="13" name="Freeform 13"/>
             <p:cNvSpPr/>
             <p:nvPr/>
           </p:nvSpPr>
           <p:spPr>
-            <a:xfrm flipH="false" flipV="false" rot="0">
+            <a:xfrm>
               <a:off x="17780" y="22860"/>
               <a:ext cx="2056267" cy="360680"/>
             </a:xfrm>
@@ -7497,9 +8100,9 @@
               <a:gdLst/>
               <a:ahLst/>
               <a:cxnLst/>
-              <a:rect r="r" b="b" t="t" l="l"/>
+              <a:rect l="l" t="t" r="r" b="b"/>
               <a:pathLst>
-                <a:path h="360680" w="2056267">
+                <a:path w="2056267" h="360680">
                   <a:moveTo>
                     <a:pt x="2056267" y="180340"/>
                   </a:moveTo>
@@ -7543,16 +8146,23 @@
               <a:srgbClr val="13538A"/>
             </a:solidFill>
           </p:spPr>
+          <p:txBody>
+            <a:bodyPr/>
+            <a:lstStyle/>
+            <a:p>
+              <a:endParaRPr lang="fr-FR"/>
+            </a:p>
+          </p:txBody>
         </p:sp>
       </p:grpSp>
       <p:sp>
         <p:nvSpPr>
-          <p:cNvPr name="TextBox 14" id="14"/>
-          <p:cNvSpPr txBox="true"/>
-          <p:nvPr/>
-        </p:nvSpPr>
-        <p:spPr>
-          <a:xfrm rot="0">
+          <p:cNvPr id="14" name="TextBox 14"/>
+          <p:cNvSpPr txBox="1"/>
+          <p:nvPr/>
+        </p:nvSpPr>
+        <p:spPr>
+          <a:xfrm>
             <a:off x="1642096" y="2657996"/>
             <a:ext cx="2575722" cy="477829"/>
           </a:xfrm>
@@ -7561,7 +8171,7 @@
           </a:prstGeom>
         </p:spPr>
         <p:txBody>
-          <a:bodyPr anchor="t" rtlCol="false" tIns="0" lIns="0" bIns="0" rIns="0">
+          <a:bodyPr lIns="0" tIns="0" rIns="0" bIns="0" rtlCol="0" anchor="t">
             <a:spAutoFit/>
           </a:bodyPr>
           <a:lstStyle/>
@@ -7572,7 +8182,7 @@
               </a:lnSpc>
             </a:pPr>
             <a:r>
-              <a:rPr lang="en-US" sz="3128" spc="-156" b="true">
+              <a:rPr lang="en-US" sz="3128" b="1" spc="-156">
                 <a:solidFill>
                   <a:srgbClr val="FFFFFF"/>
                 </a:solidFill>
@@ -7581,31 +8191,19 @@
                 <a:cs typeface="HK Grotesk Bold"/>
                 <a:sym typeface="HK Grotesk Bold"/>
               </a:rPr>
-              <a:t>Lu</a:t>
-            </a:r>
-            <a:r>
-              <a:rPr lang="en-US" b="true" sz="3128" spc="-156">
-                <a:solidFill>
-                  <a:srgbClr val="FFFFFF"/>
-                </a:solidFill>
-                <a:latin typeface="HK Grotesk Bold"/>
-                <a:ea typeface="HK Grotesk Bold"/>
-                <a:cs typeface="HK Grotesk Bold"/>
-                <a:sym typeface="HK Grotesk Bold"/>
-              </a:rPr>
-              <a:t>c Gracianette</a:t>
-            </a:r>
-          </a:p>
-        </p:txBody>
-      </p:sp>
-      <p:sp>
-        <p:nvSpPr>
-          <p:cNvPr name="TextBox 15" id="15"/>
-          <p:cNvSpPr txBox="true"/>
-          <p:nvPr/>
-        </p:nvSpPr>
-        <p:spPr>
-          <a:xfrm rot="0">
+              <a:t>Luc Gracianette</a:t>
+            </a:r>
+          </a:p>
+        </p:txBody>
+      </p:sp>
+      <p:sp>
+        <p:nvSpPr>
+          <p:cNvPr id="15" name="TextBox 15"/>
+          <p:cNvSpPr txBox="1"/>
+          <p:nvPr/>
+        </p:nvSpPr>
+        <p:spPr>
+          <a:xfrm>
             <a:off x="1107689" y="3069150"/>
             <a:ext cx="3749859" cy="374483"/>
           </a:xfrm>
@@ -7614,7 +8212,7 @@
           </a:prstGeom>
         </p:spPr>
         <p:txBody>
-          <a:bodyPr anchor="t" rtlCol="false" tIns="0" lIns="0" bIns="0" rIns="0">
+          <a:bodyPr lIns="0" tIns="0" rIns="0" bIns="0" rtlCol="0" anchor="t">
             <a:spAutoFit/>
           </a:bodyPr>
           <a:lstStyle/>
@@ -7634,31 +8232,19 @@
                 <a:cs typeface="HK Grotesk"/>
                 <a:sym typeface="HK Grotesk"/>
               </a:rPr>
-              <a:t>(Architecte du</a:t>
-            </a:r>
-            <a:r>
-              <a:rPr lang="en-US" sz="2438" spc="-121">
-                <a:solidFill>
-                  <a:srgbClr val="FFFFFF"/>
-                </a:solidFill>
-                <a:latin typeface="HK Grotesk"/>
-                <a:ea typeface="HK Grotesk"/>
-                <a:cs typeface="HK Grotesk"/>
-                <a:sym typeface="HK Grotesk"/>
-              </a:rPr>
-              <a:t> Domaine DATA)</a:t>
-            </a:r>
-          </a:p>
-        </p:txBody>
-      </p:sp>
-      <p:sp>
-        <p:nvSpPr>
-          <p:cNvPr name="TextBox 16" id="16"/>
-          <p:cNvSpPr txBox="true"/>
-          <p:nvPr/>
-        </p:nvSpPr>
-        <p:spPr>
-          <a:xfrm rot="0">
+              <a:t>(Architecte du Domaine DATA)</a:t>
+            </a:r>
+          </a:p>
+        </p:txBody>
+      </p:sp>
+      <p:sp>
+        <p:nvSpPr>
+          <p:cNvPr id="16" name="TextBox 16"/>
+          <p:cNvSpPr txBox="1"/>
+          <p:nvPr/>
+        </p:nvSpPr>
+        <p:spPr>
+          <a:xfrm>
             <a:off x="166043" y="3612941"/>
             <a:ext cx="5890996" cy="736757"/>
           </a:xfrm>
@@ -7667,7 +8253,7 @@
           </a:prstGeom>
         </p:spPr>
         <p:txBody>
-          <a:bodyPr anchor="t" rtlCol="false" tIns="0" lIns="0" bIns="0" rIns="0">
+          <a:bodyPr lIns="0" tIns="0" rIns="0" bIns="0" rtlCol="0" anchor="t">
             <a:spAutoFit/>
           </a:bodyPr>
           <a:lstStyle/>
@@ -7687,31 +8273,19 @@
                 <a:cs typeface="Montserrat"/>
                 <a:sym typeface="Montserrat"/>
               </a:rPr>
-              <a:t>Rencontré via</a:t>
-            </a:r>
-            <a:r>
-              <a:rPr lang="en-US" sz="2438" spc="-121">
-                <a:solidFill>
-                  <a:srgbClr val="FFFFFF"/>
-                </a:solidFill>
-                <a:latin typeface="Montserrat"/>
-                <a:ea typeface="Montserrat"/>
-                <a:cs typeface="Montserrat"/>
-                <a:sym typeface="Montserrat"/>
-              </a:rPr>
-              <a:t> MyJobGlasses. Travaille chez La Banque Postale.</a:t>
-            </a:r>
-          </a:p>
-        </p:txBody>
-      </p:sp>
-      <p:sp>
-        <p:nvSpPr>
-          <p:cNvPr name="TextBox 17" id="17"/>
-          <p:cNvSpPr txBox="true"/>
-          <p:nvPr/>
-        </p:nvSpPr>
-        <p:spPr>
-          <a:xfrm rot="0">
+              <a:t>Rencontré via MyJobGlasses. Travaille chez La Banque Postale.</a:t>
+            </a:r>
+          </a:p>
+        </p:txBody>
+      </p:sp>
+      <p:sp>
+        <p:nvSpPr>
+          <p:cNvPr id="17" name="TextBox 17"/>
+          <p:cNvSpPr txBox="1"/>
+          <p:nvPr/>
+        </p:nvSpPr>
+        <p:spPr>
+          <a:xfrm>
             <a:off x="1391425" y="4811460"/>
             <a:ext cx="5087765" cy="477829"/>
           </a:xfrm>
@@ -7720,7 +8294,7 @@
           </a:prstGeom>
         </p:spPr>
         <p:txBody>
-          <a:bodyPr anchor="t" rtlCol="false" tIns="0" lIns="0" bIns="0" rIns="0">
+          <a:bodyPr lIns="0" tIns="0" rIns="0" bIns="0" rtlCol="0" anchor="t">
             <a:spAutoFit/>
           </a:bodyPr>
           <a:lstStyle/>
@@ -7731,7 +8305,7 @@
               </a:lnSpc>
             </a:pPr>
             <a:r>
-              <a:rPr lang="en-US" sz="3128" spc="-156" b="true">
+              <a:rPr lang="en-US" sz="3128" b="1" spc="-156">
                 <a:solidFill>
                   <a:srgbClr val="FFFFFF"/>
                 </a:solidFill>
@@ -7740,31 +8314,19 @@
                 <a:cs typeface="HK Grotesk Bold"/>
                 <a:sym typeface="HK Grotesk Bold"/>
               </a:rPr>
-              <a:t>Mohamed El</a:t>
-            </a:r>
-            <a:r>
-              <a:rPr lang="en-US" b="true" sz="3128" spc="-156">
-                <a:solidFill>
-                  <a:srgbClr val="FFFFFF"/>
-                </a:solidFill>
-                <a:latin typeface="HK Grotesk Bold"/>
-                <a:ea typeface="HK Grotesk Bold"/>
-                <a:cs typeface="HK Grotesk Bold"/>
-                <a:sym typeface="HK Grotesk Bold"/>
-              </a:rPr>
-              <a:t> Mokhtar El Waghf</a:t>
-            </a:r>
-          </a:p>
-        </p:txBody>
-      </p:sp>
-      <p:sp>
-        <p:nvSpPr>
-          <p:cNvPr name="TextBox 18" id="18"/>
-          <p:cNvSpPr txBox="true"/>
-          <p:nvPr/>
-        </p:nvSpPr>
-        <p:spPr>
-          <a:xfrm rot="0">
+              <a:t>Mohamed El Mokhtar El Waghf</a:t>
+            </a:r>
+          </a:p>
+        </p:txBody>
+      </p:sp>
+      <p:sp>
+        <p:nvSpPr>
+          <p:cNvPr id="18" name="TextBox 18"/>
+          <p:cNvSpPr txBox="1"/>
+          <p:nvPr/>
+        </p:nvSpPr>
+        <p:spPr>
+          <a:xfrm>
             <a:off x="2863282" y="5270239"/>
             <a:ext cx="3749859" cy="374483"/>
           </a:xfrm>
@@ -7773,7 +8335,7 @@
           </a:prstGeom>
         </p:spPr>
         <p:txBody>
-          <a:bodyPr anchor="t" rtlCol="false" tIns="0" lIns="0" bIns="0" rIns="0">
+          <a:bodyPr lIns="0" tIns="0" rIns="0" bIns="0" rtlCol="0" anchor="t">
             <a:spAutoFit/>
           </a:bodyPr>
           <a:lstStyle/>
@@ -7793,31 +8355,19 @@
                 <a:cs typeface="HK Grotesk"/>
                 <a:sym typeface="HK Grotesk"/>
               </a:rPr>
-              <a:t>(Data Engineer</a:t>
-            </a:r>
-            <a:r>
-              <a:rPr lang="en-US" sz="2438" spc="-121">
-                <a:solidFill>
-                  <a:srgbClr val="FFFFFF"/>
-                </a:solidFill>
-                <a:latin typeface="HK Grotesk"/>
-                <a:ea typeface="HK Grotesk"/>
-                <a:cs typeface="HK Grotesk"/>
-                <a:sym typeface="HK Grotesk"/>
-              </a:rPr>
-              <a:t>)</a:t>
-            </a:r>
-          </a:p>
-        </p:txBody>
-      </p:sp>
-      <p:sp>
-        <p:nvSpPr>
-          <p:cNvPr name="TextBox 19" id="19"/>
-          <p:cNvSpPr txBox="true"/>
-          <p:nvPr/>
-        </p:nvSpPr>
-        <p:spPr>
-          <a:xfrm rot="0">
+              <a:t>(Data Engineer)</a:t>
+            </a:r>
+          </a:p>
+        </p:txBody>
+      </p:sp>
+      <p:sp>
+        <p:nvSpPr>
+          <p:cNvPr id="19" name="TextBox 19"/>
+          <p:cNvSpPr txBox="1"/>
+          <p:nvPr/>
+        </p:nvSpPr>
+        <p:spPr>
+          <a:xfrm>
             <a:off x="166043" y="5835223"/>
             <a:ext cx="7307181" cy="365282"/>
           </a:xfrm>
@@ -7826,7 +8376,7 @@
           </a:prstGeom>
         </p:spPr>
         <p:txBody>
-          <a:bodyPr anchor="t" rtlCol="false" tIns="0" lIns="0" bIns="0" rIns="0">
+          <a:bodyPr lIns="0" tIns="0" rIns="0" bIns="0" rtlCol="0" anchor="t">
             <a:spAutoFit/>
           </a:bodyPr>
           <a:lstStyle/>
@@ -7846,31 +8396,19 @@
                 <a:cs typeface="Montserrat"/>
                 <a:sym typeface="Montserrat"/>
               </a:rPr>
-              <a:t>Rencontré via</a:t>
-            </a:r>
-            <a:r>
-              <a:rPr lang="en-US" sz="2438" spc="-121">
-                <a:solidFill>
-                  <a:srgbClr val="FFFFFF"/>
-                </a:solidFill>
-                <a:latin typeface="Montserrat"/>
-                <a:ea typeface="Montserrat"/>
-                <a:cs typeface="Montserrat"/>
-                <a:sym typeface="Montserrat"/>
-              </a:rPr>
-              <a:t> Linkedin. Travaille chez Side.</a:t>
-            </a:r>
-          </a:p>
-        </p:txBody>
-      </p:sp>
-      <p:sp>
-        <p:nvSpPr>
-          <p:cNvPr name="TextBox 20" id="20"/>
-          <p:cNvSpPr txBox="true"/>
-          <p:nvPr/>
-        </p:nvSpPr>
-        <p:spPr>
-          <a:xfrm rot="0">
+              <a:t>Rencontré via Linkedin. Travaille chez Side.</a:t>
+            </a:r>
+          </a:p>
+        </p:txBody>
+      </p:sp>
+      <p:sp>
+        <p:nvSpPr>
+          <p:cNvPr id="20" name="TextBox 20"/>
+          <p:cNvSpPr txBox="1"/>
+          <p:nvPr/>
+        </p:nvSpPr>
+        <p:spPr>
+          <a:xfrm>
             <a:off x="2788205" y="6691604"/>
             <a:ext cx="5087765" cy="477829"/>
           </a:xfrm>
@@ -7879,7 +8417,7 @@
           </a:prstGeom>
         </p:spPr>
         <p:txBody>
-          <a:bodyPr anchor="t" rtlCol="false" tIns="0" lIns="0" bIns="0" rIns="0">
+          <a:bodyPr lIns="0" tIns="0" rIns="0" bIns="0" rtlCol="0" anchor="t">
             <a:spAutoFit/>
           </a:bodyPr>
           <a:lstStyle/>
@@ -7890,7 +8428,7 @@
               </a:lnSpc>
             </a:pPr>
             <a:r>
-              <a:rPr lang="en-US" sz="3128" spc="-156" b="true">
+              <a:rPr lang="en-US" sz="3128" b="1" spc="-156">
                 <a:solidFill>
                   <a:srgbClr val="FFFFFF"/>
                 </a:solidFill>
@@ -7899,31 +8437,19 @@
                 <a:cs typeface="HK Grotesk Bold"/>
                 <a:sym typeface="HK Grotesk Bold"/>
               </a:rPr>
-              <a:t>Ya</a:t>
-            </a:r>
-            <a:r>
-              <a:rPr lang="en-US" b="true" sz="3128" spc="-156">
-                <a:solidFill>
-                  <a:srgbClr val="FFFFFF"/>
-                </a:solidFill>
-                <a:latin typeface="HK Grotesk Bold"/>
-                <a:ea typeface="HK Grotesk Bold"/>
-                <a:cs typeface="HK Grotesk Bold"/>
-                <a:sym typeface="HK Grotesk Bold"/>
-              </a:rPr>
-              <a:t>hya YOUNES</a:t>
-            </a:r>
-          </a:p>
-        </p:txBody>
-      </p:sp>
-      <p:sp>
-        <p:nvSpPr>
-          <p:cNvPr name="TextBox 21" id="21"/>
-          <p:cNvSpPr txBox="true"/>
-          <p:nvPr/>
-        </p:nvSpPr>
-        <p:spPr>
-          <a:xfrm rot="0">
+              <a:t>Yahya YOUNES</a:t>
+            </a:r>
+          </a:p>
+        </p:txBody>
+      </p:sp>
+      <p:sp>
+        <p:nvSpPr>
+          <p:cNvPr id="21" name="TextBox 21"/>
+          <p:cNvSpPr txBox="1"/>
+          <p:nvPr/>
+        </p:nvSpPr>
+        <p:spPr>
+          <a:xfrm>
             <a:off x="3282832" y="7082129"/>
             <a:ext cx="3749859" cy="374483"/>
           </a:xfrm>
@@ -7932,7 +8458,7 @@
           </a:prstGeom>
         </p:spPr>
         <p:txBody>
-          <a:bodyPr anchor="t" rtlCol="false" tIns="0" lIns="0" bIns="0" rIns="0">
+          <a:bodyPr lIns="0" tIns="0" rIns="0" bIns="0" rtlCol="0" anchor="t">
             <a:spAutoFit/>
           </a:bodyPr>
           <a:lstStyle/>
@@ -7952,31 +8478,19 @@
                 <a:cs typeface="HK Grotesk"/>
                 <a:sym typeface="HK Grotesk"/>
               </a:rPr>
-              <a:t>(ML Engineer</a:t>
-            </a:r>
-            <a:r>
-              <a:rPr lang="en-US" sz="2438" spc="-121">
-                <a:solidFill>
-                  <a:srgbClr val="FFFFFF"/>
-                </a:solidFill>
-                <a:latin typeface="HK Grotesk"/>
-                <a:ea typeface="HK Grotesk"/>
-                <a:cs typeface="HK Grotesk"/>
-                <a:sym typeface="HK Grotesk"/>
-              </a:rPr>
-              <a:t>)</a:t>
-            </a:r>
-          </a:p>
-        </p:txBody>
-      </p:sp>
-      <p:sp>
-        <p:nvSpPr>
-          <p:cNvPr name="TextBox 22" id="22"/>
-          <p:cNvSpPr txBox="true"/>
-          <p:nvPr/>
-        </p:nvSpPr>
-        <p:spPr>
-          <a:xfrm rot="0">
+              <a:t>(ML Engineer)</a:t>
+            </a:r>
+          </a:p>
+        </p:txBody>
+      </p:sp>
+      <p:sp>
+        <p:nvSpPr>
+          <p:cNvPr id="22" name="TextBox 22"/>
+          <p:cNvSpPr txBox="1"/>
+          <p:nvPr/>
+        </p:nvSpPr>
+        <p:spPr>
+          <a:xfrm>
             <a:off x="166043" y="7650272"/>
             <a:ext cx="10021536" cy="365282"/>
           </a:xfrm>
@@ -7985,7 +8499,7 @@
           </a:prstGeom>
         </p:spPr>
         <p:txBody>
-          <a:bodyPr anchor="t" rtlCol="false" tIns="0" lIns="0" bIns="0" rIns="0">
+          <a:bodyPr lIns="0" tIns="0" rIns="0" bIns="0" rtlCol="0" anchor="t">
             <a:spAutoFit/>
           </a:bodyPr>
           <a:lstStyle/>
@@ -8005,19 +8519,7 @@
                 <a:cs typeface="Montserrat"/>
                 <a:sym typeface="Montserrat"/>
               </a:rPr>
-              <a:t>Rencontré via</a:t>
-            </a:r>
-            <a:r>
-              <a:rPr lang="en-US" sz="2438" spc="-121">
-                <a:solidFill>
-                  <a:srgbClr val="FFFFFF"/>
-                </a:solidFill>
-                <a:latin typeface="Montserrat"/>
-                <a:ea typeface="Montserrat"/>
-                <a:cs typeface="Montserrat"/>
-                <a:sym typeface="Montserrat"/>
-              </a:rPr>
-              <a:t> Linkedin. Travaille chez Sopra Steria.</a:t>
+              <a:t>Rencontré via Linkedin. Travaille chez Sopra Steria.</a:t>
             </a:r>
           </a:p>
         </p:txBody>
@@ -8031,7 +8533,7 @@
 </file>
 
 <file path=ppt/slides/slide7.xml><?xml version="1.0" encoding="utf-8"?>
-<p:sld xmlns:p="http://schemas.openxmlformats.org/presentationml/2006/main" xmlns:a="http://schemas.openxmlformats.org/drawingml/2006/main" xmlns:r="http://schemas.openxmlformats.org/officeDocument/2006/relationships">
+<p:sld xmlns:a="http://schemas.openxmlformats.org/drawingml/2006/main" xmlns:r="http://schemas.openxmlformats.org/officeDocument/2006/relationships" xmlns:p="http://schemas.openxmlformats.org/presentationml/2006/main">
   <p:cSld>
     <p:spTree>
       <p:nvGrpSpPr>
@@ -8049,12 +8551,12 @@
       </p:grpSpPr>
       <p:sp>
         <p:nvSpPr>
-          <p:cNvPr name="Freeform 2" id="2"/>
+          <p:cNvPr id="2" name="Freeform 2"/>
           <p:cNvSpPr/>
           <p:nvPr/>
         </p:nvSpPr>
         <p:spPr>
-          <a:xfrm flipH="false" flipV="false" rot="0">
+          <a:xfrm>
             <a:off x="14229585" y="1493106"/>
             <a:ext cx="4729929" cy="3843707"/>
           </a:xfrm>
@@ -8063,9 +8565,9 @@
             <a:gdLst/>
             <a:ahLst/>
             <a:cxnLst/>
-            <a:rect r="r" b="b" t="t" l="l"/>
+            <a:rect l="l" t="t" r="r" b="b"/>
             <a:pathLst>
-              <a:path h="3843707" w="4729929">
+              <a:path w="4729929" h="3843707">
                 <a:moveTo>
                   <a:pt x="0" y="0"/>
                 </a:moveTo>
@@ -8094,67 +8596,88 @@
               </a:extLst>
             </a:blip>
             <a:stretch>
-              <a:fillRect l="0" t="0" r="0" b="0"/>
+              <a:fillRect/>
             </a:stretch>
           </a:blipFill>
         </p:spPr>
-      </p:sp>
-      <p:sp>
-        <p:nvSpPr>
-          <p:cNvPr name="AutoShape 3" id="3"/>
+        <p:txBody>
+          <a:bodyPr/>
+          <a:lstStyle/>
+          <a:p>
+            <a:endParaRPr lang="fr-FR"/>
+          </a:p>
+        </p:txBody>
+      </p:sp>
+      <p:sp>
+        <p:nvSpPr>
+          <p:cNvPr id="3" name="AutoShape 3"/>
           <p:cNvSpPr/>
           <p:nvPr/>
         </p:nvSpPr>
         <p:spPr>
-          <a:xfrm flipV="true">
+          <a:xfrm flipV="1">
             <a:off x="1028700" y="1273490"/>
             <a:ext cx="16230600" cy="0"/>
           </a:xfrm>
           <a:prstGeom prst="line">
             <a:avLst/>
           </a:prstGeom>
-          <a:ln cap="flat" w="38100">
+          <a:ln w="38100" cap="flat">
             <a:solidFill>
               <a:srgbClr val="023047"/>
             </a:solidFill>
             <a:prstDash val="solid"/>
-            <a:headEnd type="none" len="sm" w="sm"/>
-            <a:tailEnd type="none" len="sm" w="sm"/>
+            <a:headEnd type="none" w="sm" len="sm"/>
+            <a:tailEnd type="none" w="sm" len="sm"/>
           </a:ln>
         </p:spPr>
-      </p:sp>
-      <p:sp>
-        <p:nvSpPr>
-          <p:cNvPr name="AutoShape 4" id="4"/>
+        <p:txBody>
+          <a:bodyPr/>
+          <a:lstStyle/>
+          <a:p>
+            <a:endParaRPr lang="fr-FR"/>
+          </a:p>
+        </p:txBody>
+      </p:sp>
+      <p:sp>
+        <p:nvSpPr>
+          <p:cNvPr id="4" name="AutoShape 4"/>
           <p:cNvSpPr/>
           <p:nvPr/>
         </p:nvSpPr>
         <p:spPr>
-          <a:xfrm flipV="true">
+          <a:xfrm flipV="1">
             <a:off x="1028700" y="9239250"/>
             <a:ext cx="16230600" cy="0"/>
           </a:xfrm>
           <a:prstGeom prst="line">
             <a:avLst/>
           </a:prstGeom>
-          <a:ln cap="flat" w="38100">
+          <a:ln w="38100" cap="flat">
             <a:solidFill>
               <a:srgbClr val="023047"/>
             </a:solidFill>
             <a:prstDash val="solid"/>
-            <a:headEnd type="none" len="sm" w="sm"/>
-            <a:tailEnd type="none" len="sm" w="sm"/>
+            <a:headEnd type="none" w="sm" len="sm"/>
+            <a:tailEnd type="none" w="sm" len="sm"/>
           </a:ln>
         </p:spPr>
-      </p:sp>
-      <p:sp>
-        <p:nvSpPr>
-          <p:cNvPr name="Freeform 5" id="5"/>
+        <p:txBody>
+          <a:bodyPr/>
+          <a:lstStyle/>
+          <a:p>
+            <a:endParaRPr lang="fr-FR"/>
+          </a:p>
+        </p:txBody>
+      </p:sp>
+      <p:sp>
+        <p:nvSpPr>
+          <p:cNvPr id="5" name="Freeform 5"/>
           <p:cNvSpPr/>
           <p:nvPr/>
         </p:nvSpPr>
         <p:spPr>
-          <a:xfrm flipH="false" flipV="false" rot="0">
+          <a:xfrm>
             <a:off x="-533878" y="5520444"/>
             <a:ext cx="5107990" cy="873002"/>
           </a:xfrm>
@@ -8163,9 +8686,9 @@
             <a:gdLst/>
             <a:ahLst/>
             <a:cxnLst/>
-            <a:rect r="r" b="b" t="t" l="l"/>
+            <a:rect l="l" t="t" r="r" b="b"/>
             <a:pathLst>
-              <a:path h="873002" w="5107990">
+              <a:path w="5107990" h="873002">
                 <a:moveTo>
                   <a:pt x="0" y="0"/>
                 </a:moveTo>
@@ -8194,19 +8717,26 @@
               </a:extLst>
             </a:blip>
             <a:stretch>
-              <a:fillRect l="0" t="0" r="0" b="0"/>
+              <a:fillRect/>
             </a:stretch>
           </a:blipFill>
         </p:spPr>
-      </p:sp>
-      <p:sp>
-        <p:nvSpPr>
-          <p:cNvPr name="TextBox 6" id="6"/>
-          <p:cNvSpPr txBox="true"/>
-          <p:nvPr/>
-        </p:nvSpPr>
-        <p:spPr>
-          <a:xfrm rot="0">
+        <p:txBody>
+          <a:bodyPr/>
+          <a:lstStyle/>
+          <a:p>
+            <a:endParaRPr lang="fr-FR"/>
+          </a:p>
+        </p:txBody>
+      </p:sp>
+      <p:sp>
+        <p:nvSpPr>
+          <p:cNvPr id="6" name="TextBox 6"/>
+          <p:cNvSpPr txBox="1"/>
+          <p:nvPr/>
+        </p:nvSpPr>
+        <p:spPr>
+          <a:xfrm>
             <a:off x="13358767" y="711200"/>
             <a:ext cx="3900533" cy="299720"/>
           </a:xfrm>
@@ -8215,12 +8745,12 @@
           </a:prstGeom>
         </p:spPr>
         <p:txBody>
-          <a:bodyPr anchor="t" rtlCol="false" tIns="0" lIns="0" bIns="0" rIns="0">
+          <a:bodyPr lIns="0" tIns="0" rIns="0" bIns="0" rtlCol="0" anchor="t">
             <a:spAutoFit/>
           </a:bodyPr>
           <a:lstStyle/>
           <a:p>
-            <a:pPr algn="r" marL="0" indent="0" lvl="0">
+            <a:pPr marL="0" lvl="0" indent="0" algn="r">
               <a:lnSpc>
                 <a:spcPts val="2470"/>
               </a:lnSpc>
@@ -8245,12 +8775,12 @@
       </p:sp>
       <p:sp>
         <p:nvSpPr>
-          <p:cNvPr name="TextBox 7" id="7"/>
-          <p:cNvSpPr txBox="true"/>
-          <p:nvPr/>
-        </p:nvSpPr>
-        <p:spPr>
-          <a:xfrm rot="0">
+          <p:cNvPr id="7" name="TextBox 7"/>
+          <p:cNvSpPr txBox="1"/>
+          <p:nvPr/>
+        </p:nvSpPr>
+        <p:spPr>
+          <a:xfrm>
             <a:off x="13358767" y="9394534"/>
             <a:ext cx="3900533" cy="246380"/>
           </a:xfrm>
@@ -8259,7 +8789,7 @@
           </a:prstGeom>
         </p:spPr>
         <p:txBody>
-          <a:bodyPr anchor="t" rtlCol="false" tIns="0" lIns="0" bIns="0" rIns="0">
+          <a:bodyPr lIns="0" tIns="0" rIns="0" bIns="0" rtlCol="0" anchor="t">
             <a:spAutoFit/>
           </a:bodyPr>
           <a:lstStyle/>
@@ -8286,12 +8816,12 @@
       </p:sp>
       <p:sp>
         <p:nvSpPr>
-          <p:cNvPr name="TextBox 8" id="8"/>
-          <p:cNvSpPr txBox="true"/>
-          <p:nvPr/>
-        </p:nvSpPr>
-        <p:spPr>
-          <a:xfrm rot="0">
+          <p:cNvPr id="8" name="TextBox 8"/>
+          <p:cNvSpPr txBox="1"/>
+          <p:nvPr/>
+        </p:nvSpPr>
+        <p:spPr>
+          <a:xfrm>
             <a:off x="5091802" y="4511948"/>
             <a:ext cx="8862852" cy="1621155"/>
           </a:xfrm>
@@ -8300,7 +8830,7 @@
           </a:prstGeom>
         </p:spPr>
         <p:txBody>
-          <a:bodyPr anchor="t" rtlCol="false" tIns="0" lIns="0" bIns="0" rIns="0">
+          <a:bodyPr lIns="0" tIns="0" rIns="0" bIns="0" rtlCol="0" anchor="t">
             <a:spAutoFit/>
           </a:bodyPr>
           <a:lstStyle/>
@@ -8334,13 +8864,14 @@
 </file>
 
 <file path=ppt/slides/slide8.xml><?xml version="1.0" encoding="utf-8"?>
-<p:sld xmlns:p="http://schemas.openxmlformats.org/presentationml/2006/main" xmlns:a="http://schemas.openxmlformats.org/drawingml/2006/main" xmlns:r="http://schemas.openxmlformats.org/officeDocument/2006/relationships">
+<p:sld xmlns:a="http://schemas.openxmlformats.org/drawingml/2006/main" xmlns:r="http://schemas.openxmlformats.org/officeDocument/2006/relationships" xmlns:p="http://schemas.openxmlformats.org/presentationml/2006/main">
   <p:cSld>
     <p:bg>
       <p:bgPr>
         <a:solidFill>
           <a:srgbClr val="023047"/>
         </a:solidFill>
+        <a:effectLst/>
       </p:bgPr>
     </p:bg>
     <p:spTree>
@@ -8359,7 +8890,7 @@
       </p:grpSpPr>
       <p:sp>
         <p:nvSpPr>
-          <p:cNvPr name="AutoShape 2" id="2"/>
+          <p:cNvPr id="2" name="AutoShape 2"/>
           <p:cNvSpPr/>
           <p:nvPr/>
         </p:nvSpPr>
@@ -8371,48 +8902,62 @@
           <a:prstGeom prst="line">
             <a:avLst/>
           </a:prstGeom>
-          <a:ln cap="flat" w="38100">
+          <a:ln w="38100" cap="flat">
             <a:solidFill>
               <a:srgbClr val="023047"/>
             </a:solidFill>
             <a:prstDash val="solid"/>
-            <a:headEnd type="none" len="sm" w="sm"/>
-            <a:tailEnd type="none" len="sm" w="sm"/>
+            <a:headEnd type="none" w="sm" len="sm"/>
+            <a:tailEnd type="none" w="sm" len="sm"/>
           </a:ln>
         </p:spPr>
-      </p:sp>
-      <p:sp>
-        <p:nvSpPr>
-          <p:cNvPr name="AutoShape 3" id="3"/>
+        <p:txBody>
+          <a:bodyPr/>
+          <a:lstStyle/>
+          <a:p>
+            <a:endParaRPr lang="fr-FR"/>
+          </a:p>
+        </p:txBody>
+      </p:sp>
+      <p:sp>
+        <p:nvSpPr>
+          <p:cNvPr id="3" name="AutoShape 3"/>
           <p:cNvSpPr/>
           <p:nvPr/>
         </p:nvSpPr>
         <p:spPr>
-          <a:xfrm flipV="true">
+          <a:xfrm flipV="1">
             <a:off x="1028700" y="9239250"/>
             <a:ext cx="16230600" cy="0"/>
           </a:xfrm>
           <a:prstGeom prst="line">
             <a:avLst/>
           </a:prstGeom>
-          <a:ln cap="flat" w="38100">
+          <a:ln w="38100" cap="flat">
             <a:solidFill>
               <a:srgbClr val="FFFFFF"/>
             </a:solidFill>
             <a:prstDash val="solid"/>
-            <a:headEnd type="none" len="sm" w="sm"/>
-            <a:tailEnd type="none" len="sm" w="sm"/>
+            <a:headEnd type="none" w="sm" len="sm"/>
+            <a:tailEnd type="none" w="sm" len="sm"/>
           </a:ln>
         </p:spPr>
-      </p:sp>
-      <p:sp>
-        <p:nvSpPr>
-          <p:cNvPr name="Freeform 4" id="4"/>
+        <p:txBody>
+          <a:bodyPr/>
+          <a:lstStyle/>
+          <a:p>
+            <a:endParaRPr lang="fr-FR"/>
+          </a:p>
+        </p:txBody>
+      </p:sp>
+      <p:sp>
+        <p:nvSpPr>
+          <p:cNvPr id="4" name="Freeform 4"/>
           <p:cNvSpPr/>
           <p:nvPr/>
         </p:nvSpPr>
         <p:spPr>
-          <a:xfrm flipH="false" flipV="false" rot="0">
+          <a:xfrm>
             <a:off x="-4399197" y="5208160"/>
             <a:ext cx="5107990" cy="873002"/>
           </a:xfrm>
@@ -8421,9 +8966,9 @@
             <a:gdLst/>
             <a:ahLst/>
             <a:cxnLst/>
-            <a:rect r="r" b="b" t="t" l="l"/>
+            <a:rect l="l" t="t" r="r" b="b"/>
             <a:pathLst>
-              <a:path h="873002" w="5107990">
+              <a:path w="5107990" h="873002">
                 <a:moveTo>
                   <a:pt x="0" y="0"/>
                 </a:moveTo>
@@ -8452,19 +8997,26 @@
               </a:extLst>
             </a:blip>
             <a:stretch>
-              <a:fillRect l="0" t="0" r="0" b="0"/>
+              <a:fillRect/>
             </a:stretch>
           </a:blipFill>
         </p:spPr>
-      </p:sp>
-      <p:sp>
-        <p:nvSpPr>
-          <p:cNvPr name="TextBox 5" id="5"/>
-          <p:cNvSpPr txBox="true"/>
-          <p:nvPr/>
-        </p:nvSpPr>
-        <p:spPr>
-          <a:xfrm rot="0">
+        <p:txBody>
+          <a:bodyPr/>
+          <a:lstStyle/>
+          <a:p>
+            <a:endParaRPr lang="fr-FR"/>
+          </a:p>
+        </p:txBody>
+      </p:sp>
+      <p:sp>
+        <p:nvSpPr>
+          <p:cNvPr id="5" name="TextBox 5"/>
+          <p:cNvSpPr txBox="1"/>
+          <p:nvPr/>
+        </p:nvSpPr>
+        <p:spPr>
+          <a:xfrm>
             <a:off x="13358767" y="9394534"/>
             <a:ext cx="3900533" cy="246380"/>
           </a:xfrm>
@@ -8473,7 +9025,7 @@
           </a:prstGeom>
         </p:spPr>
         <p:txBody>
-          <a:bodyPr anchor="t" rtlCol="false" tIns="0" lIns="0" bIns="0" rIns="0">
+          <a:bodyPr lIns="0" tIns="0" rIns="0" bIns="0" rtlCol="0" anchor="t">
             <a:spAutoFit/>
           </a:bodyPr>
           <a:lstStyle/>
@@ -8500,12 +9052,12 @@
       </p:sp>
       <p:sp>
         <p:nvSpPr>
-          <p:cNvPr name="TextBox 6" id="6"/>
-          <p:cNvSpPr txBox="true"/>
-          <p:nvPr/>
-        </p:nvSpPr>
-        <p:spPr>
-          <a:xfrm rot="0">
+          <p:cNvPr id="6" name="TextBox 6"/>
+          <p:cNvSpPr txBox="1"/>
+          <p:nvPr/>
+        </p:nvSpPr>
+        <p:spPr>
+          <a:xfrm>
             <a:off x="13358767" y="9394534"/>
             <a:ext cx="3900533" cy="246380"/>
           </a:xfrm>
@@ -8514,7 +9066,7 @@
           </a:prstGeom>
         </p:spPr>
         <p:txBody>
-          <a:bodyPr anchor="t" rtlCol="false" tIns="0" lIns="0" bIns="0" rIns="0">
+          <a:bodyPr lIns="0" tIns="0" rIns="0" bIns="0" rtlCol="0" anchor="t">
             <a:spAutoFit/>
           </a:bodyPr>
           <a:lstStyle/>
@@ -8541,12 +9093,12 @@
       </p:sp>
       <p:sp>
         <p:nvSpPr>
-          <p:cNvPr name="Freeform 7" id="7"/>
+          <p:cNvPr id="7" name="Freeform 7"/>
           <p:cNvSpPr/>
           <p:nvPr/>
         </p:nvSpPr>
         <p:spPr>
-          <a:xfrm flipH="true" flipV="false" rot="0">
+          <a:xfrm flipH="1">
             <a:off x="-226403" y="-588069"/>
             <a:ext cx="5471403" cy="4446255"/>
           </a:xfrm>
@@ -8555,9 +9107,9 @@
             <a:gdLst/>
             <a:ahLst/>
             <a:cxnLst/>
-            <a:rect r="r" b="b" t="t" l="l"/>
+            <a:rect l="l" t="t" r="r" b="b"/>
             <a:pathLst>
-              <a:path h="4446255" w="5471403">
+              <a:path w="5471403" h="4446255">
                 <a:moveTo>
                   <a:pt x="5471403" y="0"/>
                 </a:moveTo>
@@ -8586,19 +9138,26 @@
               </a:extLst>
             </a:blip>
             <a:stretch>
-              <a:fillRect l="0" t="0" r="0" b="0"/>
+              <a:fillRect/>
             </a:stretch>
           </a:blipFill>
         </p:spPr>
-      </p:sp>
-      <p:sp>
-        <p:nvSpPr>
-          <p:cNvPr name="TextBox 8" id="8"/>
-          <p:cNvSpPr txBox="true"/>
-          <p:nvPr/>
-        </p:nvSpPr>
-        <p:spPr>
-          <a:xfrm rot="0">
+        <p:txBody>
+          <a:bodyPr/>
+          <a:lstStyle/>
+          <a:p>
+            <a:endParaRPr lang="fr-FR"/>
+          </a:p>
+        </p:txBody>
+      </p:sp>
+      <p:sp>
+        <p:nvSpPr>
+          <p:cNvPr id="8" name="TextBox 8"/>
+          <p:cNvSpPr txBox="1"/>
+          <p:nvPr/>
+        </p:nvSpPr>
+        <p:spPr>
+          <a:xfrm>
             <a:off x="7380396" y="452437"/>
             <a:ext cx="5809898" cy="1143000"/>
           </a:xfrm>
@@ -8607,7 +9166,7 @@
           </a:prstGeom>
         </p:spPr>
         <p:txBody>
-          <a:bodyPr anchor="t" rtlCol="false" tIns="0" lIns="0" bIns="0" rIns="0">
+          <a:bodyPr lIns="0" tIns="0" rIns="0" bIns="0" rtlCol="0" anchor="t">
             <a:spAutoFit/>
           </a:bodyPr>
           <a:lstStyle/>
@@ -8634,12 +9193,12 @@
       </p:sp>
       <p:sp>
         <p:nvSpPr>
-          <p:cNvPr name="TextBox 9" id="9"/>
-          <p:cNvSpPr txBox="true"/>
-          <p:nvPr/>
-        </p:nvSpPr>
-        <p:spPr>
-          <a:xfrm rot="0">
+          <p:cNvPr id="9" name="TextBox 9"/>
+          <p:cNvSpPr txBox="1"/>
+          <p:nvPr/>
+        </p:nvSpPr>
+        <p:spPr>
+          <a:xfrm>
             <a:off x="2841089" y="1597771"/>
             <a:ext cx="12990073" cy="7011228"/>
           </a:xfrm>
@@ -8648,19 +9207,19 @@
           </a:prstGeom>
         </p:spPr>
         <p:txBody>
-          <a:bodyPr anchor="t" rtlCol="false" tIns="0" lIns="0" bIns="0" rIns="0">
+          <a:bodyPr lIns="0" tIns="0" rIns="0" bIns="0" rtlCol="0" anchor="t">
             <a:spAutoFit/>
           </a:bodyPr>
           <a:lstStyle/>
           <a:p>
-            <a:pPr algn="l" marL="347679" indent="-173839" lvl="1">
+            <a:pPr marL="347679" lvl="1" indent="-173839" algn="l">
               <a:lnSpc>
                 <a:spcPts val="4025"/>
               </a:lnSpc>
-              <a:buAutoNum type="arabicPeriod" startAt="1"/>
+              <a:buAutoNum type="arabicPeriod"/>
             </a:pPr>
             <a:r>
-              <a:rPr lang="en-US" sz="1610" spc="-80" u="sng">
+              <a:rPr lang="en-US" sz="1610" u="sng" spc="-80">
                 <a:solidFill>
                   <a:srgbClr val="FFFFFF"/>
                 </a:solidFill>
@@ -8674,14 +9233,14 @@
             </a:r>
           </a:p>
           <a:p>
-            <a:pPr algn="l" marL="347679" indent="-173839" lvl="1">
+            <a:pPr marL="347679" lvl="1" indent="-173839" algn="l">
               <a:lnSpc>
                 <a:spcPts val="4025"/>
               </a:lnSpc>
-              <a:buAutoNum type="arabicPeriod" startAt="1"/>
+              <a:buAutoNum type="arabicPeriod"/>
             </a:pPr>
             <a:r>
-              <a:rPr lang="en-US" sz="1610" spc="-80" u="sng">
+              <a:rPr lang="en-US" sz="1610" u="sng" spc="-80">
                 <a:solidFill>
                   <a:srgbClr val="FFFFFF"/>
                 </a:solidFill>
@@ -8695,14 +9254,14 @@
             </a:r>
           </a:p>
           <a:p>
-            <a:pPr algn="l" marL="347679" indent="-173839" lvl="1">
+            <a:pPr marL="347679" lvl="1" indent="-173839" algn="l">
               <a:lnSpc>
                 <a:spcPts val="4025"/>
               </a:lnSpc>
-              <a:buAutoNum type="arabicPeriod" startAt="1"/>
+              <a:buAutoNum type="arabicPeriod"/>
             </a:pPr>
             <a:r>
-              <a:rPr lang="en-US" sz="1610" spc="-80" u="sng">
+              <a:rPr lang="en-US" sz="1610" u="sng" spc="-80">
                 <a:solidFill>
                   <a:srgbClr val="FFFFFF"/>
                 </a:solidFill>
@@ -8716,14 +9275,14 @@
             </a:r>
           </a:p>
           <a:p>
-            <a:pPr algn="l" marL="347679" indent="-173839" lvl="1">
+            <a:pPr marL="347679" lvl="1" indent="-173839" algn="l">
               <a:lnSpc>
                 <a:spcPts val="4025"/>
               </a:lnSpc>
-              <a:buAutoNum type="arabicPeriod" startAt="1"/>
+              <a:buAutoNum type="arabicPeriod"/>
             </a:pPr>
             <a:r>
-              <a:rPr lang="en-US" sz="1610" spc="-80" u="sng">
+              <a:rPr lang="en-US" sz="1610" u="sng" spc="-80">
                 <a:solidFill>
                   <a:srgbClr val="FFFFFF"/>
                 </a:solidFill>
@@ -8737,14 +9296,14 @@
             </a:r>
           </a:p>
           <a:p>
-            <a:pPr algn="l" marL="347679" indent="-173839" lvl="1">
+            <a:pPr marL="347679" lvl="1" indent="-173839" algn="l">
               <a:lnSpc>
                 <a:spcPts val="4025"/>
               </a:lnSpc>
-              <a:buAutoNum type="arabicPeriod" startAt="1"/>
+              <a:buAutoNum type="arabicPeriod"/>
             </a:pPr>
             <a:r>
-              <a:rPr lang="en-US" sz="1610" spc="-80" u="sng">
+              <a:rPr lang="en-US" sz="1610" u="sng" spc="-80">
                 <a:solidFill>
                   <a:srgbClr val="FFFFFF"/>
                 </a:solidFill>
@@ -8758,14 +9317,14 @@
             </a:r>
           </a:p>
           <a:p>
-            <a:pPr algn="l" marL="347679" indent="-173839" lvl="1">
+            <a:pPr marL="347679" lvl="1" indent="-173839" algn="l">
               <a:lnSpc>
                 <a:spcPts val="4025"/>
               </a:lnSpc>
-              <a:buAutoNum type="arabicPeriod" startAt="1"/>
+              <a:buAutoNum type="arabicPeriod"/>
             </a:pPr>
             <a:r>
-              <a:rPr lang="en-US" sz="1610" spc="-80" u="sng">
+              <a:rPr lang="en-US" sz="1610" u="sng" spc="-80">
                 <a:solidFill>
                   <a:srgbClr val="FFFFFF"/>
                 </a:solidFill>
@@ -8779,14 +9338,14 @@
             </a:r>
           </a:p>
           <a:p>
-            <a:pPr algn="l" marL="347679" indent="-173839" lvl="1">
+            <a:pPr marL="347679" lvl="1" indent="-173839" algn="l">
               <a:lnSpc>
                 <a:spcPts val="4025"/>
               </a:lnSpc>
-              <a:buAutoNum type="arabicPeriod" startAt="1"/>
+              <a:buAutoNum type="arabicPeriod"/>
             </a:pPr>
             <a:r>
-              <a:rPr lang="en-US" sz="1610" spc="-80" u="sng">
+              <a:rPr lang="en-US" sz="1610" u="sng" spc="-80">
                 <a:solidFill>
                   <a:srgbClr val="FFFFFF"/>
                 </a:solidFill>
@@ -8800,14 +9359,14 @@
             </a:r>
           </a:p>
           <a:p>
-            <a:pPr algn="l" marL="347679" indent="-173839" lvl="1">
+            <a:pPr marL="347679" lvl="1" indent="-173839" algn="l">
               <a:lnSpc>
                 <a:spcPts val="4025"/>
               </a:lnSpc>
-              <a:buAutoNum type="arabicPeriod" startAt="1"/>
+              <a:buAutoNum type="arabicPeriod"/>
             </a:pPr>
             <a:r>
-              <a:rPr lang="en-US" sz="1610" spc="-80" u="sng">
+              <a:rPr lang="en-US" sz="1610" u="sng" spc="-80">
                 <a:solidFill>
                   <a:srgbClr val="FFFFFF"/>
                 </a:solidFill>
@@ -8821,14 +9380,14 @@
             </a:r>
           </a:p>
           <a:p>
-            <a:pPr algn="l" marL="347679" indent="-173839" lvl="1">
+            <a:pPr marL="347679" lvl="1" indent="-173839" algn="l">
               <a:lnSpc>
                 <a:spcPts val="4025"/>
               </a:lnSpc>
-              <a:buAutoNum type="arabicPeriod" startAt="1"/>
+              <a:buAutoNum type="arabicPeriod"/>
             </a:pPr>
             <a:r>
-              <a:rPr lang="en-US" sz="1610" spc="-80" u="sng">
+              <a:rPr lang="en-US" sz="1610" u="sng" spc="-80">
                 <a:solidFill>
                   <a:srgbClr val="FFFFFF"/>
                 </a:solidFill>
@@ -8842,14 +9401,14 @@
             </a:r>
           </a:p>
           <a:p>
-            <a:pPr algn="l" marL="347679" indent="-173839" lvl="1">
+            <a:pPr marL="347679" lvl="1" indent="-173839" algn="l">
               <a:lnSpc>
                 <a:spcPts val="4025"/>
               </a:lnSpc>
-              <a:buAutoNum type="arabicPeriod" startAt="1"/>
+              <a:buAutoNum type="arabicPeriod"/>
             </a:pPr>
             <a:r>
-              <a:rPr lang="en-US" sz="1610" spc="-80" u="sng">
+              <a:rPr lang="en-US" sz="1610" u="sng" spc="-80">
                 <a:solidFill>
                   <a:srgbClr val="FFFFFF"/>
                 </a:solidFill>
@@ -8863,14 +9422,14 @@
             </a:r>
           </a:p>
           <a:p>
-            <a:pPr algn="l" marL="347679" indent="-173839" lvl="1">
+            <a:pPr marL="347679" lvl="1" indent="-173839" algn="l">
               <a:lnSpc>
                 <a:spcPts val="4025"/>
               </a:lnSpc>
-              <a:buAutoNum type="arabicPeriod" startAt="1"/>
+              <a:buAutoNum type="arabicPeriod"/>
             </a:pPr>
             <a:r>
-              <a:rPr lang="en-US" sz="1610" spc="-80" u="sng">
+              <a:rPr lang="en-US" sz="1610" u="sng" spc="-80">
                 <a:solidFill>
                   <a:srgbClr val="FFFFFF"/>
                 </a:solidFill>
@@ -8884,14 +9443,14 @@
             </a:r>
           </a:p>
           <a:p>
-            <a:pPr algn="l" marL="347679" indent="-173839" lvl="1">
+            <a:pPr marL="347679" lvl="1" indent="-173839" algn="l">
               <a:lnSpc>
                 <a:spcPts val="4025"/>
               </a:lnSpc>
-              <a:buAutoNum type="arabicPeriod" startAt="1"/>
+              <a:buAutoNum type="arabicPeriod"/>
             </a:pPr>
             <a:r>
-              <a:rPr lang="en-US" sz="1610" spc="-80" u="sng">
+              <a:rPr lang="en-US" sz="1610" u="sng" spc="-80">
                 <a:solidFill>
                   <a:srgbClr val="FFFFFF"/>
                 </a:solidFill>
@@ -8905,14 +9464,14 @@
             </a:r>
           </a:p>
           <a:p>
-            <a:pPr algn="l" marL="347679" indent="-173839" lvl="1">
+            <a:pPr marL="347679" lvl="1" indent="-173839" algn="l">
               <a:lnSpc>
                 <a:spcPts val="4025"/>
               </a:lnSpc>
-              <a:buAutoNum type="arabicPeriod" startAt="1"/>
+              <a:buAutoNum type="arabicPeriod"/>
             </a:pPr>
             <a:r>
-              <a:rPr lang="en-US" sz="1610" spc="-80" u="sng">
+              <a:rPr lang="en-US" sz="1610" u="sng" spc="-80">
                 <a:solidFill>
                   <a:srgbClr val="FFFFFF"/>
                 </a:solidFill>
